--- a/Wavecon-Telecom-5G-Business-Impact-Analysis.pptx
+++ b/Wavecon-Telecom-5G-Business-Impact-Analysis.pptx
@@ -2,7 +2,7 @@
 <file path=ppt/presentation.xml><?xml version="1.0" encoding="utf-8"?>
 <p:presentation xmlns:a="http://schemas.openxmlformats.org/drawingml/2006/main" xmlns:r="http://schemas.openxmlformats.org/officeDocument/2006/relationships" xmlns:p="http://schemas.openxmlformats.org/presentationml/2006/main" embedTrueTypeFonts="1" saveSubsetFonts="1" autoCompressPictures="0">
   <p:sldMasterIdLst>
-    <p:sldMasterId id="2147483726" r:id="rId1"/>
+    <p:sldMasterId id="2147483804" r:id="rId1"/>
   </p:sldMasterIdLst>
   <p:notesMasterIdLst>
     <p:notesMasterId r:id="rId13"/>
@@ -24,23 +24,27 @@
   <p:notesSz cx="5143500" cy="9144000"/>
   <p:embeddedFontLst>
     <p:embeddedFont>
-      <p:font typeface="Gill Sans MT" panose="020B0502020104020203" pitchFamily="34" charset="0"/>
+      <p:font typeface="Inter" panose="020B0604020202020204" charset="0"/>
       <p:regular r:id="rId14"/>
-      <p:bold r:id="rId15"/>
-      <p:italic r:id="rId16"/>
-      <p:boldItalic r:id="rId17"/>
-    </p:embeddedFont>
-    <p:embeddedFont>
-      <p:font typeface="Inter" panose="020B0604020202020204" charset="0"/>
-      <p:regular r:id="rId18"/>
     </p:embeddedFont>
     <p:embeddedFont>
       <p:font typeface="Manrope" panose="020B0604020202020204" charset="0"/>
-      <p:regular r:id="rId19"/>
+      <p:regular r:id="rId15"/>
     </p:embeddedFont>
     <p:embeddedFont>
       <p:font typeface="Manrope Bold" panose="020B0604020202020204" charset="0"/>
-      <p:regular r:id="rId20"/>
+      <p:regular r:id="rId16"/>
+    </p:embeddedFont>
+    <p:embeddedFont>
+      <p:font typeface="Trebuchet MS" panose="020B0603020202020204" pitchFamily="34" charset="0"/>
+      <p:regular r:id="rId17"/>
+      <p:bold r:id="rId18"/>
+      <p:italic r:id="rId19"/>
+      <p:boldItalic r:id="rId20"/>
+    </p:embeddedFont>
+    <p:embeddedFont>
+      <p:font typeface="Wingdings 3" panose="05040102010807070707" pitchFamily="18" charset="2"/>
+      <p:regular r:id="rId21"/>
     </p:embeddedFont>
   </p:embeddedFontLst>
   <p:defaultTextStyle>
@@ -1112,7 +1116,7 @@
 </file>
 
 <file path=ppt/slideLayouts/slideLayout1.xml><?xml version="1.0" encoding="utf-8"?>
-<p:sldLayout xmlns:a="http://schemas.openxmlformats.org/drawingml/2006/main" xmlns:r="http://schemas.openxmlformats.org/officeDocument/2006/relationships" xmlns:p="http://schemas.openxmlformats.org/presentationml/2006/main" type="title" preserve="1">
+<p:sldLayout xmlns:a="http://schemas.openxmlformats.org/drawingml/2006/main" xmlns:r="http://schemas.openxmlformats.org/officeDocument/2006/relationships" xmlns:p="http://schemas.openxmlformats.org/presentationml/2006/main" showMasterSp="0" type="title" preserve="1">
   <p:cSld name="Title Slide">
     <p:spTree>
       <p:nvGrpSpPr>
@@ -1128,6 +1132,536 @@
           <a:chExt cx="0" cy="0"/>
         </a:xfrm>
       </p:grpSpPr>
+      <p:grpSp>
+        <p:nvGrpSpPr>
+          <p:cNvPr id="7" name="Group 6"/>
+          <p:cNvGrpSpPr/>
+          <p:nvPr/>
+        </p:nvGrpSpPr>
+        <p:grpSpPr>
+          <a:xfrm>
+            <a:off x="0" y="-6350"/>
+            <a:ext cx="9144000" cy="5149850"/>
+            <a:chOff x="0" y="-8467"/>
+            <a:chExt cx="12192000" cy="6866467"/>
+          </a:xfrm>
+        </p:grpSpPr>
+        <p:cxnSp>
+          <p:nvCxnSpPr>
+            <p:cNvPr id="32" name="Straight Connector 31"/>
+            <p:cNvCxnSpPr/>
+            <p:nvPr/>
+          </p:nvCxnSpPr>
+          <p:spPr>
+            <a:xfrm>
+              <a:off x="9371012" y="0"/>
+              <a:ext cx="1219200" cy="6858000"/>
+            </a:xfrm>
+            <a:prstGeom prst="line">
+              <a:avLst/>
+            </a:prstGeom>
+            <a:ln w="9525">
+              <a:solidFill>
+                <a:schemeClr val="bg1">
+                  <a:lumMod val="75000"/>
+                </a:schemeClr>
+              </a:solidFill>
+            </a:ln>
+          </p:spPr>
+          <p:style>
+            <a:lnRef idx="2">
+              <a:schemeClr val="accent1"/>
+            </a:lnRef>
+            <a:fillRef idx="0">
+              <a:schemeClr val="accent1"/>
+            </a:fillRef>
+            <a:effectRef idx="1">
+              <a:schemeClr val="accent1"/>
+            </a:effectRef>
+            <a:fontRef idx="minor">
+              <a:schemeClr val="tx1"/>
+            </a:fontRef>
+          </p:style>
+        </p:cxnSp>
+        <p:cxnSp>
+          <p:nvCxnSpPr>
+            <p:cNvPr id="21" name="Straight Connector 20"/>
+            <p:cNvCxnSpPr/>
+            <p:nvPr/>
+          </p:nvCxnSpPr>
+          <p:spPr>
+            <a:xfrm flipH="1">
+              <a:off x="7425267" y="3681413"/>
+              <a:ext cx="4763558" cy="3176587"/>
+            </a:xfrm>
+            <a:prstGeom prst="line">
+              <a:avLst/>
+            </a:prstGeom>
+            <a:ln w="9525">
+              <a:solidFill>
+                <a:schemeClr val="bg1">
+                  <a:lumMod val="85000"/>
+                </a:schemeClr>
+              </a:solidFill>
+            </a:ln>
+          </p:spPr>
+          <p:style>
+            <a:lnRef idx="2">
+              <a:schemeClr val="accent1"/>
+            </a:lnRef>
+            <a:fillRef idx="0">
+              <a:schemeClr val="accent1"/>
+            </a:fillRef>
+            <a:effectRef idx="1">
+              <a:schemeClr val="accent1"/>
+            </a:effectRef>
+            <a:fontRef idx="minor">
+              <a:schemeClr val="tx1"/>
+            </a:fontRef>
+          </p:style>
+        </p:cxnSp>
+        <p:sp>
+          <p:nvSpPr>
+            <p:cNvPr id="24" name="Rectangle 23"/>
+            <p:cNvSpPr/>
+            <p:nvPr/>
+          </p:nvSpPr>
+          <p:spPr>
+            <a:xfrm>
+              <a:off x="9181476" y="-8467"/>
+              <a:ext cx="3007349" cy="6866467"/>
+            </a:xfrm>
+            <a:custGeom>
+              <a:avLst/>
+              <a:gdLst/>
+              <a:ahLst/>
+              <a:cxnLst/>
+              <a:rect l="l" t="t" r="r" b="b"/>
+              <a:pathLst>
+                <a:path w="3007349" h="6866467">
+                  <a:moveTo>
+                    <a:pt x="2045532" y="0"/>
+                  </a:moveTo>
+                  <a:lnTo>
+                    <a:pt x="3007349" y="0"/>
+                  </a:lnTo>
+                  <a:lnTo>
+                    <a:pt x="3007349" y="6866467"/>
+                  </a:lnTo>
+                  <a:lnTo>
+                    <a:pt x="0" y="6866467"/>
+                  </a:lnTo>
+                  <a:lnTo>
+                    <a:pt x="2045532" y="0"/>
+                  </a:lnTo>
+                  <a:close/>
+                </a:path>
+              </a:pathLst>
+            </a:custGeom>
+            <a:solidFill>
+              <a:schemeClr val="accent1">
+                <a:alpha val="30000"/>
+              </a:schemeClr>
+            </a:solidFill>
+            <a:ln>
+              <a:noFill/>
+            </a:ln>
+            <a:effectLst/>
+          </p:spPr>
+          <p:style>
+            <a:lnRef idx="1">
+              <a:schemeClr val="accent1"/>
+            </a:lnRef>
+            <a:fillRef idx="3">
+              <a:schemeClr val="accent1"/>
+            </a:fillRef>
+            <a:effectRef idx="2">
+              <a:schemeClr val="accent1"/>
+            </a:effectRef>
+            <a:fontRef idx="minor">
+              <a:schemeClr val="lt1"/>
+            </a:fontRef>
+          </p:style>
+        </p:sp>
+        <p:sp>
+          <p:nvSpPr>
+            <p:cNvPr id="26" name="Rectangle 25"/>
+            <p:cNvSpPr/>
+            <p:nvPr/>
+          </p:nvSpPr>
+          <p:spPr>
+            <a:xfrm>
+              <a:off x="9603442" y="-8467"/>
+              <a:ext cx="2588558" cy="6866467"/>
+            </a:xfrm>
+            <a:custGeom>
+              <a:avLst/>
+              <a:gdLst/>
+              <a:ahLst/>
+              <a:cxnLst/>
+              <a:rect l="l" t="t" r="r" b="b"/>
+              <a:pathLst>
+                <a:path w="2573311" h="6866467">
+                  <a:moveTo>
+                    <a:pt x="0" y="0"/>
+                  </a:moveTo>
+                  <a:lnTo>
+                    <a:pt x="2573311" y="0"/>
+                  </a:lnTo>
+                  <a:lnTo>
+                    <a:pt x="2573311" y="6866467"/>
+                  </a:lnTo>
+                  <a:lnTo>
+                    <a:pt x="1202336" y="6866467"/>
+                  </a:lnTo>
+                  <a:lnTo>
+                    <a:pt x="0" y="0"/>
+                  </a:lnTo>
+                  <a:close/>
+                </a:path>
+              </a:pathLst>
+            </a:custGeom>
+            <a:solidFill>
+              <a:schemeClr val="accent1">
+                <a:alpha val="20000"/>
+              </a:schemeClr>
+            </a:solidFill>
+            <a:ln>
+              <a:noFill/>
+            </a:ln>
+            <a:effectLst/>
+          </p:spPr>
+          <p:style>
+            <a:lnRef idx="1">
+              <a:schemeClr val="accent1"/>
+            </a:lnRef>
+            <a:fillRef idx="3">
+              <a:schemeClr val="accent1"/>
+            </a:fillRef>
+            <a:effectRef idx="2">
+              <a:schemeClr val="accent1"/>
+            </a:effectRef>
+            <a:fontRef idx="minor">
+              <a:schemeClr val="lt1"/>
+            </a:fontRef>
+          </p:style>
+        </p:sp>
+        <p:sp>
+          <p:nvSpPr>
+            <p:cNvPr id="27" name="Isosceles Triangle 26"/>
+            <p:cNvSpPr/>
+            <p:nvPr/>
+          </p:nvSpPr>
+          <p:spPr>
+            <a:xfrm>
+              <a:off x="8932333" y="3048000"/>
+              <a:ext cx="3259667" cy="3810000"/>
+            </a:xfrm>
+            <a:prstGeom prst="triangle">
+              <a:avLst>
+                <a:gd name="adj" fmla="val 100000"/>
+              </a:avLst>
+            </a:prstGeom>
+            <a:solidFill>
+              <a:schemeClr val="accent2">
+                <a:alpha val="72000"/>
+              </a:schemeClr>
+            </a:solidFill>
+            <a:ln>
+              <a:noFill/>
+            </a:ln>
+            <a:effectLst/>
+          </p:spPr>
+          <p:style>
+            <a:lnRef idx="1">
+              <a:schemeClr val="accent1"/>
+            </a:lnRef>
+            <a:fillRef idx="3">
+              <a:schemeClr val="accent1"/>
+            </a:fillRef>
+            <a:effectRef idx="2">
+              <a:schemeClr val="accent1"/>
+            </a:effectRef>
+            <a:fontRef idx="minor">
+              <a:schemeClr val="lt1"/>
+            </a:fontRef>
+          </p:style>
+        </p:sp>
+        <p:sp>
+          <p:nvSpPr>
+            <p:cNvPr id="28" name="Rectangle 27"/>
+            <p:cNvSpPr/>
+            <p:nvPr/>
+          </p:nvSpPr>
+          <p:spPr>
+            <a:xfrm>
+              <a:off x="9334500" y="-8467"/>
+              <a:ext cx="2854326" cy="6866467"/>
+            </a:xfrm>
+            <a:custGeom>
+              <a:avLst/>
+              <a:gdLst/>
+              <a:ahLst/>
+              <a:cxnLst/>
+              <a:rect l="l" t="t" r="r" b="b"/>
+              <a:pathLst>
+                <a:path w="2858013" h="6866467">
+                  <a:moveTo>
+                    <a:pt x="0" y="0"/>
+                  </a:moveTo>
+                  <a:lnTo>
+                    <a:pt x="2858013" y="0"/>
+                  </a:lnTo>
+                  <a:lnTo>
+                    <a:pt x="2858013" y="6866467"/>
+                  </a:lnTo>
+                  <a:lnTo>
+                    <a:pt x="2473942" y="6866467"/>
+                  </a:lnTo>
+                  <a:lnTo>
+                    <a:pt x="0" y="0"/>
+                  </a:lnTo>
+                  <a:close/>
+                </a:path>
+              </a:pathLst>
+            </a:custGeom>
+            <a:solidFill>
+              <a:schemeClr val="accent2">
+                <a:lumMod val="75000"/>
+                <a:alpha val="70000"/>
+              </a:schemeClr>
+            </a:solidFill>
+            <a:ln>
+              <a:noFill/>
+            </a:ln>
+            <a:effectLst/>
+          </p:spPr>
+          <p:style>
+            <a:lnRef idx="1">
+              <a:schemeClr val="accent1"/>
+            </a:lnRef>
+            <a:fillRef idx="3">
+              <a:schemeClr val="accent1"/>
+            </a:fillRef>
+            <a:effectRef idx="2">
+              <a:schemeClr val="accent1"/>
+            </a:effectRef>
+            <a:fontRef idx="minor">
+              <a:schemeClr val="lt1"/>
+            </a:fontRef>
+          </p:style>
+        </p:sp>
+        <p:sp>
+          <p:nvSpPr>
+            <p:cNvPr id="29" name="Rectangle 28"/>
+            <p:cNvSpPr/>
+            <p:nvPr/>
+          </p:nvSpPr>
+          <p:spPr>
+            <a:xfrm>
+              <a:off x="10898730" y="-8467"/>
+              <a:ext cx="1290094" cy="6866467"/>
+            </a:xfrm>
+            <a:custGeom>
+              <a:avLst/>
+              <a:gdLst/>
+              <a:ahLst/>
+              <a:cxnLst/>
+              <a:rect l="l" t="t" r="r" b="b"/>
+              <a:pathLst>
+                <a:path w="1290094" h="6858000">
+                  <a:moveTo>
+                    <a:pt x="1019735" y="0"/>
+                  </a:moveTo>
+                  <a:lnTo>
+                    <a:pt x="1290094" y="0"/>
+                  </a:lnTo>
+                  <a:lnTo>
+                    <a:pt x="1290094" y="6858000"/>
+                  </a:lnTo>
+                  <a:lnTo>
+                    <a:pt x="0" y="6858000"/>
+                  </a:lnTo>
+                  <a:lnTo>
+                    <a:pt x="1019735" y="0"/>
+                  </a:lnTo>
+                  <a:close/>
+                </a:path>
+              </a:pathLst>
+            </a:custGeom>
+            <a:solidFill>
+              <a:schemeClr val="accent1">
+                <a:lumMod val="60000"/>
+                <a:lumOff val="40000"/>
+                <a:alpha val="70000"/>
+              </a:schemeClr>
+            </a:solidFill>
+            <a:ln>
+              <a:noFill/>
+            </a:ln>
+            <a:effectLst/>
+          </p:spPr>
+          <p:style>
+            <a:lnRef idx="1">
+              <a:schemeClr val="accent1"/>
+            </a:lnRef>
+            <a:fillRef idx="3">
+              <a:schemeClr val="accent1"/>
+            </a:fillRef>
+            <a:effectRef idx="2">
+              <a:schemeClr val="accent1"/>
+            </a:effectRef>
+            <a:fontRef idx="minor">
+              <a:schemeClr val="lt1"/>
+            </a:fontRef>
+          </p:style>
+        </p:sp>
+        <p:sp>
+          <p:nvSpPr>
+            <p:cNvPr id="30" name="Rectangle 29"/>
+            <p:cNvSpPr/>
+            <p:nvPr/>
+          </p:nvSpPr>
+          <p:spPr>
+            <a:xfrm>
+              <a:off x="10938999" y="-8467"/>
+              <a:ext cx="1249825" cy="6866467"/>
+            </a:xfrm>
+            <a:custGeom>
+              <a:avLst/>
+              <a:gdLst/>
+              <a:ahLst/>
+              <a:cxnLst/>
+              <a:rect l="l" t="t" r="r" b="b"/>
+              <a:pathLst>
+                <a:path w="1249825" h="6858000">
+                  <a:moveTo>
+                    <a:pt x="0" y="0"/>
+                  </a:moveTo>
+                  <a:lnTo>
+                    <a:pt x="1249825" y="0"/>
+                  </a:lnTo>
+                  <a:lnTo>
+                    <a:pt x="1249825" y="6858000"/>
+                  </a:lnTo>
+                  <a:lnTo>
+                    <a:pt x="1109382" y="6858000"/>
+                  </a:lnTo>
+                  <a:lnTo>
+                    <a:pt x="0" y="0"/>
+                  </a:lnTo>
+                  <a:close/>
+                </a:path>
+              </a:pathLst>
+            </a:custGeom>
+            <a:solidFill>
+              <a:schemeClr val="accent1">
+                <a:alpha val="65000"/>
+              </a:schemeClr>
+            </a:solidFill>
+            <a:ln>
+              <a:noFill/>
+            </a:ln>
+            <a:effectLst/>
+          </p:spPr>
+          <p:style>
+            <a:lnRef idx="1">
+              <a:schemeClr val="accent1"/>
+            </a:lnRef>
+            <a:fillRef idx="3">
+              <a:schemeClr val="accent1"/>
+            </a:fillRef>
+            <a:effectRef idx="2">
+              <a:schemeClr val="accent1"/>
+            </a:effectRef>
+            <a:fontRef idx="minor">
+              <a:schemeClr val="lt1"/>
+            </a:fontRef>
+          </p:style>
+        </p:sp>
+        <p:sp>
+          <p:nvSpPr>
+            <p:cNvPr id="31" name="Isosceles Triangle 30"/>
+            <p:cNvSpPr/>
+            <p:nvPr/>
+          </p:nvSpPr>
+          <p:spPr>
+            <a:xfrm>
+              <a:off x="10371666" y="3589867"/>
+              <a:ext cx="1817159" cy="3268133"/>
+            </a:xfrm>
+            <a:prstGeom prst="triangle">
+              <a:avLst>
+                <a:gd name="adj" fmla="val 100000"/>
+              </a:avLst>
+            </a:prstGeom>
+            <a:solidFill>
+              <a:schemeClr val="accent1">
+                <a:alpha val="80000"/>
+              </a:schemeClr>
+            </a:solidFill>
+            <a:ln>
+              <a:noFill/>
+            </a:ln>
+            <a:effectLst/>
+          </p:spPr>
+          <p:style>
+            <a:lnRef idx="1">
+              <a:schemeClr val="accent1"/>
+            </a:lnRef>
+            <a:fillRef idx="3">
+              <a:schemeClr val="accent1"/>
+            </a:fillRef>
+            <a:effectRef idx="2">
+              <a:schemeClr val="accent1"/>
+            </a:effectRef>
+            <a:fontRef idx="minor">
+              <a:schemeClr val="lt1"/>
+            </a:fontRef>
+          </p:style>
+        </p:sp>
+        <p:sp>
+          <p:nvSpPr>
+            <p:cNvPr id="19" name="Isosceles Triangle 18"/>
+            <p:cNvSpPr/>
+            <p:nvPr/>
+          </p:nvSpPr>
+          <p:spPr>
+            <a:xfrm rot="10800000">
+              <a:off x="0" y="0"/>
+              <a:ext cx="842596" cy="5666154"/>
+            </a:xfrm>
+            <a:prstGeom prst="triangle">
+              <a:avLst>
+                <a:gd name="adj" fmla="val 100000"/>
+              </a:avLst>
+            </a:prstGeom>
+            <a:solidFill>
+              <a:schemeClr val="accent1">
+                <a:alpha val="85000"/>
+              </a:schemeClr>
+            </a:solidFill>
+            <a:ln>
+              <a:noFill/>
+            </a:ln>
+            <a:effectLst/>
+          </p:spPr>
+          <p:style>
+            <a:lnRef idx="1">
+              <a:schemeClr val="accent1"/>
+            </a:lnRef>
+            <a:fillRef idx="3">
+              <a:schemeClr val="accent1"/>
+            </a:fillRef>
+            <a:effectRef idx="2">
+              <a:schemeClr val="accent1"/>
+            </a:effectRef>
+            <a:fontRef idx="minor">
+              <a:schemeClr val="lt1"/>
+            </a:fontRef>
+          </p:style>
+        </p:sp>
+      </p:grpSp>
       <p:sp>
         <p:nvSpPr>
           <p:cNvPr id="2" name="Title 1"/>
@@ -1140,17 +1674,21 @@
         </p:nvSpPr>
         <p:spPr>
           <a:xfrm>
-            <a:off x="1813335" y="601724"/>
-            <a:ext cx="6477805" cy="1906073"/>
-          </a:xfrm>
-        </p:spPr>
-        <p:txBody>
-          <a:bodyPr bIns="0" anchor="b">
-            <a:normAutofit/>
+            <a:off x="1130300" y="1803400"/>
+            <a:ext cx="5825202" cy="1234727"/>
+          </a:xfrm>
+        </p:spPr>
+        <p:txBody>
+          <a:bodyPr anchor="b">
+            <a:noAutofit/>
           </a:bodyPr>
           <a:lstStyle>
-            <a:lvl1pPr algn="l">
-              <a:defRPr sz="4950"/>
+            <a:lvl1pPr algn="r">
+              <a:defRPr sz="4050">
+                <a:solidFill>
+                  <a:schemeClr val="accent1"/>
+                </a:solidFill>
+              </a:defRPr>
             </a:lvl1pPr>
           </a:lstStyle>
           <a:p>
@@ -1174,54 +1712,103 @@
         </p:nvSpPr>
         <p:spPr>
           <a:xfrm>
-            <a:off x="1813335" y="2648403"/>
-            <a:ext cx="6477804" cy="733216"/>
-          </a:xfrm>
-        </p:spPr>
-        <p:txBody>
-          <a:bodyPr tIns="91440" bIns="91440">
-            <a:normAutofit/>
-          </a:bodyPr>
+            <a:off x="1130300" y="3038125"/>
+            <a:ext cx="5825202" cy="822674"/>
+          </a:xfrm>
+        </p:spPr>
+        <p:txBody>
+          <a:bodyPr anchor="t"/>
           <a:lstStyle>
-            <a:lvl1pPr marL="0" indent="0" algn="l">
+            <a:lvl1pPr marL="0" indent="0" algn="r">
               <a:buNone/>
-              <a:defRPr sz="1350" b="0" cap="all" baseline="0">
-                <a:solidFill>
-                  <a:schemeClr val="tx1"/>
+              <a:defRPr>
+                <a:solidFill>
+                  <a:schemeClr val="tx1">
+                    <a:lumMod val="50000"/>
+                    <a:lumOff val="50000"/>
+                  </a:schemeClr>
                 </a:solidFill>
               </a:defRPr>
             </a:lvl1pPr>
             <a:lvl2pPr marL="342900" indent="0" algn="ctr">
               <a:buNone/>
-              <a:defRPr sz="1350"/>
+              <a:defRPr>
+                <a:solidFill>
+                  <a:schemeClr val="tx1">
+                    <a:tint val="75000"/>
+                  </a:schemeClr>
+                </a:solidFill>
+              </a:defRPr>
             </a:lvl2pPr>
             <a:lvl3pPr marL="685800" indent="0" algn="ctr">
               <a:buNone/>
-              <a:defRPr sz="1350"/>
+              <a:defRPr>
+                <a:solidFill>
+                  <a:schemeClr val="tx1">
+                    <a:tint val="75000"/>
+                  </a:schemeClr>
+                </a:solidFill>
+              </a:defRPr>
             </a:lvl3pPr>
             <a:lvl4pPr marL="1028700" indent="0" algn="ctr">
               <a:buNone/>
-              <a:defRPr sz="1200"/>
+              <a:defRPr>
+                <a:solidFill>
+                  <a:schemeClr val="tx1">
+                    <a:tint val="75000"/>
+                  </a:schemeClr>
+                </a:solidFill>
+              </a:defRPr>
             </a:lvl4pPr>
             <a:lvl5pPr marL="1371600" indent="0" algn="ctr">
               <a:buNone/>
-              <a:defRPr sz="1200"/>
+              <a:defRPr>
+                <a:solidFill>
+                  <a:schemeClr val="tx1">
+                    <a:tint val="75000"/>
+                  </a:schemeClr>
+                </a:solidFill>
+              </a:defRPr>
             </a:lvl5pPr>
             <a:lvl6pPr marL="1714500" indent="0" algn="ctr">
               <a:buNone/>
-              <a:defRPr sz="1200"/>
+              <a:defRPr>
+                <a:solidFill>
+                  <a:schemeClr val="tx1">
+                    <a:tint val="75000"/>
+                  </a:schemeClr>
+                </a:solidFill>
+              </a:defRPr>
             </a:lvl6pPr>
             <a:lvl7pPr marL="2057400" indent="0" algn="ctr">
               <a:buNone/>
-              <a:defRPr sz="1200"/>
+              <a:defRPr>
+                <a:solidFill>
+                  <a:schemeClr val="tx1">
+                    <a:tint val="75000"/>
+                  </a:schemeClr>
+                </a:solidFill>
+              </a:defRPr>
             </a:lvl7pPr>
             <a:lvl8pPr marL="2400300" indent="0" algn="ctr">
               <a:buNone/>
-              <a:defRPr sz="1200"/>
+              <a:defRPr>
+                <a:solidFill>
+                  <a:schemeClr val="tx1">
+                    <a:tint val="75000"/>
+                  </a:schemeClr>
+                </a:solidFill>
+              </a:defRPr>
             </a:lvl8pPr>
             <a:lvl9pPr marL="2743200" indent="0" algn="ctr">
               <a:buNone/>
-              <a:defRPr sz="1200"/>
+              <a:defRPr>
+                <a:solidFill>
+                  <a:schemeClr val="tx1">
+                    <a:tint val="75000"/>
+                  </a:schemeClr>
+                </a:solidFill>
+              </a:defRPr>
             </a:lvl9pPr>
           </a:lstStyle>
           <a:p>
@@ -1251,7 +1838,7 @@
             <a:fld id="{B61BEF0D-F0BB-DE4B-95CE-6DB70DBA9567}" type="datetimeFigureOut">
               <a:rPr lang="en-US" smtClean="0"/>
               <a:pPr/>
-              <a:t>8/4/2026</a:t>
+              <a:t>8/5/2026</a:t>
             </a:fld>
             <a:endParaRPr lang="en-US" dirty="0"/>
           </a:p>
@@ -1267,12 +1854,7 @@
             <p:ph type="ftr" sz="quarter" idx="11"/>
           </p:nvPr>
         </p:nvSpPr>
-        <p:spPr>
-          <a:xfrm>
-            <a:off x="1812376" y="246981"/>
-            <a:ext cx="3730436" cy="231901"/>
-          </a:xfrm>
-        </p:spPr>
+        <p:spPr/>
         <p:txBody>
           <a:bodyPr/>
           <a:lstStyle/>
@@ -1291,12 +1873,7 @@
             <p:ph type="sldNum" sz="quarter" idx="12"/>
           </p:nvPr>
         </p:nvSpPr>
-        <p:spPr>
-          <a:xfrm>
-            <a:off x="1078249" y="599230"/>
-            <a:ext cx="608264" cy="377684"/>
-          </a:xfrm>
-        </p:spPr>
+        <p:spPr/>
         <p:txBody>
           <a:bodyPr/>
           <a:lstStyle/>
@@ -1310,64 +1887,1649 @@
           </a:p>
         </p:txBody>
       </p:sp>
-      <p:cxnSp>
-        <p:nvCxnSpPr>
-          <p:cNvPr id="15" name="Straight Connector 14"/>
-          <p:cNvCxnSpPr/>
-          <p:nvPr/>
-        </p:nvCxnSpPr>
-        <p:spPr>
-          <a:xfrm>
-            <a:off x="1813335" y="2646407"/>
-            <a:ext cx="6477804" cy="0"/>
-          </a:xfrm>
-          <a:prstGeom prst="line">
-            <a:avLst/>
-          </a:prstGeom>
-          <a:ln w="31750"/>
-        </p:spPr>
-        <p:style>
-          <a:lnRef idx="3">
-            <a:schemeClr val="accent1"/>
-          </a:lnRef>
-          <a:fillRef idx="0">
-            <a:schemeClr val="accent1"/>
-          </a:fillRef>
-          <a:effectRef idx="2">
-            <a:schemeClr val="accent1"/>
-          </a:effectRef>
-          <a:fontRef idx="minor">
-            <a:schemeClr val="tx1"/>
-          </a:fontRef>
-        </p:style>
-      </p:cxnSp>
     </p:spTree>
     <p:extLst>
       <p:ext uri="{BB962C8B-B14F-4D97-AF65-F5344CB8AC3E}">
-        <p14:creationId xmlns:p14="http://schemas.microsoft.com/office/powerpoint/2010/main" val="214656745"/>
+        <p14:creationId xmlns:p14="http://schemas.microsoft.com/office/powerpoint/2010/main" val="565429950"/>
       </p:ext>
     </p:extLst>
   </p:cSld>
   <p:clrMapOvr>
     <a:masterClrMapping/>
   </p:clrMapOvr>
-  <mc:AlternateContent xmlns:mc="http://schemas.openxmlformats.org/markup-compatibility/2006">
-    <mc:Choice xmlns:p15="http://schemas.microsoft.com/office/powerpoint/2012/main" Requires="p15">
-      <p:transition xmlns:p14="http://schemas.microsoft.com/office/powerpoint/2010/main" spd="slow" p14:dur="2000" advTm="0">
-        <p15:prstTrans prst="drape"/>
-      </p:transition>
-    </mc:Choice>
-    <mc:Fallback>
-      <p:transition spd="slow" advTm="0">
-        <p:fade/>
-      </p:transition>
-    </mc:Fallback>
-  </mc:AlternateContent>
   <p:hf sldNum="0" hdr="0" ftr="0" dt="0"/>
 </p:sldLayout>
 </file>
 
 <file path=ppt/slideLayouts/slideLayout10.xml><?xml version="1.0" encoding="utf-8"?>
+<p:sldLayout xmlns:a="http://schemas.openxmlformats.org/drawingml/2006/main" xmlns:r="http://schemas.openxmlformats.org/officeDocument/2006/relationships" xmlns:p="http://schemas.openxmlformats.org/presentationml/2006/main" preserve="1">
+  <p:cSld name="Title and Caption">
+    <p:spTree>
+      <p:nvGrpSpPr>
+        <p:cNvPr id="1" name=""/>
+        <p:cNvGrpSpPr/>
+        <p:nvPr/>
+      </p:nvGrpSpPr>
+      <p:grpSpPr>
+        <a:xfrm>
+          <a:off x="0" y="0"/>
+          <a:ext cx="0" cy="0"/>
+          <a:chOff x="0" y="0"/>
+          <a:chExt cx="0" cy="0"/>
+        </a:xfrm>
+      </p:grpSpPr>
+      <p:sp>
+        <p:nvSpPr>
+          <p:cNvPr id="2" name="Title 1"/>
+          <p:cNvSpPr>
+            <a:spLocks noGrp="1"/>
+          </p:cNvSpPr>
+          <p:nvPr>
+            <p:ph type="title"/>
+          </p:nvPr>
+        </p:nvSpPr>
+        <p:spPr>
+          <a:xfrm>
+            <a:off x="508001" y="457200"/>
+            <a:ext cx="6447501" cy="2552700"/>
+          </a:xfrm>
+        </p:spPr>
+        <p:txBody>
+          <a:bodyPr anchor="ctr">
+            <a:normAutofit/>
+          </a:bodyPr>
+          <a:lstStyle>
+            <a:lvl1pPr algn="l">
+              <a:defRPr sz="3300" b="0" cap="none"/>
+            </a:lvl1pPr>
+          </a:lstStyle>
+          <a:p>
+            <a:r>
+              <a:rPr lang="en-US"/>
+              <a:t>Click to edit Master title style</a:t>
+            </a:r>
+            <a:endParaRPr lang="en-US" dirty="0"/>
+          </a:p>
+        </p:txBody>
+      </p:sp>
+      <p:sp>
+        <p:nvSpPr>
+          <p:cNvPr id="3" name="Text Placeholder 2"/>
+          <p:cNvSpPr>
+            <a:spLocks noGrp="1"/>
+          </p:cNvSpPr>
+          <p:nvPr>
+            <p:ph type="body" idx="1"/>
+          </p:nvPr>
+        </p:nvSpPr>
+        <p:spPr>
+          <a:xfrm>
+            <a:off x="508001" y="3352800"/>
+            <a:ext cx="6447501" cy="1178222"/>
+          </a:xfrm>
+        </p:spPr>
+        <p:txBody>
+          <a:bodyPr anchor="ctr">
+            <a:normAutofit/>
+          </a:bodyPr>
+          <a:lstStyle>
+            <a:lvl1pPr marL="0" indent="0" algn="l">
+              <a:buNone/>
+              <a:defRPr sz="1350">
+                <a:solidFill>
+                  <a:schemeClr val="tx1">
+                    <a:lumMod val="75000"/>
+                    <a:lumOff val="25000"/>
+                  </a:schemeClr>
+                </a:solidFill>
+              </a:defRPr>
+            </a:lvl1pPr>
+            <a:lvl2pPr marL="342900" indent="0">
+              <a:buNone/>
+              <a:defRPr sz="1350">
+                <a:solidFill>
+                  <a:schemeClr val="tx1">
+                    <a:tint val="75000"/>
+                  </a:schemeClr>
+                </a:solidFill>
+              </a:defRPr>
+            </a:lvl2pPr>
+            <a:lvl3pPr marL="685800" indent="0">
+              <a:buNone/>
+              <a:defRPr sz="1200">
+                <a:solidFill>
+                  <a:schemeClr val="tx1">
+                    <a:tint val="75000"/>
+                  </a:schemeClr>
+                </a:solidFill>
+              </a:defRPr>
+            </a:lvl3pPr>
+            <a:lvl4pPr marL="1028700" indent="0">
+              <a:buNone/>
+              <a:defRPr sz="1050">
+                <a:solidFill>
+                  <a:schemeClr val="tx1">
+                    <a:tint val="75000"/>
+                  </a:schemeClr>
+                </a:solidFill>
+              </a:defRPr>
+            </a:lvl4pPr>
+            <a:lvl5pPr marL="1371600" indent="0">
+              <a:buNone/>
+              <a:defRPr sz="1050">
+                <a:solidFill>
+                  <a:schemeClr val="tx1">
+                    <a:tint val="75000"/>
+                  </a:schemeClr>
+                </a:solidFill>
+              </a:defRPr>
+            </a:lvl5pPr>
+            <a:lvl6pPr marL="1714500" indent="0">
+              <a:buNone/>
+              <a:defRPr sz="1050">
+                <a:solidFill>
+                  <a:schemeClr val="tx1">
+                    <a:tint val="75000"/>
+                  </a:schemeClr>
+                </a:solidFill>
+              </a:defRPr>
+            </a:lvl6pPr>
+            <a:lvl7pPr marL="2057400" indent="0">
+              <a:buNone/>
+              <a:defRPr sz="1050">
+                <a:solidFill>
+                  <a:schemeClr val="tx1">
+                    <a:tint val="75000"/>
+                  </a:schemeClr>
+                </a:solidFill>
+              </a:defRPr>
+            </a:lvl7pPr>
+            <a:lvl8pPr marL="2400300" indent="0">
+              <a:buNone/>
+              <a:defRPr sz="1050">
+                <a:solidFill>
+                  <a:schemeClr val="tx1">
+                    <a:tint val="75000"/>
+                  </a:schemeClr>
+                </a:solidFill>
+              </a:defRPr>
+            </a:lvl8pPr>
+            <a:lvl9pPr marL="2743200" indent="0">
+              <a:buNone/>
+              <a:defRPr sz="1050">
+                <a:solidFill>
+                  <a:schemeClr val="tx1">
+                    <a:tint val="75000"/>
+                  </a:schemeClr>
+                </a:solidFill>
+              </a:defRPr>
+            </a:lvl9pPr>
+          </a:lstStyle>
+          <a:p>
+            <a:pPr lvl="0"/>
+            <a:r>
+              <a:rPr lang="en-US"/>
+              <a:t>Click to edit Master text styles</a:t>
+            </a:r>
+          </a:p>
+        </p:txBody>
+      </p:sp>
+      <p:sp>
+        <p:nvSpPr>
+          <p:cNvPr id="4" name="Date Placeholder 3"/>
+          <p:cNvSpPr>
+            <a:spLocks noGrp="1"/>
+          </p:cNvSpPr>
+          <p:nvPr>
+            <p:ph type="dt" sz="half" idx="10"/>
+          </p:nvPr>
+        </p:nvSpPr>
+        <p:spPr/>
+        <p:txBody>
+          <a:bodyPr/>
+          <a:lstStyle/>
+          <a:p>
+            <a:fld id="{B61BEF0D-F0BB-DE4B-95CE-6DB70DBA9567}" type="datetimeFigureOut">
+              <a:rPr lang="en-US" smtClean="0"/>
+              <a:pPr/>
+              <a:t>8/5/2026</a:t>
+            </a:fld>
+            <a:endParaRPr lang="en-US" dirty="0"/>
+          </a:p>
+        </p:txBody>
+      </p:sp>
+      <p:sp>
+        <p:nvSpPr>
+          <p:cNvPr id="5" name="Footer Placeholder 4"/>
+          <p:cNvSpPr>
+            <a:spLocks noGrp="1"/>
+          </p:cNvSpPr>
+          <p:nvPr>
+            <p:ph type="ftr" sz="quarter" idx="11"/>
+          </p:nvPr>
+        </p:nvSpPr>
+        <p:spPr/>
+        <p:txBody>
+          <a:bodyPr/>
+          <a:lstStyle/>
+          <a:p>
+            <a:endParaRPr lang="en-US" dirty="0"/>
+          </a:p>
+        </p:txBody>
+      </p:sp>
+      <p:sp>
+        <p:nvSpPr>
+          <p:cNvPr id="6" name="Slide Number Placeholder 5"/>
+          <p:cNvSpPr>
+            <a:spLocks noGrp="1"/>
+          </p:cNvSpPr>
+          <p:nvPr>
+            <p:ph type="sldNum" sz="quarter" idx="12"/>
+          </p:nvPr>
+        </p:nvSpPr>
+        <p:spPr/>
+        <p:txBody>
+          <a:bodyPr/>
+          <a:lstStyle/>
+          <a:p>
+            <a:fld id="{D57F1E4F-1CFF-5643-939E-217C01CDF565}" type="slidenum">
+              <a:rPr lang="en-US" smtClean="0"/>
+              <a:pPr/>
+              <a:t>‹#›</a:t>
+            </a:fld>
+            <a:endParaRPr lang="en-US" dirty="0"/>
+          </a:p>
+        </p:txBody>
+      </p:sp>
+    </p:spTree>
+    <p:extLst>
+      <p:ext uri="{BB962C8B-B14F-4D97-AF65-F5344CB8AC3E}">
+        <p14:creationId xmlns:p14="http://schemas.microsoft.com/office/powerpoint/2010/main" val="3937090057"/>
+      </p:ext>
+    </p:extLst>
+  </p:cSld>
+  <p:clrMapOvr>
+    <a:masterClrMapping/>
+  </p:clrMapOvr>
+  <p:hf sldNum="0" hdr="0" ftr="0" dt="0"/>
+</p:sldLayout>
+</file>
+
+<file path=ppt/slideLayouts/slideLayout11.xml><?xml version="1.0" encoding="utf-8"?>
+<p:sldLayout xmlns:a="http://schemas.openxmlformats.org/drawingml/2006/main" xmlns:r="http://schemas.openxmlformats.org/officeDocument/2006/relationships" xmlns:p="http://schemas.openxmlformats.org/presentationml/2006/main" preserve="1">
+  <p:cSld name="Quote with Caption">
+    <p:spTree>
+      <p:nvGrpSpPr>
+        <p:cNvPr id="1" name=""/>
+        <p:cNvGrpSpPr/>
+        <p:nvPr/>
+      </p:nvGrpSpPr>
+      <p:grpSpPr>
+        <a:xfrm>
+          <a:off x="0" y="0"/>
+          <a:ext cx="0" cy="0"/>
+          <a:chOff x="0" y="0"/>
+          <a:chExt cx="0" cy="0"/>
+        </a:xfrm>
+      </p:grpSpPr>
+      <p:sp>
+        <p:nvSpPr>
+          <p:cNvPr id="2" name="Title 1"/>
+          <p:cNvSpPr>
+            <a:spLocks noGrp="1"/>
+          </p:cNvSpPr>
+          <p:nvPr>
+            <p:ph type="title"/>
+          </p:nvPr>
+        </p:nvSpPr>
+        <p:spPr>
+          <a:xfrm>
+            <a:off x="698500" y="457200"/>
+            <a:ext cx="6070601" cy="2266950"/>
+          </a:xfrm>
+        </p:spPr>
+        <p:txBody>
+          <a:bodyPr anchor="ctr">
+            <a:normAutofit/>
+          </a:bodyPr>
+          <a:lstStyle>
+            <a:lvl1pPr algn="l">
+              <a:defRPr sz="3300" b="0" cap="none"/>
+            </a:lvl1pPr>
+          </a:lstStyle>
+          <a:p>
+            <a:r>
+              <a:rPr lang="en-US"/>
+              <a:t>Click to edit Master title style</a:t>
+            </a:r>
+            <a:endParaRPr lang="en-US" dirty="0"/>
+          </a:p>
+        </p:txBody>
+      </p:sp>
+      <p:sp>
+        <p:nvSpPr>
+          <p:cNvPr id="23" name="Text Placeholder 9"/>
+          <p:cNvSpPr>
+            <a:spLocks noGrp="1"/>
+          </p:cNvSpPr>
+          <p:nvPr>
+            <p:ph type="body" sz="quarter" idx="13"/>
+          </p:nvPr>
+        </p:nvSpPr>
+        <p:spPr>
+          <a:xfrm>
+            <a:off x="1024604" y="2724150"/>
+            <a:ext cx="5418393" cy="285750"/>
+          </a:xfrm>
+        </p:spPr>
+        <p:txBody>
+          <a:bodyPr anchor="ctr">
+            <a:noAutofit/>
+          </a:bodyPr>
+          <a:lstStyle>
+            <a:lvl1pPr marL="0" indent="0">
+              <a:buFontTx/>
+              <a:buNone/>
+              <a:defRPr sz="1200">
+                <a:solidFill>
+                  <a:schemeClr val="tx1">
+                    <a:lumMod val="50000"/>
+                    <a:lumOff val="50000"/>
+                  </a:schemeClr>
+                </a:solidFill>
+              </a:defRPr>
+            </a:lvl1pPr>
+            <a:lvl2pPr marL="342900" indent="0">
+              <a:buFontTx/>
+              <a:buNone/>
+              <a:defRPr/>
+            </a:lvl2pPr>
+            <a:lvl3pPr marL="685800" indent="0">
+              <a:buFontTx/>
+              <a:buNone/>
+              <a:defRPr/>
+            </a:lvl3pPr>
+            <a:lvl4pPr marL="1028700" indent="0">
+              <a:buFontTx/>
+              <a:buNone/>
+              <a:defRPr/>
+            </a:lvl4pPr>
+            <a:lvl5pPr marL="1371600" indent="0">
+              <a:buFontTx/>
+              <a:buNone/>
+              <a:defRPr/>
+            </a:lvl5pPr>
+          </a:lstStyle>
+          <a:p>
+            <a:pPr lvl="0"/>
+            <a:r>
+              <a:rPr lang="en-US"/>
+              <a:t>Click to edit Master text styles</a:t>
+            </a:r>
+          </a:p>
+        </p:txBody>
+      </p:sp>
+      <p:sp>
+        <p:nvSpPr>
+          <p:cNvPr id="3" name="Text Placeholder 2"/>
+          <p:cNvSpPr>
+            <a:spLocks noGrp="1"/>
+          </p:cNvSpPr>
+          <p:nvPr>
+            <p:ph type="body" idx="1"/>
+          </p:nvPr>
+        </p:nvSpPr>
+        <p:spPr>
+          <a:xfrm>
+            <a:off x="508001" y="3352800"/>
+            <a:ext cx="6447501" cy="1178222"/>
+          </a:xfrm>
+        </p:spPr>
+        <p:txBody>
+          <a:bodyPr anchor="ctr">
+            <a:normAutofit/>
+          </a:bodyPr>
+          <a:lstStyle>
+            <a:lvl1pPr marL="0" indent="0" algn="l">
+              <a:buNone/>
+              <a:defRPr sz="1350">
+                <a:solidFill>
+                  <a:schemeClr val="tx1">
+                    <a:lumMod val="75000"/>
+                    <a:lumOff val="25000"/>
+                  </a:schemeClr>
+                </a:solidFill>
+              </a:defRPr>
+            </a:lvl1pPr>
+            <a:lvl2pPr marL="342900" indent="0">
+              <a:buNone/>
+              <a:defRPr sz="1350">
+                <a:solidFill>
+                  <a:schemeClr val="tx1">
+                    <a:tint val="75000"/>
+                  </a:schemeClr>
+                </a:solidFill>
+              </a:defRPr>
+            </a:lvl2pPr>
+            <a:lvl3pPr marL="685800" indent="0">
+              <a:buNone/>
+              <a:defRPr sz="1200">
+                <a:solidFill>
+                  <a:schemeClr val="tx1">
+                    <a:tint val="75000"/>
+                  </a:schemeClr>
+                </a:solidFill>
+              </a:defRPr>
+            </a:lvl3pPr>
+            <a:lvl4pPr marL="1028700" indent="0">
+              <a:buNone/>
+              <a:defRPr sz="1050">
+                <a:solidFill>
+                  <a:schemeClr val="tx1">
+                    <a:tint val="75000"/>
+                  </a:schemeClr>
+                </a:solidFill>
+              </a:defRPr>
+            </a:lvl4pPr>
+            <a:lvl5pPr marL="1371600" indent="0">
+              <a:buNone/>
+              <a:defRPr sz="1050">
+                <a:solidFill>
+                  <a:schemeClr val="tx1">
+                    <a:tint val="75000"/>
+                  </a:schemeClr>
+                </a:solidFill>
+              </a:defRPr>
+            </a:lvl5pPr>
+            <a:lvl6pPr marL="1714500" indent="0">
+              <a:buNone/>
+              <a:defRPr sz="1050">
+                <a:solidFill>
+                  <a:schemeClr val="tx1">
+                    <a:tint val="75000"/>
+                  </a:schemeClr>
+                </a:solidFill>
+              </a:defRPr>
+            </a:lvl6pPr>
+            <a:lvl7pPr marL="2057400" indent="0">
+              <a:buNone/>
+              <a:defRPr sz="1050">
+                <a:solidFill>
+                  <a:schemeClr val="tx1">
+                    <a:tint val="75000"/>
+                  </a:schemeClr>
+                </a:solidFill>
+              </a:defRPr>
+            </a:lvl7pPr>
+            <a:lvl8pPr marL="2400300" indent="0">
+              <a:buNone/>
+              <a:defRPr sz="1050">
+                <a:solidFill>
+                  <a:schemeClr val="tx1">
+                    <a:tint val="75000"/>
+                  </a:schemeClr>
+                </a:solidFill>
+              </a:defRPr>
+            </a:lvl8pPr>
+            <a:lvl9pPr marL="2743200" indent="0">
+              <a:buNone/>
+              <a:defRPr sz="1050">
+                <a:solidFill>
+                  <a:schemeClr val="tx1">
+                    <a:tint val="75000"/>
+                  </a:schemeClr>
+                </a:solidFill>
+              </a:defRPr>
+            </a:lvl9pPr>
+          </a:lstStyle>
+          <a:p>
+            <a:pPr lvl="0"/>
+            <a:r>
+              <a:rPr lang="en-US"/>
+              <a:t>Click to edit Master text styles</a:t>
+            </a:r>
+          </a:p>
+        </p:txBody>
+      </p:sp>
+      <p:sp>
+        <p:nvSpPr>
+          <p:cNvPr id="4" name="Date Placeholder 3"/>
+          <p:cNvSpPr>
+            <a:spLocks noGrp="1"/>
+          </p:cNvSpPr>
+          <p:nvPr>
+            <p:ph type="dt" sz="half" idx="10"/>
+          </p:nvPr>
+        </p:nvSpPr>
+        <p:spPr/>
+        <p:txBody>
+          <a:bodyPr/>
+          <a:lstStyle/>
+          <a:p>
+            <a:fld id="{B61BEF0D-F0BB-DE4B-95CE-6DB70DBA9567}" type="datetimeFigureOut">
+              <a:rPr lang="en-US" smtClean="0"/>
+              <a:pPr/>
+              <a:t>8/5/2026</a:t>
+            </a:fld>
+            <a:endParaRPr lang="en-US" dirty="0"/>
+          </a:p>
+        </p:txBody>
+      </p:sp>
+      <p:sp>
+        <p:nvSpPr>
+          <p:cNvPr id="5" name="Footer Placeholder 4"/>
+          <p:cNvSpPr>
+            <a:spLocks noGrp="1"/>
+          </p:cNvSpPr>
+          <p:nvPr>
+            <p:ph type="ftr" sz="quarter" idx="11"/>
+          </p:nvPr>
+        </p:nvSpPr>
+        <p:spPr/>
+        <p:txBody>
+          <a:bodyPr/>
+          <a:lstStyle/>
+          <a:p>
+            <a:endParaRPr lang="en-US" dirty="0"/>
+          </a:p>
+        </p:txBody>
+      </p:sp>
+      <p:sp>
+        <p:nvSpPr>
+          <p:cNvPr id="6" name="Slide Number Placeholder 5"/>
+          <p:cNvSpPr>
+            <a:spLocks noGrp="1"/>
+          </p:cNvSpPr>
+          <p:nvPr>
+            <p:ph type="sldNum" sz="quarter" idx="12"/>
+          </p:nvPr>
+        </p:nvSpPr>
+        <p:spPr/>
+        <p:txBody>
+          <a:bodyPr/>
+          <a:lstStyle/>
+          <a:p>
+            <a:fld id="{D57F1E4F-1CFF-5643-939E-217C01CDF565}" type="slidenum">
+              <a:rPr lang="en-US" smtClean="0"/>
+              <a:pPr/>
+              <a:t>‹#›</a:t>
+            </a:fld>
+            <a:endParaRPr lang="en-US" dirty="0"/>
+          </a:p>
+        </p:txBody>
+      </p:sp>
+      <p:sp>
+        <p:nvSpPr>
+          <p:cNvPr id="20" name="TextBox 19"/>
+          <p:cNvSpPr txBox="1"/>
+          <p:nvPr/>
+        </p:nvSpPr>
+        <p:spPr>
+          <a:xfrm>
+            <a:off x="406403" y="592784"/>
+            <a:ext cx="457200" cy="438582"/>
+          </a:xfrm>
+          <a:prstGeom prst="rect">
+            <a:avLst/>
+          </a:prstGeom>
+        </p:spPr>
+        <p:txBody>
+          <a:bodyPr vert="horz" lIns="68580" tIns="34290" rIns="68580" bIns="34290" rtlCol="0" anchor="ctr">
+            <a:noAutofit/>
+          </a:bodyPr>
+          <a:lstStyle/>
+          <a:p>
+            <a:pPr lvl="0"/>
+            <a:r>
+              <a:rPr lang="en-US" sz="6000" baseline="0" dirty="0">
+                <a:ln w="3175" cmpd="sng">
+                  <a:noFill/>
+                </a:ln>
+                <a:solidFill>
+                  <a:schemeClr val="accent1">
+                    <a:lumMod val="60000"/>
+                    <a:lumOff val="40000"/>
+                  </a:schemeClr>
+                </a:solidFill>
+                <a:effectLst/>
+                <a:latin typeface="Arial"/>
+              </a:rPr>
+              <a:t>“</a:t>
+            </a:r>
+          </a:p>
+        </p:txBody>
+      </p:sp>
+      <p:sp>
+        <p:nvSpPr>
+          <p:cNvPr id="22" name="TextBox 21"/>
+          <p:cNvSpPr txBox="1"/>
+          <p:nvPr/>
+        </p:nvSpPr>
+        <p:spPr>
+          <a:xfrm>
+            <a:off x="6669758" y="2164917"/>
+            <a:ext cx="457200" cy="438582"/>
+          </a:xfrm>
+          <a:prstGeom prst="rect">
+            <a:avLst/>
+          </a:prstGeom>
+        </p:spPr>
+        <p:txBody>
+          <a:bodyPr vert="horz" lIns="68580" tIns="34290" rIns="68580" bIns="34290" rtlCol="0" anchor="ctr">
+            <a:noAutofit/>
+          </a:bodyPr>
+          <a:lstStyle/>
+          <a:p>
+            <a:pPr lvl="0"/>
+            <a:r>
+              <a:rPr lang="en-US" sz="6000" baseline="0" dirty="0">
+                <a:ln w="3175" cmpd="sng">
+                  <a:noFill/>
+                </a:ln>
+                <a:solidFill>
+                  <a:schemeClr val="accent1">
+                    <a:lumMod val="60000"/>
+                    <a:lumOff val="40000"/>
+                  </a:schemeClr>
+                </a:solidFill>
+                <a:latin typeface="Arial"/>
+              </a:rPr>
+              <a:t>”</a:t>
+            </a:r>
+            <a:endParaRPr lang="en-US" sz="1350" dirty="0">
+              <a:solidFill>
+                <a:schemeClr val="accent1">
+                  <a:lumMod val="60000"/>
+                  <a:lumOff val="40000"/>
+                </a:schemeClr>
+              </a:solidFill>
+              <a:latin typeface="Arial"/>
+            </a:endParaRPr>
+          </a:p>
+        </p:txBody>
+      </p:sp>
+    </p:spTree>
+    <p:extLst>
+      <p:ext uri="{BB962C8B-B14F-4D97-AF65-F5344CB8AC3E}">
+        <p14:creationId xmlns:p14="http://schemas.microsoft.com/office/powerpoint/2010/main" val="1242804509"/>
+      </p:ext>
+    </p:extLst>
+  </p:cSld>
+  <p:clrMapOvr>
+    <a:masterClrMapping/>
+  </p:clrMapOvr>
+  <p:hf sldNum="0" hdr="0" ftr="0" dt="0"/>
+</p:sldLayout>
+</file>
+
+<file path=ppt/slideLayouts/slideLayout12.xml><?xml version="1.0" encoding="utf-8"?>
+<p:sldLayout xmlns:a="http://schemas.openxmlformats.org/drawingml/2006/main" xmlns:r="http://schemas.openxmlformats.org/officeDocument/2006/relationships" xmlns:p="http://schemas.openxmlformats.org/presentationml/2006/main" preserve="1">
+  <p:cSld name="Name Card">
+    <p:spTree>
+      <p:nvGrpSpPr>
+        <p:cNvPr id="1" name=""/>
+        <p:cNvGrpSpPr/>
+        <p:nvPr/>
+      </p:nvGrpSpPr>
+      <p:grpSpPr>
+        <a:xfrm>
+          <a:off x="0" y="0"/>
+          <a:ext cx="0" cy="0"/>
+          <a:chOff x="0" y="0"/>
+          <a:chExt cx="0" cy="0"/>
+        </a:xfrm>
+      </p:grpSpPr>
+      <p:sp>
+        <p:nvSpPr>
+          <p:cNvPr id="2" name="Title 1"/>
+          <p:cNvSpPr>
+            <a:spLocks noGrp="1"/>
+          </p:cNvSpPr>
+          <p:nvPr>
+            <p:ph type="title"/>
+          </p:nvPr>
+        </p:nvSpPr>
+        <p:spPr>
+          <a:xfrm>
+            <a:off x="508001" y="1448991"/>
+            <a:ext cx="6447501" cy="1946595"/>
+          </a:xfrm>
+        </p:spPr>
+        <p:txBody>
+          <a:bodyPr anchor="b">
+            <a:normAutofit/>
+          </a:bodyPr>
+          <a:lstStyle>
+            <a:lvl1pPr algn="l">
+              <a:defRPr sz="3300" b="0" cap="none"/>
+            </a:lvl1pPr>
+          </a:lstStyle>
+          <a:p>
+            <a:r>
+              <a:rPr lang="en-US"/>
+              <a:t>Click to edit Master title style</a:t>
+            </a:r>
+            <a:endParaRPr lang="en-US" dirty="0"/>
+          </a:p>
+        </p:txBody>
+      </p:sp>
+      <p:sp>
+        <p:nvSpPr>
+          <p:cNvPr id="3" name="Text Placeholder 2"/>
+          <p:cNvSpPr>
+            <a:spLocks noGrp="1"/>
+          </p:cNvSpPr>
+          <p:nvPr>
+            <p:ph type="body" idx="1"/>
+          </p:nvPr>
+        </p:nvSpPr>
+        <p:spPr>
+          <a:xfrm>
+            <a:off x="508001" y="3395586"/>
+            <a:ext cx="6447501" cy="1135436"/>
+          </a:xfrm>
+        </p:spPr>
+        <p:txBody>
+          <a:bodyPr anchor="t">
+            <a:normAutofit/>
+          </a:bodyPr>
+          <a:lstStyle>
+            <a:lvl1pPr marL="0" indent="0" algn="l">
+              <a:buNone/>
+              <a:defRPr sz="1350">
+                <a:solidFill>
+                  <a:schemeClr val="tx1">
+                    <a:lumMod val="75000"/>
+                    <a:lumOff val="25000"/>
+                  </a:schemeClr>
+                </a:solidFill>
+              </a:defRPr>
+            </a:lvl1pPr>
+            <a:lvl2pPr marL="342900" indent="0">
+              <a:buNone/>
+              <a:defRPr sz="1350">
+                <a:solidFill>
+                  <a:schemeClr val="tx1">
+                    <a:tint val="75000"/>
+                  </a:schemeClr>
+                </a:solidFill>
+              </a:defRPr>
+            </a:lvl2pPr>
+            <a:lvl3pPr marL="685800" indent="0">
+              <a:buNone/>
+              <a:defRPr sz="1200">
+                <a:solidFill>
+                  <a:schemeClr val="tx1">
+                    <a:tint val="75000"/>
+                  </a:schemeClr>
+                </a:solidFill>
+              </a:defRPr>
+            </a:lvl3pPr>
+            <a:lvl4pPr marL="1028700" indent="0">
+              <a:buNone/>
+              <a:defRPr sz="1050">
+                <a:solidFill>
+                  <a:schemeClr val="tx1">
+                    <a:tint val="75000"/>
+                  </a:schemeClr>
+                </a:solidFill>
+              </a:defRPr>
+            </a:lvl4pPr>
+            <a:lvl5pPr marL="1371600" indent="0">
+              <a:buNone/>
+              <a:defRPr sz="1050">
+                <a:solidFill>
+                  <a:schemeClr val="tx1">
+                    <a:tint val="75000"/>
+                  </a:schemeClr>
+                </a:solidFill>
+              </a:defRPr>
+            </a:lvl5pPr>
+            <a:lvl6pPr marL="1714500" indent="0">
+              <a:buNone/>
+              <a:defRPr sz="1050">
+                <a:solidFill>
+                  <a:schemeClr val="tx1">
+                    <a:tint val="75000"/>
+                  </a:schemeClr>
+                </a:solidFill>
+              </a:defRPr>
+            </a:lvl6pPr>
+            <a:lvl7pPr marL="2057400" indent="0">
+              <a:buNone/>
+              <a:defRPr sz="1050">
+                <a:solidFill>
+                  <a:schemeClr val="tx1">
+                    <a:tint val="75000"/>
+                  </a:schemeClr>
+                </a:solidFill>
+              </a:defRPr>
+            </a:lvl7pPr>
+            <a:lvl8pPr marL="2400300" indent="0">
+              <a:buNone/>
+              <a:defRPr sz="1050">
+                <a:solidFill>
+                  <a:schemeClr val="tx1">
+                    <a:tint val="75000"/>
+                  </a:schemeClr>
+                </a:solidFill>
+              </a:defRPr>
+            </a:lvl8pPr>
+            <a:lvl9pPr marL="2743200" indent="0">
+              <a:buNone/>
+              <a:defRPr sz="1050">
+                <a:solidFill>
+                  <a:schemeClr val="tx1">
+                    <a:tint val="75000"/>
+                  </a:schemeClr>
+                </a:solidFill>
+              </a:defRPr>
+            </a:lvl9pPr>
+          </a:lstStyle>
+          <a:p>
+            <a:pPr lvl="0"/>
+            <a:r>
+              <a:rPr lang="en-US"/>
+              <a:t>Click to edit Master text styles</a:t>
+            </a:r>
+          </a:p>
+        </p:txBody>
+      </p:sp>
+      <p:sp>
+        <p:nvSpPr>
+          <p:cNvPr id="4" name="Date Placeholder 3"/>
+          <p:cNvSpPr>
+            <a:spLocks noGrp="1"/>
+          </p:cNvSpPr>
+          <p:nvPr>
+            <p:ph type="dt" sz="half" idx="10"/>
+          </p:nvPr>
+        </p:nvSpPr>
+        <p:spPr/>
+        <p:txBody>
+          <a:bodyPr/>
+          <a:lstStyle/>
+          <a:p>
+            <a:fld id="{B61BEF0D-F0BB-DE4B-95CE-6DB70DBA9567}" type="datetimeFigureOut">
+              <a:rPr lang="en-US" smtClean="0"/>
+              <a:pPr/>
+              <a:t>8/5/2026</a:t>
+            </a:fld>
+            <a:endParaRPr lang="en-US" dirty="0"/>
+          </a:p>
+        </p:txBody>
+      </p:sp>
+      <p:sp>
+        <p:nvSpPr>
+          <p:cNvPr id="5" name="Footer Placeholder 4"/>
+          <p:cNvSpPr>
+            <a:spLocks noGrp="1"/>
+          </p:cNvSpPr>
+          <p:nvPr>
+            <p:ph type="ftr" sz="quarter" idx="11"/>
+          </p:nvPr>
+        </p:nvSpPr>
+        <p:spPr/>
+        <p:txBody>
+          <a:bodyPr/>
+          <a:lstStyle/>
+          <a:p>
+            <a:endParaRPr lang="en-US" dirty="0"/>
+          </a:p>
+        </p:txBody>
+      </p:sp>
+      <p:sp>
+        <p:nvSpPr>
+          <p:cNvPr id="6" name="Slide Number Placeholder 5"/>
+          <p:cNvSpPr>
+            <a:spLocks noGrp="1"/>
+          </p:cNvSpPr>
+          <p:nvPr>
+            <p:ph type="sldNum" sz="quarter" idx="12"/>
+          </p:nvPr>
+        </p:nvSpPr>
+        <p:spPr/>
+        <p:txBody>
+          <a:bodyPr/>
+          <a:lstStyle/>
+          <a:p>
+            <a:fld id="{D57F1E4F-1CFF-5643-939E-217C01CDF565}" type="slidenum">
+              <a:rPr lang="en-US" smtClean="0"/>
+              <a:pPr/>
+              <a:t>‹#›</a:t>
+            </a:fld>
+            <a:endParaRPr lang="en-US" dirty="0"/>
+          </a:p>
+        </p:txBody>
+      </p:sp>
+    </p:spTree>
+    <p:extLst>
+      <p:ext uri="{BB962C8B-B14F-4D97-AF65-F5344CB8AC3E}">
+        <p14:creationId xmlns:p14="http://schemas.microsoft.com/office/powerpoint/2010/main" val="783575877"/>
+      </p:ext>
+    </p:extLst>
+  </p:cSld>
+  <p:clrMapOvr>
+    <a:masterClrMapping/>
+  </p:clrMapOvr>
+  <p:hf sldNum="0" hdr="0" ftr="0" dt="0"/>
+</p:sldLayout>
+</file>
+
+<file path=ppt/slideLayouts/slideLayout13.xml><?xml version="1.0" encoding="utf-8"?>
+<p:sldLayout xmlns:a="http://schemas.openxmlformats.org/drawingml/2006/main" xmlns:r="http://schemas.openxmlformats.org/officeDocument/2006/relationships" xmlns:p="http://schemas.openxmlformats.org/presentationml/2006/main" preserve="1">
+  <p:cSld name="Quote Name Card">
+    <p:spTree>
+      <p:nvGrpSpPr>
+        <p:cNvPr id="1" name=""/>
+        <p:cNvGrpSpPr/>
+        <p:nvPr/>
+      </p:nvGrpSpPr>
+      <p:grpSpPr>
+        <a:xfrm>
+          <a:off x="0" y="0"/>
+          <a:ext cx="0" cy="0"/>
+          <a:chOff x="0" y="0"/>
+          <a:chExt cx="0" cy="0"/>
+        </a:xfrm>
+      </p:grpSpPr>
+      <p:sp>
+        <p:nvSpPr>
+          <p:cNvPr id="2" name="Title 1"/>
+          <p:cNvSpPr>
+            <a:spLocks noGrp="1"/>
+          </p:cNvSpPr>
+          <p:nvPr>
+            <p:ph type="title"/>
+          </p:nvPr>
+        </p:nvSpPr>
+        <p:spPr>
+          <a:xfrm>
+            <a:off x="698500" y="457200"/>
+            <a:ext cx="6070601" cy="2266950"/>
+          </a:xfrm>
+        </p:spPr>
+        <p:txBody>
+          <a:bodyPr anchor="ctr">
+            <a:normAutofit/>
+          </a:bodyPr>
+          <a:lstStyle>
+            <a:lvl1pPr algn="l">
+              <a:defRPr sz="3300" b="0" cap="none"/>
+            </a:lvl1pPr>
+          </a:lstStyle>
+          <a:p>
+            <a:r>
+              <a:rPr lang="en-US"/>
+              <a:t>Click to edit Master title style</a:t>
+            </a:r>
+            <a:endParaRPr lang="en-US" dirty="0"/>
+          </a:p>
+        </p:txBody>
+      </p:sp>
+      <p:sp>
+        <p:nvSpPr>
+          <p:cNvPr id="23" name="Text Placeholder 9"/>
+          <p:cNvSpPr>
+            <a:spLocks noGrp="1"/>
+          </p:cNvSpPr>
+          <p:nvPr>
+            <p:ph type="body" sz="quarter" idx="13"/>
+          </p:nvPr>
+        </p:nvSpPr>
+        <p:spPr>
+          <a:xfrm>
+            <a:off x="507999" y="3009900"/>
+            <a:ext cx="6447502" cy="385686"/>
+          </a:xfrm>
+        </p:spPr>
+        <p:txBody>
+          <a:bodyPr anchor="b">
+            <a:noAutofit/>
+          </a:bodyPr>
+          <a:lstStyle>
+            <a:lvl1pPr marL="0" indent="0">
+              <a:buFontTx/>
+              <a:buNone/>
+              <a:defRPr sz="1800">
+                <a:solidFill>
+                  <a:schemeClr val="tx1">
+                    <a:lumMod val="75000"/>
+                    <a:lumOff val="25000"/>
+                  </a:schemeClr>
+                </a:solidFill>
+              </a:defRPr>
+            </a:lvl1pPr>
+            <a:lvl2pPr marL="342900" indent="0">
+              <a:buFontTx/>
+              <a:buNone/>
+              <a:defRPr/>
+            </a:lvl2pPr>
+            <a:lvl3pPr marL="685800" indent="0">
+              <a:buFontTx/>
+              <a:buNone/>
+              <a:defRPr/>
+            </a:lvl3pPr>
+            <a:lvl4pPr marL="1028700" indent="0">
+              <a:buFontTx/>
+              <a:buNone/>
+              <a:defRPr/>
+            </a:lvl4pPr>
+            <a:lvl5pPr marL="1371600" indent="0">
+              <a:buFontTx/>
+              <a:buNone/>
+              <a:defRPr/>
+            </a:lvl5pPr>
+          </a:lstStyle>
+          <a:p>
+            <a:pPr lvl="0"/>
+            <a:r>
+              <a:rPr lang="en-US"/>
+              <a:t>Click to edit Master text styles</a:t>
+            </a:r>
+          </a:p>
+        </p:txBody>
+      </p:sp>
+      <p:sp>
+        <p:nvSpPr>
+          <p:cNvPr id="3" name="Text Placeholder 2"/>
+          <p:cNvSpPr>
+            <a:spLocks noGrp="1"/>
+          </p:cNvSpPr>
+          <p:nvPr>
+            <p:ph type="body" idx="1"/>
+          </p:nvPr>
+        </p:nvSpPr>
+        <p:spPr>
+          <a:xfrm>
+            <a:off x="508001" y="3395586"/>
+            <a:ext cx="6447501" cy="1135436"/>
+          </a:xfrm>
+        </p:spPr>
+        <p:txBody>
+          <a:bodyPr anchor="t">
+            <a:normAutofit/>
+          </a:bodyPr>
+          <a:lstStyle>
+            <a:lvl1pPr marL="0" indent="0" algn="l">
+              <a:buNone/>
+              <a:defRPr sz="1350">
+                <a:solidFill>
+                  <a:schemeClr val="tx1">
+                    <a:lumMod val="50000"/>
+                    <a:lumOff val="50000"/>
+                  </a:schemeClr>
+                </a:solidFill>
+              </a:defRPr>
+            </a:lvl1pPr>
+            <a:lvl2pPr marL="342900" indent="0">
+              <a:buNone/>
+              <a:defRPr sz="1350">
+                <a:solidFill>
+                  <a:schemeClr val="tx1">
+                    <a:tint val="75000"/>
+                  </a:schemeClr>
+                </a:solidFill>
+              </a:defRPr>
+            </a:lvl2pPr>
+            <a:lvl3pPr marL="685800" indent="0">
+              <a:buNone/>
+              <a:defRPr sz="1200">
+                <a:solidFill>
+                  <a:schemeClr val="tx1">
+                    <a:tint val="75000"/>
+                  </a:schemeClr>
+                </a:solidFill>
+              </a:defRPr>
+            </a:lvl3pPr>
+            <a:lvl4pPr marL="1028700" indent="0">
+              <a:buNone/>
+              <a:defRPr sz="1050">
+                <a:solidFill>
+                  <a:schemeClr val="tx1">
+                    <a:tint val="75000"/>
+                  </a:schemeClr>
+                </a:solidFill>
+              </a:defRPr>
+            </a:lvl4pPr>
+            <a:lvl5pPr marL="1371600" indent="0">
+              <a:buNone/>
+              <a:defRPr sz="1050">
+                <a:solidFill>
+                  <a:schemeClr val="tx1">
+                    <a:tint val="75000"/>
+                  </a:schemeClr>
+                </a:solidFill>
+              </a:defRPr>
+            </a:lvl5pPr>
+            <a:lvl6pPr marL="1714500" indent="0">
+              <a:buNone/>
+              <a:defRPr sz="1050">
+                <a:solidFill>
+                  <a:schemeClr val="tx1">
+                    <a:tint val="75000"/>
+                  </a:schemeClr>
+                </a:solidFill>
+              </a:defRPr>
+            </a:lvl6pPr>
+            <a:lvl7pPr marL="2057400" indent="0">
+              <a:buNone/>
+              <a:defRPr sz="1050">
+                <a:solidFill>
+                  <a:schemeClr val="tx1">
+                    <a:tint val="75000"/>
+                  </a:schemeClr>
+                </a:solidFill>
+              </a:defRPr>
+            </a:lvl7pPr>
+            <a:lvl8pPr marL="2400300" indent="0">
+              <a:buNone/>
+              <a:defRPr sz="1050">
+                <a:solidFill>
+                  <a:schemeClr val="tx1">
+                    <a:tint val="75000"/>
+                  </a:schemeClr>
+                </a:solidFill>
+              </a:defRPr>
+            </a:lvl8pPr>
+            <a:lvl9pPr marL="2743200" indent="0">
+              <a:buNone/>
+              <a:defRPr sz="1050">
+                <a:solidFill>
+                  <a:schemeClr val="tx1">
+                    <a:tint val="75000"/>
+                  </a:schemeClr>
+                </a:solidFill>
+              </a:defRPr>
+            </a:lvl9pPr>
+          </a:lstStyle>
+          <a:p>
+            <a:pPr lvl="0"/>
+            <a:r>
+              <a:rPr lang="en-US"/>
+              <a:t>Click to edit Master text styles</a:t>
+            </a:r>
+          </a:p>
+        </p:txBody>
+      </p:sp>
+      <p:sp>
+        <p:nvSpPr>
+          <p:cNvPr id="4" name="Date Placeholder 3"/>
+          <p:cNvSpPr>
+            <a:spLocks noGrp="1"/>
+          </p:cNvSpPr>
+          <p:nvPr>
+            <p:ph type="dt" sz="half" idx="10"/>
+          </p:nvPr>
+        </p:nvSpPr>
+        <p:spPr/>
+        <p:txBody>
+          <a:bodyPr/>
+          <a:lstStyle/>
+          <a:p>
+            <a:fld id="{B61BEF0D-F0BB-DE4B-95CE-6DB70DBA9567}" type="datetimeFigureOut">
+              <a:rPr lang="en-US" smtClean="0"/>
+              <a:pPr/>
+              <a:t>8/5/2026</a:t>
+            </a:fld>
+            <a:endParaRPr lang="en-US" dirty="0"/>
+          </a:p>
+        </p:txBody>
+      </p:sp>
+      <p:sp>
+        <p:nvSpPr>
+          <p:cNvPr id="5" name="Footer Placeholder 4"/>
+          <p:cNvSpPr>
+            <a:spLocks noGrp="1"/>
+          </p:cNvSpPr>
+          <p:nvPr>
+            <p:ph type="ftr" sz="quarter" idx="11"/>
+          </p:nvPr>
+        </p:nvSpPr>
+        <p:spPr/>
+        <p:txBody>
+          <a:bodyPr/>
+          <a:lstStyle/>
+          <a:p>
+            <a:endParaRPr lang="en-US" dirty="0"/>
+          </a:p>
+        </p:txBody>
+      </p:sp>
+      <p:sp>
+        <p:nvSpPr>
+          <p:cNvPr id="6" name="Slide Number Placeholder 5"/>
+          <p:cNvSpPr>
+            <a:spLocks noGrp="1"/>
+          </p:cNvSpPr>
+          <p:nvPr>
+            <p:ph type="sldNum" sz="quarter" idx="12"/>
+          </p:nvPr>
+        </p:nvSpPr>
+        <p:spPr/>
+        <p:txBody>
+          <a:bodyPr/>
+          <a:lstStyle/>
+          <a:p>
+            <a:fld id="{D57F1E4F-1CFF-5643-939E-217C01CDF565}" type="slidenum">
+              <a:rPr lang="en-US" smtClean="0"/>
+              <a:pPr/>
+              <a:t>‹#›</a:t>
+            </a:fld>
+            <a:endParaRPr lang="en-US" dirty="0"/>
+          </a:p>
+        </p:txBody>
+      </p:sp>
+      <p:sp>
+        <p:nvSpPr>
+          <p:cNvPr id="24" name="TextBox 23"/>
+          <p:cNvSpPr txBox="1"/>
+          <p:nvPr/>
+        </p:nvSpPr>
+        <p:spPr>
+          <a:xfrm>
+            <a:off x="406403" y="592784"/>
+            <a:ext cx="457200" cy="438582"/>
+          </a:xfrm>
+          <a:prstGeom prst="rect">
+            <a:avLst/>
+          </a:prstGeom>
+        </p:spPr>
+        <p:txBody>
+          <a:bodyPr vert="horz" lIns="68580" tIns="34290" rIns="68580" bIns="34290" rtlCol="0" anchor="ctr">
+            <a:noAutofit/>
+          </a:bodyPr>
+          <a:lstStyle/>
+          <a:p>
+            <a:pPr lvl="0"/>
+            <a:r>
+              <a:rPr lang="en-US" sz="6000" baseline="0" dirty="0">
+                <a:ln w="3175" cmpd="sng">
+                  <a:noFill/>
+                </a:ln>
+                <a:solidFill>
+                  <a:schemeClr val="accent1">
+                    <a:lumMod val="60000"/>
+                    <a:lumOff val="40000"/>
+                  </a:schemeClr>
+                </a:solidFill>
+                <a:effectLst/>
+                <a:latin typeface="Arial"/>
+              </a:rPr>
+              <a:t>“</a:t>
+            </a:r>
+          </a:p>
+        </p:txBody>
+      </p:sp>
+      <p:sp>
+        <p:nvSpPr>
+          <p:cNvPr id="25" name="TextBox 24"/>
+          <p:cNvSpPr txBox="1"/>
+          <p:nvPr/>
+        </p:nvSpPr>
+        <p:spPr>
+          <a:xfrm>
+            <a:off x="6669758" y="2164917"/>
+            <a:ext cx="457200" cy="438582"/>
+          </a:xfrm>
+          <a:prstGeom prst="rect">
+            <a:avLst/>
+          </a:prstGeom>
+        </p:spPr>
+        <p:txBody>
+          <a:bodyPr vert="horz" lIns="68580" tIns="34290" rIns="68580" bIns="34290" rtlCol="0" anchor="ctr">
+            <a:noAutofit/>
+          </a:bodyPr>
+          <a:lstStyle/>
+          <a:p>
+            <a:pPr lvl="0"/>
+            <a:r>
+              <a:rPr lang="en-US" sz="6000" baseline="0" dirty="0">
+                <a:ln w="3175" cmpd="sng">
+                  <a:noFill/>
+                </a:ln>
+                <a:solidFill>
+                  <a:schemeClr val="accent1">
+                    <a:lumMod val="60000"/>
+                    <a:lumOff val="40000"/>
+                  </a:schemeClr>
+                </a:solidFill>
+                <a:effectLst/>
+                <a:latin typeface="Arial"/>
+              </a:rPr>
+              <a:t>”</a:t>
+            </a:r>
+          </a:p>
+        </p:txBody>
+      </p:sp>
+    </p:spTree>
+    <p:extLst>
+      <p:ext uri="{BB962C8B-B14F-4D97-AF65-F5344CB8AC3E}">
+        <p14:creationId xmlns:p14="http://schemas.microsoft.com/office/powerpoint/2010/main" val="3581337581"/>
+      </p:ext>
+    </p:extLst>
+  </p:cSld>
+  <p:clrMapOvr>
+    <a:masterClrMapping/>
+  </p:clrMapOvr>
+  <p:hf sldNum="0" hdr="0" ftr="0" dt="0"/>
+</p:sldLayout>
+</file>
+
+<file path=ppt/slideLayouts/slideLayout14.xml><?xml version="1.0" encoding="utf-8"?>
+<p:sldLayout xmlns:a="http://schemas.openxmlformats.org/drawingml/2006/main" xmlns:r="http://schemas.openxmlformats.org/officeDocument/2006/relationships" xmlns:p="http://schemas.openxmlformats.org/presentationml/2006/main" preserve="1">
+  <p:cSld name="True or False">
+    <p:spTree>
+      <p:nvGrpSpPr>
+        <p:cNvPr id="1" name=""/>
+        <p:cNvGrpSpPr/>
+        <p:nvPr/>
+      </p:nvGrpSpPr>
+      <p:grpSpPr>
+        <a:xfrm>
+          <a:off x="0" y="0"/>
+          <a:ext cx="0" cy="0"/>
+          <a:chOff x="0" y="0"/>
+          <a:chExt cx="0" cy="0"/>
+        </a:xfrm>
+      </p:grpSpPr>
+      <p:sp>
+        <p:nvSpPr>
+          <p:cNvPr id="2" name="Title 1"/>
+          <p:cNvSpPr>
+            <a:spLocks noGrp="1"/>
+          </p:cNvSpPr>
+          <p:nvPr>
+            <p:ph type="title"/>
+          </p:nvPr>
+        </p:nvSpPr>
+        <p:spPr>
+          <a:xfrm>
+            <a:off x="514350" y="457200"/>
+            <a:ext cx="6441152" cy="2266950"/>
+          </a:xfrm>
+        </p:spPr>
+        <p:txBody>
+          <a:bodyPr anchor="ctr">
+            <a:normAutofit/>
+          </a:bodyPr>
+          <a:lstStyle>
+            <a:lvl1pPr algn="l">
+              <a:defRPr sz="3300" b="0" cap="none"/>
+            </a:lvl1pPr>
+          </a:lstStyle>
+          <a:p>
+            <a:r>
+              <a:rPr lang="en-US"/>
+              <a:t>Click to edit Master title style</a:t>
+            </a:r>
+            <a:endParaRPr lang="en-US" dirty="0"/>
+          </a:p>
+        </p:txBody>
+      </p:sp>
+      <p:sp>
+        <p:nvSpPr>
+          <p:cNvPr id="23" name="Text Placeholder 9"/>
+          <p:cNvSpPr>
+            <a:spLocks noGrp="1"/>
+          </p:cNvSpPr>
+          <p:nvPr>
+            <p:ph type="body" sz="quarter" idx="13"/>
+          </p:nvPr>
+        </p:nvSpPr>
+        <p:spPr>
+          <a:xfrm>
+            <a:off x="507999" y="3009900"/>
+            <a:ext cx="6447502" cy="385686"/>
+          </a:xfrm>
+        </p:spPr>
+        <p:txBody>
+          <a:bodyPr anchor="b">
+            <a:noAutofit/>
+          </a:bodyPr>
+          <a:lstStyle>
+            <a:lvl1pPr marL="0" indent="0">
+              <a:buFontTx/>
+              <a:buNone/>
+              <a:defRPr sz="1800">
+                <a:solidFill>
+                  <a:schemeClr val="accent1"/>
+                </a:solidFill>
+              </a:defRPr>
+            </a:lvl1pPr>
+            <a:lvl2pPr marL="342900" indent="0">
+              <a:buFontTx/>
+              <a:buNone/>
+              <a:defRPr/>
+            </a:lvl2pPr>
+            <a:lvl3pPr marL="685800" indent="0">
+              <a:buFontTx/>
+              <a:buNone/>
+              <a:defRPr/>
+            </a:lvl3pPr>
+            <a:lvl4pPr marL="1028700" indent="0">
+              <a:buFontTx/>
+              <a:buNone/>
+              <a:defRPr/>
+            </a:lvl4pPr>
+            <a:lvl5pPr marL="1371600" indent="0">
+              <a:buFontTx/>
+              <a:buNone/>
+              <a:defRPr/>
+            </a:lvl5pPr>
+          </a:lstStyle>
+          <a:p>
+            <a:pPr lvl="0"/>
+            <a:r>
+              <a:rPr lang="en-US"/>
+              <a:t>Click to edit Master text styles</a:t>
+            </a:r>
+          </a:p>
+        </p:txBody>
+      </p:sp>
+      <p:sp>
+        <p:nvSpPr>
+          <p:cNvPr id="3" name="Text Placeholder 2"/>
+          <p:cNvSpPr>
+            <a:spLocks noGrp="1"/>
+          </p:cNvSpPr>
+          <p:nvPr>
+            <p:ph type="body" idx="1"/>
+          </p:nvPr>
+        </p:nvSpPr>
+        <p:spPr>
+          <a:xfrm>
+            <a:off x="508001" y="3395586"/>
+            <a:ext cx="6447501" cy="1135436"/>
+          </a:xfrm>
+        </p:spPr>
+        <p:txBody>
+          <a:bodyPr anchor="t">
+            <a:normAutofit/>
+          </a:bodyPr>
+          <a:lstStyle>
+            <a:lvl1pPr marL="0" indent="0" algn="l">
+              <a:buNone/>
+              <a:defRPr sz="1350">
+                <a:solidFill>
+                  <a:schemeClr val="tx1">
+                    <a:lumMod val="50000"/>
+                    <a:lumOff val="50000"/>
+                  </a:schemeClr>
+                </a:solidFill>
+              </a:defRPr>
+            </a:lvl1pPr>
+            <a:lvl2pPr marL="342900" indent="0">
+              <a:buNone/>
+              <a:defRPr sz="1350">
+                <a:solidFill>
+                  <a:schemeClr val="tx1">
+                    <a:tint val="75000"/>
+                  </a:schemeClr>
+                </a:solidFill>
+              </a:defRPr>
+            </a:lvl2pPr>
+            <a:lvl3pPr marL="685800" indent="0">
+              <a:buNone/>
+              <a:defRPr sz="1200">
+                <a:solidFill>
+                  <a:schemeClr val="tx1">
+                    <a:tint val="75000"/>
+                  </a:schemeClr>
+                </a:solidFill>
+              </a:defRPr>
+            </a:lvl3pPr>
+            <a:lvl4pPr marL="1028700" indent="0">
+              <a:buNone/>
+              <a:defRPr sz="1050">
+                <a:solidFill>
+                  <a:schemeClr val="tx1">
+                    <a:tint val="75000"/>
+                  </a:schemeClr>
+                </a:solidFill>
+              </a:defRPr>
+            </a:lvl4pPr>
+            <a:lvl5pPr marL="1371600" indent="0">
+              <a:buNone/>
+              <a:defRPr sz="1050">
+                <a:solidFill>
+                  <a:schemeClr val="tx1">
+                    <a:tint val="75000"/>
+                  </a:schemeClr>
+                </a:solidFill>
+              </a:defRPr>
+            </a:lvl5pPr>
+            <a:lvl6pPr marL="1714500" indent="0">
+              <a:buNone/>
+              <a:defRPr sz="1050">
+                <a:solidFill>
+                  <a:schemeClr val="tx1">
+                    <a:tint val="75000"/>
+                  </a:schemeClr>
+                </a:solidFill>
+              </a:defRPr>
+            </a:lvl6pPr>
+            <a:lvl7pPr marL="2057400" indent="0">
+              <a:buNone/>
+              <a:defRPr sz="1050">
+                <a:solidFill>
+                  <a:schemeClr val="tx1">
+                    <a:tint val="75000"/>
+                  </a:schemeClr>
+                </a:solidFill>
+              </a:defRPr>
+            </a:lvl7pPr>
+            <a:lvl8pPr marL="2400300" indent="0">
+              <a:buNone/>
+              <a:defRPr sz="1050">
+                <a:solidFill>
+                  <a:schemeClr val="tx1">
+                    <a:tint val="75000"/>
+                  </a:schemeClr>
+                </a:solidFill>
+              </a:defRPr>
+            </a:lvl8pPr>
+            <a:lvl9pPr marL="2743200" indent="0">
+              <a:buNone/>
+              <a:defRPr sz="1050">
+                <a:solidFill>
+                  <a:schemeClr val="tx1">
+                    <a:tint val="75000"/>
+                  </a:schemeClr>
+                </a:solidFill>
+              </a:defRPr>
+            </a:lvl9pPr>
+          </a:lstStyle>
+          <a:p>
+            <a:pPr lvl="0"/>
+            <a:r>
+              <a:rPr lang="en-US"/>
+              <a:t>Click to edit Master text styles</a:t>
+            </a:r>
+          </a:p>
+        </p:txBody>
+      </p:sp>
+      <p:sp>
+        <p:nvSpPr>
+          <p:cNvPr id="4" name="Date Placeholder 3"/>
+          <p:cNvSpPr>
+            <a:spLocks noGrp="1"/>
+          </p:cNvSpPr>
+          <p:nvPr>
+            <p:ph type="dt" sz="half" idx="10"/>
+          </p:nvPr>
+        </p:nvSpPr>
+        <p:spPr/>
+        <p:txBody>
+          <a:bodyPr/>
+          <a:lstStyle/>
+          <a:p>
+            <a:fld id="{B61BEF0D-F0BB-DE4B-95CE-6DB70DBA9567}" type="datetimeFigureOut">
+              <a:rPr lang="en-US" smtClean="0"/>
+              <a:pPr/>
+              <a:t>8/5/2026</a:t>
+            </a:fld>
+            <a:endParaRPr lang="en-US" dirty="0"/>
+          </a:p>
+        </p:txBody>
+      </p:sp>
+      <p:sp>
+        <p:nvSpPr>
+          <p:cNvPr id="5" name="Footer Placeholder 4"/>
+          <p:cNvSpPr>
+            <a:spLocks noGrp="1"/>
+          </p:cNvSpPr>
+          <p:nvPr>
+            <p:ph type="ftr" sz="quarter" idx="11"/>
+          </p:nvPr>
+        </p:nvSpPr>
+        <p:spPr/>
+        <p:txBody>
+          <a:bodyPr/>
+          <a:lstStyle/>
+          <a:p>
+            <a:endParaRPr lang="en-US" dirty="0"/>
+          </a:p>
+        </p:txBody>
+      </p:sp>
+      <p:sp>
+        <p:nvSpPr>
+          <p:cNvPr id="6" name="Slide Number Placeholder 5"/>
+          <p:cNvSpPr>
+            <a:spLocks noGrp="1"/>
+          </p:cNvSpPr>
+          <p:nvPr>
+            <p:ph type="sldNum" sz="quarter" idx="12"/>
+          </p:nvPr>
+        </p:nvSpPr>
+        <p:spPr/>
+        <p:txBody>
+          <a:bodyPr/>
+          <a:lstStyle/>
+          <a:p>
+            <a:fld id="{D57F1E4F-1CFF-5643-939E-217C01CDF565}" type="slidenum">
+              <a:rPr lang="en-US" smtClean="0"/>
+              <a:pPr/>
+              <a:t>‹#›</a:t>
+            </a:fld>
+            <a:endParaRPr lang="en-US" dirty="0"/>
+          </a:p>
+        </p:txBody>
+      </p:sp>
+    </p:spTree>
+    <p:extLst>
+      <p:ext uri="{BB962C8B-B14F-4D97-AF65-F5344CB8AC3E}">
+        <p14:creationId xmlns:p14="http://schemas.microsoft.com/office/powerpoint/2010/main" val="1889622512"/>
+      </p:ext>
+    </p:extLst>
+  </p:cSld>
+  <p:clrMapOvr>
+    <a:masterClrMapping/>
+  </p:clrMapOvr>
+  <p:hf sldNum="0" hdr="0" ftr="0" dt="0"/>
+</p:sldLayout>
+</file>
+
+<file path=ppt/slideLayouts/slideLayout15.xml><?xml version="1.0" encoding="utf-8"?>
 <p:sldLayout xmlns:a="http://schemas.openxmlformats.org/drawingml/2006/main" xmlns:r="http://schemas.openxmlformats.org/officeDocument/2006/relationships" xmlns:p="http://schemas.openxmlformats.org/presentationml/2006/main" type="vertTx" preserve="1">
   <p:cSld name="Title and Vertical Text">
     <p:spTree>
@@ -1477,7 +3639,7 @@
             <a:fld id="{B61BEF0D-F0BB-DE4B-95CE-6DB70DBA9567}" type="datetimeFigureOut">
               <a:rPr lang="en-US" smtClean="0"/>
               <a:pPr/>
-              <a:t>8/4/2026</a:t>
+              <a:t>8/5/2026</a:t>
             </a:fld>
             <a:endParaRPr lang="en-US" dirty="0"/>
           </a:p>
@@ -1526,64 +3688,21 @@
           </a:p>
         </p:txBody>
       </p:sp>
-      <p:cxnSp>
-        <p:nvCxnSpPr>
-          <p:cNvPr id="26" name="Straight Connector 25"/>
-          <p:cNvCxnSpPr/>
-          <p:nvPr/>
-        </p:nvCxnSpPr>
-        <p:spPr>
-          <a:xfrm>
-            <a:off x="1090422" y="1385316"/>
-            <a:ext cx="7205642" cy="0"/>
-          </a:xfrm>
-          <a:prstGeom prst="line">
-            <a:avLst/>
-          </a:prstGeom>
-          <a:ln w="31750"/>
-        </p:spPr>
-        <p:style>
-          <a:lnRef idx="3">
-            <a:schemeClr val="accent1"/>
-          </a:lnRef>
-          <a:fillRef idx="0">
-            <a:schemeClr val="accent1"/>
-          </a:fillRef>
-          <a:effectRef idx="2">
-            <a:schemeClr val="accent1"/>
-          </a:effectRef>
-          <a:fontRef idx="minor">
-            <a:schemeClr val="tx1"/>
-          </a:fontRef>
-        </p:style>
-      </p:cxnSp>
     </p:spTree>
     <p:extLst>
       <p:ext uri="{BB962C8B-B14F-4D97-AF65-F5344CB8AC3E}">
-        <p14:creationId xmlns:p14="http://schemas.microsoft.com/office/powerpoint/2010/main" val="838345452"/>
+        <p14:creationId xmlns:p14="http://schemas.microsoft.com/office/powerpoint/2010/main" val="3884683347"/>
       </p:ext>
     </p:extLst>
   </p:cSld>
   <p:clrMapOvr>
     <a:masterClrMapping/>
   </p:clrMapOvr>
-  <mc:AlternateContent xmlns:mc="http://schemas.openxmlformats.org/markup-compatibility/2006">
-    <mc:Choice xmlns:p15="http://schemas.microsoft.com/office/powerpoint/2012/main" Requires="p15">
-      <p:transition xmlns:p14="http://schemas.microsoft.com/office/powerpoint/2010/main" spd="slow" p14:dur="2000" advTm="0">
-        <p15:prstTrans prst="drape"/>
-      </p:transition>
-    </mc:Choice>
-    <mc:Fallback>
-      <p:transition spd="slow" advTm="0">
-        <p:fade/>
-      </p:transition>
-    </mc:Fallback>
-  </mc:AlternateContent>
   <p:hf sldNum="0" hdr="0" ftr="0" dt="0"/>
 </p:sldLayout>
 </file>
 
-<file path=ppt/slideLayouts/slideLayout11.xml><?xml version="1.0" encoding="utf-8"?>
+<file path=ppt/slideLayouts/slideLayout16.xml><?xml version="1.0" encoding="utf-8"?>
 <p:sldLayout xmlns:a="http://schemas.openxmlformats.org/drawingml/2006/main" xmlns:r="http://schemas.openxmlformats.org/officeDocument/2006/relationships" xmlns:p="http://schemas.openxmlformats.org/presentationml/2006/main" type="vertTitleAndTx" preserve="1">
   <p:cSld name="Vertical Title and Text">
     <p:spTree>
@@ -1612,17 +3731,13 @@
         </p:nvSpPr>
         <p:spPr>
           <a:xfrm>
-            <a:off x="7079333" y="599230"/>
-            <a:ext cx="1211807" cy="3494917"/>
-          </a:xfrm>
-        </p:spPr>
-        <p:txBody>
-          <a:bodyPr vert="eaVert"/>
-          <a:lstStyle>
-            <a:lvl1pPr algn="l">
-              <a:defRPr/>
-            </a:lvl1pPr>
-          </a:lstStyle>
+            <a:off x="5975755" y="457200"/>
+            <a:ext cx="978557" cy="3938588"/>
+          </a:xfrm>
+        </p:spPr>
+        <p:txBody>
+          <a:bodyPr vert="eaVert" anchor="ctr"/>
+          <a:lstStyle/>
           <a:p>
             <a:r>
               <a:rPr lang="en-US"/>
@@ -1644,8 +3759,8 @@
         </p:nvSpPr>
         <p:spPr>
           <a:xfrm>
-            <a:off x="1083504" y="599230"/>
-            <a:ext cx="5871623" cy="3494917"/>
+            <a:off x="508001" y="457200"/>
+            <a:ext cx="5295113" cy="3938588"/>
           </a:xfrm>
         </p:spPr>
         <p:txBody>
@@ -1707,7 +3822,7 @@
             <a:fld id="{B61BEF0D-F0BB-DE4B-95CE-6DB70DBA9567}" type="datetimeFigureOut">
               <a:rPr lang="en-US" smtClean="0"/>
               <a:pPr/>
-              <a:t>8/4/2026</a:t>
+              <a:t>8/5/2026</a:t>
             </a:fld>
             <a:endParaRPr lang="en-US" dirty="0"/>
           </a:p>
@@ -1756,64 +3871,21 @@
           </a:p>
         </p:txBody>
       </p:sp>
-      <p:cxnSp>
-        <p:nvCxnSpPr>
-          <p:cNvPr id="15" name="Straight Connector 14"/>
-          <p:cNvCxnSpPr/>
-          <p:nvPr/>
-        </p:nvCxnSpPr>
-        <p:spPr>
-          <a:xfrm>
-            <a:off x="7079333" y="599230"/>
-            <a:ext cx="0" cy="3494917"/>
-          </a:xfrm>
-          <a:prstGeom prst="line">
-            <a:avLst/>
-          </a:prstGeom>
-          <a:ln w="31750"/>
-        </p:spPr>
-        <p:style>
-          <a:lnRef idx="3">
-            <a:schemeClr val="accent1"/>
-          </a:lnRef>
-          <a:fillRef idx="0">
-            <a:schemeClr val="accent1"/>
-          </a:fillRef>
-          <a:effectRef idx="2">
-            <a:schemeClr val="accent1"/>
-          </a:effectRef>
-          <a:fontRef idx="minor">
-            <a:schemeClr val="tx1"/>
-          </a:fontRef>
-        </p:style>
-      </p:cxnSp>
     </p:spTree>
     <p:extLst>
       <p:ext uri="{BB962C8B-B14F-4D97-AF65-F5344CB8AC3E}">
-        <p14:creationId xmlns:p14="http://schemas.microsoft.com/office/powerpoint/2010/main" val="3356791521"/>
+        <p14:creationId xmlns:p14="http://schemas.microsoft.com/office/powerpoint/2010/main" val="1738423460"/>
       </p:ext>
     </p:extLst>
   </p:cSld>
   <p:clrMapOvr>
     <a:masterClrMapping/>
   </p:clrMapOvr>
-  <mc:AlternateContent xmlns:mc="http://schemas.openxmlformats.org/markup-compatibility/2006">
-    <mc:Choice xmlns:p15="http://schemas.microsoft.com/office/powerpoint/2012/main" Requires="p15">
-      <p:transition xmlns:p14="http://schemas.microsoft.com/office/powerpoint/2010/main" spd="slow" p14:dur="2000" advTm="0">
-        <p15:prstTrans prst="drape"/>
-      </p:transition>
-    </mc:Choice>
-    <mc:Fallback>
-      <p:transition spd="slow" advTm="0">
-        <p:fade/>
-      </p:transition>
-    </mc:Fallback>
-  </mc:AlternateContent>
   <p:hf sldNum="0" hdr="0" ftr="0" dt="0"/>
 </p:sldLayout>
 </file>
 
-<file path=ppt/slideLayouts/slideLayout12.xml><?xml version="1.0" encoding="utf-8"?>
+<file path=ppt/slideLayouts/slideLayout17.xml><?xml version="1.0" encoding="utf-8"?>
 <p:sldLayout xmlns:a="http://schemas.openxmlformats.org/drawingml/2006/main" xmlns:r="http://schemas.openxmlformats.org/officeDocument/2006/relationships" xmlns:p="http://schemas.openxmlformats.org/presentationml/2006/main">
   <p:cSld name="Slide master 1">
     <p:spTree>
@@ -1833,20 +3905,20 @@
     </p:spTree>
     <p:extLst>
       <p:ext uri="{BB962C8B-B14F-4D97-AF65-F5344CB8AC3E}">
-        <p14:creationId xmlns:p14="http://schemas.microsoft.com/office/powerpoint/2010/main" val="2038903458"/>
+        <p14:creationId xmlns:p14="http://schemas.microsoft.com/office/powerpoint/2010/main" val="857551616"/>
       </p:ext>
     </p:extLst>
   </p:cSld>
   <p:clrMapOvr>
     <a:masterClrMapping/>
   </p:clrMapOvr>
-  <mc:AlternateContent xmlns:mc="http://schemas.openxmlformats.org/markup-compatibility/2006">
-    <mc:Choice xmlns:p15="http://schemas.microsoft.com/office/powerpoint/2012/main" Requires="p15">
+  <mc:AlternateContent xmlns:mc="http://schemas.openxmlformats.org/markup-compatibility/2006" xmlns:p15="http://schemas.microsoft.com/office/powerpoint/2012/main">
+    <mc:Choice Requires="p15">
       <p:transition xmlns:p14="http://schemas.microsoft.com/office/powerpoint/2010/main" spd="slow" p14:dur="2000" advTm="0">
         <p15:prstTrans prst="drape"/>
       </p:transition>
     </mc:Choice>
-    <mc:Fallback>
+    <mc:Fallback xmlns="">
       <p:transition spd="slow" advTm="0">
         <p:fade/>
       </p:transition>
@@ -1884,8 +3956,14 @@
         </p:nvSpPr>
         <p:spPr/>
         <p:txBody>
-          <a:bodyPr/>
-          <a:lstStyle/>
+          <a:bodyPr>
+            <a:normAutofit/>
+          </a:bodyPr>
+          <a:lstStyle>
+            <a:lvl1pPr>
+              <a:defRPr sz="2700"/>
+            </a:lvl1pPr>
+          </a:lstStyle>
           <a:p>
             <a:r>
               <a:rPr lang="en-US"/>
@@ -1907,7 +3985,7 @@
         </p:nvSpPr>
         <p:spPr/>
         <p:txBody>
-          <a:bodyPr anchor="t"/>
+          <a:bodyPr/>
           <a:lstStyle/>
           <a:p>
             <a:pPr lvl="0"/>
@@ -1965,7 +4043,7 @@
             <a:fld id="{B61BEF0D-F0BB-DE4B-95CE-6DB70DBA9567}" type="datetimeFigureOut">
               <a:rPr lang="en-US" smtClean="0"/>
               <a:pPr/>
-              <a:t>8/4/2026</a:t>
+              <a:t>8/5/2026</a:t>
             </a:fld>
             <a:endParaRPr lang="en-US" dirty="0"/>
           </a:p>
@@ -2014,59 +4092,16 @@
           </a:p>
         </p:txBody>
       </p:sp>
-      <p:cxnSp>
-        <p:nvCxnSpPr>
-          <p:cNvPr id="33" name="Straight Connector 32"/>
-          <p:cNvCxnSpPr/>
-          <p:nvPr/>
-        </p:nvCxnSpPr>
-        <p:spPr>
-          <a:xfrm>
-            <a:off x="1090422" y="1385316"/>
-            <a:ext cx="7205642" cy="0"/>
-          </a:xfrm>
-          <a:prstGeom prst="line">
-            <a:avLst/>
-          </a:prstGeom>
-          <a:ln w="31750"/>
-        </p:spPr>
-        <p:style>
-          <a:lnRef idx="3">
-            <a:schemeClr val="accent1"/>
-          </a:lnRef>
-          <a:fillRef idx="0">
-            <a:schemeClr val="accent1"/>
-          </a:fillRef>
-          <a:effectRef idx="2">
-            <a:schemeClr val="accent1"/>
-          </a:effectRef>
-          <a:fontRef idx="minor">
-            <a:schemeClr val="tx1"/>
-          </a:fontRef>
-        </p:style>
-      </p:cxnSp>
     </p:spTree>
     <p:extLst>
       <p:ext uri="{BB962C8B-B14F-4D97-AF65-F5344CB8AC3E}">
-        <p14:creationId xmlns:p14="http://schemas.microsoft.com/office/powerpoint/2010/main" val="3189126088"/>
+        <p14:creationId xmlns:p14="http://schemas.microsoft.com/office/powerpoint/2010/main" val="200723393"/>
       </p:ext>
     </p:extLst>
   </p:cSld>
   <p:clrMapOvr>
     <a:masterClrMapping/>
   </p:clrMapOvr>
-  <mc:AlternateContent xmlns:mc="http://schemas.openxmlformats.org/markup-compatibility/2006">
-    <mc:Choice xmlns:p15="http://schemas.microsoft.com/office/powerpoint/2012/main" Requires="p15">
-      <p:transition xmlns:p14="http://schemas.microsoft.com/office/powerpoint/2010/main" spd="slow" p14:dur="2000" advTm="0">
-        <p15:prstTrans prst="drape"/>
-      </p:transition>
-    </mc:Choice>
-    <mc:Fallback>
-      <p:transition spd="slow" advTm="0">
-        <p:fade/>
-      </p:transition>
-    </mc:Fallback>
-  </mc:AlternateContent>
   <p:hf sldNum="0" hdr="0" ftr="0" dt="0"/>
 </p:sldLayout>
 </file>
@@ -2100,17 +4135,15 @@
         </p:nvSpPr>
         <p:spPr>
           <a:xfrm>
-            <a:off x="1090679" y="1317097"/>
-            <a:ext cx="6482366" cy="1415963"/>
-          </a:xfrm>
-        </p:spPr>
-        <p:txBody>
-          <a:bodyPr anchor="b">
-            <a:normAutofit/>
-          </a:bodyPr>
+            <a:off x="508001" y="2025651"/>
+            <a:ext cx="6447501" cy="1369936"/>
+          </a:xfrm>
+        </p:spPr>
+        <p:txBody>
+          <a:bodyPr anchor="b"/>
           <a:lstStyle>
             <a:lvl1pPr algn="l">
-              <a:defRPr sz="2700"/>
+              <a:defRPr sz="3000" b="0" cap="none"/>
             </a:lvl1pPr>
           </a:lstStyle>
           <a:p>
@@ -2134,20 +4167,21 @@
         </p:nvSpPr>
         <p:spPr>
           <a:xfrm>
-            <a:off x="1090679" y="2854647"/>
-            <a:ext cx="6472835" cy="759697"/>
-          </a:xfrm>
-        </p:spPr>
-        <p:txBody>
-          <a:bodyPr tIns="91440">
-            <a:normAutofit/>
-          </a:bodyPr>
+            <a:off x="508001" y="3395586"/>
+            <a:ext cx="6447501" cy="645300"/>
+          </a:xfrm>
+        </p:spPr>
+        <p:txBody>
+          <a:bodyPr anchor="t"/>
           <a:lstStyle>
             <a:lvl1pPr marL="0" indent="0" algn="l">
               <a:buNone/>
-              <a:defRPr sz="1350">
-                <a:solidFill>
-                  <a:schemeClr val="tx1"/>
+              <a:defRPr sz="1500">
+                <a:solidFill>
+                  <a:schemeClr val="tx1">
+                    <a:lumMod val="50000"/>
+                    <a:lumOff val="50000"/>
+                  </a:schemeClr>
                 </a:solidFill>
               </a:defRPr>
             </a:lvl1pPr>
@@ -2163,7 +4197,7 @@
             </a:lvl2pPr>
             <a:lvl3pPr marL="685800" indent="0">
               <a:buNone/>
-              <a:defRPr sz="1350">
+              <a:defRPr sz="1200">
                 <a:solidFill>
                   <a:schemeClr val="tx1">
                     <a:tint val="75000"/>
@@ -2173,7 +4207,7 @@
             </a:lvl3pPr>
             <a:lvl4pPr marL="1028700" indent="0">
               <a:buNone/>
-              <a:defRPr sz="1200">
+              <a:defRPr sz="1050">
                 <a:solidFill>
                   <a:schemeClr val="tx1">
                     <a:tint val="75000"/>
@@ -2183,7 +4217,7 @@
             </a:lvl4pPr>
             <a:lvl5pPr marL="1371600" indent="0">
               <a:buNone/>
-              <a:defRPr sz="1200">
+              <a:defRPr sz="1050">
                 <a:solidFill>
                   <a:schemeClr val="tx1">
                     <a:tint val="75000"/>
@@ -2193,7 +4227,7 @@
             </a:lvl5pPr>
             <a:lvl6pPr marL="1714500" indent="0">
               <a:buNone/>
-              <a:defRPr sz="1200">
+              <a:defRPr sz="1050">
                 <a:solidFill>
                   <a:schemeClr val="tx1">
                     <a:tint val="75000"/>
@@ -2203,7 +4237,7 @@
             </a:lvl6pPr>
             <a:lvl7pPr marL="2057400" indent="0">
               <a:buNone/>
-              <a:defRPr sz="1200">
+              <a:defRPr sz="1050">
                 <a:solidFill>
                   <a:schemeClr val="tx1">
                     <a:tint val="75000"/>
@@ -2213,7 +4247,7 @@
             </a:lvl7pPr>
             <a:lvl8pPr marL="2400300" indent="0">
               <a:buNone/>
-              <a:defRPr sz="1200">
+              <a:defRPr sz="1050">
                 <a:solidFill>
                   <a:schemeClr val="tx1">
                     <a:tint val="75000"/>
@@ -2223,7 +4257,7 @@
             </a:lvl8pPr>
             <a:lvl9pPr marL="2743200" indent="0">
               <a:buNone/>
-              <a:defRPr sz="1200">
+              <a:defRPr sz="1050">
                 <a:solidFill>
                   <a:schemeClr val="tx1">
                     <a:tint val="75000"/>
@@ -2259,7 +4293,7 @@
             <a:fld id="{B61BEF0D-F0BB-DE4B-95CE-6DB70DBA9567}" type="datetimeFigureOut">
               <a:rPr lang="en-US" smtClean="0"/>
               <a:pPr/>
-              <a:t>8/4/2026</a:t>
+              <a:t>8/5/2026</a:t>
             </a:fld>
             <a:endParaRPr lang="en-US" dirty="0"/>
           </a:p>
@@ -2308,59 +4342,16 @@
           </a:p>
         </p:txBody>
       </p:sp>
-      <p:cxnSp>
-        <p:nvCxnSpPr>
-          <p:cNvPr id="15" name="Straight Connector 14"/>
-          <p:cNvCxnSpPr/>
-          <p:nvPr/>
-        </p:nvCxnSpPr>
-        <p:spPr>
-          <a:xfrm>
-            <a:off x="1090679" y="2853739"/>
-            <a:ext cx="6472835" cy="0"/>
-          </a:xfrm>
-          <a:prstGeom prst="line">
-            <a:avLst/>
-          </a:prstGeom>
-          <a:ln w="31750"/>
-        </p:spPr>
-        <p:style>
-          <a:lnRef idx="3">
-            <a:schemeClr val="accent1"/>
-          </a:lnRef>
-          <a:fillRef idx="0">
-            <a:schemeClr val="accent1"/>
-          </a:fillRef>
-          <a:effectRef idx="2">
-            <a:schemeClr val="accent1"/>
-          </a:effectRef>
-          <a:fontRef idx="minor">
-            <a:schemeClr val="tx1"/>
-          </a:fontRef>
-        </p:style>
-      </p:cxnSp>
     </p:spTree>
     <p:extLst>
       <p:ext uri="{BB962C8B-B14F-4D97-AF65-F5344CB8AC3E}">
-        <p14:creationId xmlns:p14="http://schemas.microsoft.com/office/powerpoint/2010/main" val="2037102306"/>
+        <p14:creationId xmlns:p14="http://schemas.microsoft.com/office/powerpoint/2010/main" val="4202323901"/>
       </p:ext>
     </p:extLst>
   </p:cSld>
   <p:clrMapOvr>
     <a:masterClrMapping/>
   </p:clrMapOvr>
-  <mc:AlternateContent xmlns:mc="http://schemas.openxmlformats.org/markup-compatibility/2006">
-    <mc:Choice xmlns:p15="http://schemas.microsoft.com/office/powerpoint/2012/main" Requires="p15">
-      <p:transition xmlns:p14="http://schemas.microsoft.com/office/powerpoint/2010/main" spd="slow" p14:dur="2000" advTm="0">
-        <p15:prstTrans prst="drape"/>
-      </p:transition>
-    </mc:Choice>
-    <mc:Fallback>
-      <p:transition spd="slow" advTm="0">
-        <p:fade/>
-      </p:transition>
-    </mc:Fallback>
-  </mc:AlternateContent>
   <p:hf sldNum="0" hdr="0" ftr="0" dt="0"/>
 </p:sldLayout>
 </file>
@@ -2392,12 +4383,7 @@
             <p:ph type="title"/>
           </p:nvPr>
         </p:nvSpPr>
-        <p:spPr>
-          <a:xfrm>
-            <a:off x="1086913" y="603667"/>
-            <a:ext cx="7204226" cy="794479"/>
-          </a:xfrm>
-        </p:spPr>
+        <p:spPr/>
         <p:txBody>
           <a:bodyPr/>
           <a:lstStyle/>
@@ -2422,8 +4408,8 @@
         </p:nvSpPr>
         <p:spPr>
           <a:xfrm>
-            <a:off x="1085498" y="1508159"/>
-            <a:ext cx="3483864" cy="2586446"/>
+            <a:off x="508001" y="1620442"/>
+            <a:ext cx="3138026" cy="2910579"/>
           </a:xfrm>
         </p:spPr>
         <p:txBody>
@@ -2479,8 +4465,8 @@
         </p:nvSpPr>
         <p:spPr>
           <a:xfrm>
-            <a:off x="4810328" y="1513007"/>
-            <a:ext cx="3483864" cy="2581140"/>
+            <a:off x="3817477" y="1620442"/>
+            <a:ext cx="3138026" cy="2910580"/>
           </a:xfrm>
         </p:spPr>
         <p:txBody>
@@ -2542,7 +4528,7 @@
             <a:fld id="{B61BEF0D-F0BB-DE4B-95CE-6DB70DBA9567}" type="datetimeFigureOut">
               <a:rPr lang="en-US" smtClean="0"/>
               <a:pPr/>
-              <a:t>8/4/2026</a:t>
+              <a:t>8/5/2026</a:t>
             </a:fld>
             <a:endParaRPr lang="en-US" dirty="0"/>
           </a:p>
@@ -2591,59 +4577,16 @@
           </a:p>
         </p:txBody>
       </p:sp>
-      <p:cxnSp>
-        <p:nvCxnSpPr>
-          <p:cNvPr id="35" name="Straight Connector 34"/>
-          <p:cNvCxnSpPr/>
-          <p:nvPr/>
-        </p:nvCxnSpPr>
-        <p:spPr>
-          <a:xfrm>
-            <a:off x="1090422" y="1385316"/>
-            <a:ext cx="7205642" cy="0"/>
-          </a:xfrm>
-          <a:prstGeom prst="line">
-            <a:avLst/>
-          </a:prstGeom>
-          <a:ln w="31750"/>
-        </p:spPr>
-        <p:style>
-          <a:lnRef idx="3">
-            <a:schemeClr val="accent1"/>
-          </a:lnRef>
-          <a:fillRef idx="0">
-            <a:schemeClr val="accent1"/>
-          </a:fillRef>
-          <a:effectRef idx="2">
-            <a:schemeClr val="accent1"/>
-          </a:effectRef>
-          <a:fontRef idx="minor">
-            <a:schemeClr val="tx1"/>
-          </a:fontRef>
-        </p:style>
-      </p:cxnSp>
     </p:spTree>
     <p:extLst>
       <p:ext uri="{BB962C8B-B14F-4D97-AF65-F5344CB8AC3E}">
-        <p14:creationId xmlns:p14="http://schemas.microsoft.com/office/powerpoint/2010/main" val="616850425"/>
+        <p14:creationId xmlns:p14="http://schemas.microsoft.com/office/powerpoint/2010/main" val="829031457"/>
       </p:ext>
     </p:extLst>
   </p:cSld>
   <p:clrMapOvr>
     <a:masterClrMapping/>
   </p:clrMapOvr>
-  <mc:AlternateContent xmlns:mc="http://schemas.openxmlformats.org/markup-compatibility/2006">
-    <mc:Choice xmlns:p15="http://schemas.microsoft.com/office/powerpoint/2012/main" Requires="p15">
-      <p:transition xmlns:p14="http://schemas.microsoft.com/office/powerpoint/2010/main" spd="slow" p14:dur="2000" advTm="0">
-        <p15:prstTrans prst="drape"/>
-      </p:transition>
-    </mc:Choice>
-    <mc:Fallback>
-      <p:transition spd="slow" advTm="0">
-        <p:fade/>
-      </p:transition>
-    </mc:Fallback>
-  </mc:AlternateContent>
   <p:hf sldNum="0" hdr="0" ftr="0" dt="0"/>
 </p:sldLayout>
 </file>
@@ -2675,15 +4618,14 @@
             <p:ph type="title"/>
           </p:nvPr>
         </p:nvSpPr>
-        <p:spPr>
-          <a:xfrm>
-            <a:off x="1085394" y="603123"/>
-            <a:ext cx="7205746" cy="792239"/>
-          </a:xfrm>
-        </p:spPr>
+        <p:spPr/>
         <p:txBody>
           <a:bodyPr/>
-          <a:lstStyle/>
+          <a:lstStyle>
+            <a:lvl1pPr>
+              <a:defRPr/>
+            </a:lvl1pPr>
+          </a:lstStyle>
           <a:p>
             <a:r>
               <a:rPr lang="en-US"/>
@@ -2705,25 +4647,18 @@
         </p:nvSpPr>
         <p:spPr>
           <a:xfrm>
-            <a:off x="1085393" y="1514662"/>
-            <a:ext cx="3483864" cy="601457"/>
+            <a:off x="506809" y="1620737"/>
+            <a:ext cx="3139217" cy="432197"/>
           </a:xfrm>
         </p:spPr>
         <p:txBody>
           <a:bodyPr anchor="b">
-            <a:normAutofit/>
+            <a:noAutofit/>
           </a:bodyPr>
           <a:lstStyle>
             <a:lvl1pPr marL="0" indent="0">
-              <a:lnSpc>
-                <a:spcPct val="100000"/>
-              </a:lnSpc>
               <a:buNone/>
-              <a:defRPr sz="1650" b="0" cap="all" baseline="0">
-                <a:solidFill>
-                  <a:schemeClr val="accent1"/>
-                </a:solidFill>
-              </a:defRPr>
+              <a:defRPr sz="1800" b="0"/>
             </a:lvl1pPr>
             <a:lvl2pPr marL="342900" indent="0">
               <a:buNone/>
@@ -2779,12 +4714,14 @@
         </p:nvSpPr>
         <p:spPr>
           <a:xfrm>
-            <a:off x="1085393" y="2118202"/>
-            <a:ext cx="3483864" cy="1983343"/>
-          </a:xfrm>
-        </p:spPr>
-        <p:txBody>
-          <a:bodyPr/>
+            <a:off x="506809" y="2052934"/>
+            <a:ext cx="3139217" cy="2478088"/>
+          </a:xfrm>
+        </p:spPr>
+        <p:txBody>
+          <a:bodyPr>
+            <a:normAutofit/>
+          </a:bodyPr>
           <a:lstStyle/>
           <a:p>
             <a:pPr lvl="0"/>
@@ -2836,25 +4773,18 @@
         </p:nvSpPr>
         <p:spPr>
           <a:xfrm>
-            <a:off x="4809272" y="1517253"/>
-            <a:ext cx="3483864" cy="601678"/>
+            <a:off x="3816287" y="1620737"/>
+            <a:ext cx="3139214" cy="432197"/>
           </a:xfrm>
         </p:spPr>
         <p:txBody>
           <a:bodyPr anchor="b">
-            <a:normAutofit/>
+            <a:noAutofit/>
           </a:bodyPr>
           <a:lstStyle>
             <a:lvl1pPr marL="0" indent="0">
-              <a:lnSpc>
-                <a:spcPct val="100000"/>
-              </a:lnSpc>
               <a:buNone/>
-              <a:defRPr sz="1650" b="0" cap="all" baseline="0">
-                <a:solidFill>
-                  <a:schemeClr val="accent1"/>
-                </a:solidFill>
-              </a:defRPr>
+              <a:defRPr sz="1800" b="0"/>
             </a:lvl1pPr>
             <a:lvl2pPr marL="342900" indent="0">
               <a:buNone/>
@@ -2910,12 +4840,14 @@
         </p:nvSpPr>
         <p:spPr>
           <a:xfrm>
-            <a:off x="4809272" y="2116119"/>
-            <a:ext cx="3483864" cy="1978028"/>
-          </a:xfrm>
-        </p:spPr>
-        <p:txBody>
-          <a:bodyPr/>
+            <a:off x="3816288" y="2052934"/>
+            <a:ext cx="3139213" cy="2478088"/>
+          </a:xfrm>
+        </p:spPr>
+        <p:txBody>
+          <a:bodyPr>
+            <a:normAutofit/>
+          </a:bodyPr>
           <a:lstStyle/>
           <a:p>
             <a:pPr lvl="0"/>
@@ -2973,7 +4905,7 @@
             <a:fld id="{B61BEF0D-F0BB-DE4B-95CE-6DB70DBA9567}" type="datetimeFigureOut">
               <a:rPr lang="en-US" smtClean="0"/>
               <a:pPr/>
-              <a:t>8/4/2026</a:t>
+              <a:t>8/5/2026</a:t>
             </a:fld>
             <a:endParaRPr lang="en-US" dirty="0"/>
           </a:p>
@@ -3022,59 +4954,16 @@
           </a:p>
         </p:txBody>
       </p:sp>
-      <p:cxnSp>
-        <p:nvCxnSpPr>
-          <p:cNvPr id="29" name="Straight Connector 28"/>
-          <p:cNvCxnSpPr/>
-          <p:nvPr/>
-        </p:nvCxnSpPr>
-        <p:spPr>
-          <a:xfrm>
-            <a:off x="1090422" y="1385316"/>
-            <a:ext cx="7205642" cy="0"/>
-          </a:xfrm>
-          <a:prstGeom prst="line">
-            <a:avLst/>
-          </a:prstGeom>
-          <a:ln w="31750"/>
-        </p:spPr>
-        <p:style>
-          <a:lnRef idx="3">
-            <a:schemeClr val="accent1"/>
-          </a:lnRef>
-          <a:fillRef idx="0">
-            <a:schemeClr val="accent1"/>
-          </a:fillRef>
-          <a:effectRef idx="2">
-            <a:schemeClr val="accent1"/>
-          </a:effectRef>
-          <a:fontRef idx="minor">
-            <a:schemeClr val="tx1"/>
-          </a:fontRef>
-        </p:style>
-      </p:cxnSp>
     </p:spTree>
     <p:extLst>
       <p:ext uri="{BB962C8B-B14F-4D97-AF65-F5344CB8AC3E}">
-        <p14:creationId xmlns:p14="http://schemas.microsoft.com/office/powerpoint/2010/main" val="2377081784"/>
+        <p14:creationId xmlns:p14="http://schemas.microsoft.com/office/powerpoint/2010/main" val="1121244196"/>
       </p:ext>
     </p:extLst>
   </p:cSld>
   <p:clrMapOvr>
     <a:masterClrMapping/>
   </p:clrMapOvr>
-  <mc:AlternateContent xmlns:mc="http://schemas.openxmlformats.org/markup-compatibility/2006">
-    <mc:Choice xmlns:p15="http://schemas.microsoft.com/office/powerpoint/2012/main" Requires="p15">
-      <p:transition xmlns:p14="http://schemas.microsoft.com/office/powerpoint/2010/main" spd="slow" p14:dur="2000" advTm="0">
-        <p15:prstTrans prst="drape"/>
-      </p:transition>
-    </mc:Choice>
-    <mc:Fallback>
-      <p:transition spd="slow" advTm="0">
-        <p:fade/>
-      </p:transition>
-    </mc:Fallback>
-  </mc:AlternateContent>
   <p:hf sldNum="0" hdr="0" ftr="0" dt="0"/>
 </p:sldLayout>
 </file>
@@ -3106,7 +4995,12 @@
             <p:ph type="title"/>
           </p:nvPr>
         </p:nvSpPr>
-        <p:spPr/>
+        <p:spPr>
+          <a:xfrm>
+            <a:off x="508001" y="457200"/>
+            <a:ext cx="6447501" cy="990600"/>
+          </a:xfrm>
+        </p:spPr>
         <p:txBody>
           <a:bodyPr/>
           <a:lstStyle/>
@@ -3137,7 +5031,7 @@
             <a:fld id="{B61BEF0D-F0BB-DE4B-95CE-6DB70DBA9567}" type="datetimeFigureOut">
               <a:rPr lang="en-US" smtClean="0"/>
               <a:pPr/>
-              <a:t>8/4/2026</a:t>
+              <a:t>8/5/2026</a:t>
             </a:fld>
             <a:endParaRPr lang="en-US" dirty="0"/>
           </a:p>
@@ -3186,54 +5080,23 @@
           </a:p>
         </p:txBody>
       </p:sp>
-      <p:cxnSp>
-        <p:nvCxnSpPr>
-          <p:cNvPr id="25" name="Straight Connector 24"/>
-          <p:cNvCxnSpPr/>
-          <p:nvPr/>
-        </p:nvCxnSpPr>
-        <p:spPr>
-          <a:xfrm>
-            <a:off x="1090422" y="1385316"/>
-            <a:ext cx="7205642" cy="0"/>
-          </a:xfrm>
-          <a:prstGeom prst="line">
-            <a:avLst/>
-          </a:prstGeom>
-          <a:ln w="31750"/>
-        </p:spPr>
-        <p:style>
-          <a:lnRef idx="3">
-            <a:schemeClr val="accent1"/>
-          </a:lnRef>
-          <a:fillRef idx="0">
-            <a:schemeClr val="accent1"/>
-          </a:fillRef>
-          <a:effectRef idx="2">
-            <a:schemeClr val="accent1"/>
-          </a:effectRef>
-          <a:fontRef idx="minor">
-            <a:schemeClr val="tx1"/>
-          </a:fontRef>
-        </p:style>
-      </p:cxnSp>
     </p:spTree>
     <p:extLst>
       <p:ext uri="{BB962C8B-B14F-4D97-AF65-F5344CB8AC3E}">
-        <p14:creationId xmlns:p14="http://schemas.microsoft.com/office/powerpoint/2010/main" val="2409317416"/>
+        <p14:creationId xmlns:p14="http://schemas.microsoft.com/office/powerpoint/2010/main" val="1136681994"/>
       </p:ext>
     </p:extLst>
   </p:cSld>
   <p:clrMapOvr>
     <a:masterClrMapping/>
   </p:clrMapOvr>
-  <mc:AlternateContent xmlns:mc="http://schemas.openxmlformats.org/markup-compatibility/2006">
-    <mc:Choice xmlns:p15="http://schemas.microsoft.com/office/powerpoint/2012/main" Requires="p15">
-      <p:transition xmlns:p14="http://schemas.microsoft.com/office/powerpoint/2010/main" spd="slow" p14:dur="2000" advTm="0">
+  <mc:AlternateContent xmlns:mc="http://schemas.openxmlformats.org/markup-compatibility/2006" xmlns:p15="http://schemas.microsoft.com/office/powerpoint/2012/main">
+    <mc:Choice Requires="p15">
+      <p:transition xmlns:p14="http://schemas.microsoft.com/office/powerpoint/2010/main" spd="slow" p14:dur="2000">
         <p15:prstTrans prst="drape"/>
       </p:transition>
     </mc:Choice>
-    <mc:Fallback>
+    <mc:Fallback xmlns="">
       <p:transition spd="slow" advTm="0">
         <p:fade/>
       </p:transition>
@@ -3278,7 +5141,7 @@
             <a:fld id="{B61BEF0D-F0BB-DE4B-95CE-6DB70DBA9567}" type="datetimeFigureOut">
               <a:rPr lang="en-US" smtClean="0"/>
               <a:pPr/>
-              <a:t>8/4/2026</a:t>
+              <a:t>8/5/2026</a:t>
             </a:fld>
             <a:endParaRPr lang="en-US" dirty="0"/>
           </a:p>
@@ -3330,20 +5193,20 @@
     </p:spTree>
     <p:extLst>
       <p:ext uri="{BB962C8B-B14F-4D97-AF65-F5344CB8AC3E}">
-        <p14:creationId xmlns:p14="http://schemas.microsoft.com/office/powerpoint/2010/main" val="3494160282"/>
+        <p14:creationId xmlns:p14="http://schemas.microsoft.com/office/powerpoint/2010/main" val="818643107"/>
       </p:ext>
     </p:extLst>
   </p:cSld>
   <p:clrMapOvr>
     <a:masterClrMapping/>
   </p:clrMapOvr>
-  <mc:AlternateContent xmlns:mc="http://schemas.openxmlformats.org/markup-compatibility/2006">
-    <mc:Choice xmlns:p15="http://schemas.microsoft.com/office/powerpoint/2012/main" Requires="p15">
-      <p:transition xmlns:p14="http://schemas.microsoft.com/office/powerpoint/2010/main" spd="slow" p14:dur="2000" advTm="0">
+  <mc:AlternateContent xmlns:mc="http://schemas.openxmlformats.org/markup-compatibility/2006" xmlns:p15="http://schemas.microsoft.com/office/powerpoint/2012/main">
+    <mc:Choice Requires="p15">
+      <p:transition xmlns:p14="http://schemas.microsoft.com/office/powerpoint/2010/main" spd="slow" p14:dur="2000">
         <p15:prstTrans prst="drape"/>
       </p:transition>
     </mc:Choice>
-    <mc:Fallback>
+    <mc:Fallback xmlns="">
       <p:transition spd="slow" advTm="0">
         <p:fade/>
       </p:transition>
@@ -3382,8 +5245,8 @@
         </p:nvSpPr>
         <p:spPr>
           <a:xfrm>
-            <a:off x="1083504" y="599230"/>
-            <a:ext cx="2454824" cy="1685338"/>
+            <a:off x="508001" y="1123953"/>
+            <a:ext cx="2890896" cy="958850"/>
           </a:xfrm>
         </p:spPr>
         <p:txBody>
@@ -3391,8 +5254,8 @@
             <a:normAutofit/>
           </a:bodyPr>
           <a:lstStyle>
-            <a:lvl1pPr algn="l">
-              <a:defRPr sz="1800"/>
+            <a:lvl1pPr>
+              <a:defRPr sz="1500"/>
             </a:lvl1pPr>
           </a:lstStyle>
           <a:p>
@@ -3416,12 +5279,14 @@
         </p:nvSpPr>
         <p:spPr>
           <a:xfrm>
-            <a:off x="3782785" y="599230"/>
-            <a:ext cx="4509353" cy="3494120"/>
-          </a:xfrm>
-        </p:spPr>
-        <p:txBody>
-          <a:bodyPr anchor="ctr"/>
+            <a:off x="3570346" y="386193"/>
+            <a:ext cx="3385156" cy="4144828"/>
+          </a:xfrm>
+        </p:spPr>
+        <p:txBody>
+          <a:bodyPr>
+            <a:normAutofit/>
+          </a:bodyPr>
           <a:lstStyle/>
           <a:p>
             <a:pPr lvl="0"/>
@@ -3473,46 +5338,48 @@
         </p:nvSpPr>
         <p:spPr>
           <a:xfrm>
-            <a:off x="1083504" y="2404119"/>
-            <a:ext cx="2456260" cy="1686136"/>
-          </a:xfrm>
-        </p:spPr>
-        <p:txBody>
-          <a:bodyPr/>
+            <a:off x="508001" y="2082802"/>
+            <a:ext cx="2890896" cy="1938337"/>
+          </a:xfrm>
+        </p:spPr>
+        <p:txBody>
+          <a:bodyPr>
+            <a:normAutofit/>
+          </a:bodyPr>
           <a:lstStyle>
-            <a:lvl1pPr marL="0" indent="0" algn="l">
+            <a:lvl1pPr marL="0" indent="0">
               <a:buNone/>
-              <a:defRPr sz="1200"/>
+              <a:defRPr sz="1050"/>
             </a:lvl1pPr>
-            <a:lvl2pPr marL="342900" indent="0">
+            <a:lvl2pPr marL="342797" indent="0">
               <a:buNone/>
               <a:defRPr sz="1050"/>
             </a:lvl2pPr>
-            <a:lvl3pPr marL="685800" indent="0">
+            <a:lvl3pPr marL="685595" indent="0">
               <a:buNone/>
               <a:defRPr sz="900"/>
             </a:lvl3pPr>
-            <a:lvl4pPr marL="1028700" indent="0">
+            <a:lvl4pPr marL="1028392" indent="0">
               <a:buNone/>
               <a:defRPr sz="750"/>
             </a:lvl4pPr>
-            <a:lvl5pPr marL="1371600" indent="0">
+            <a:lvl5pPr marL="1371188" indent="0">
               <a:buNone/>
               <a:defRPr sz="750"/>
             </a:lvl5pPr>
-            <a:lvl6pPr marL="1714500" indent="0">
+            <a:lvl6pPr marL="1713986" indent="0">
               <a:buNone/>
               <a:defRPr sz="750"/>
             </a:lvl6pPr>
-            <a:lvl7pPr marL="2057400" indent="0">
+            <a:lvl7pPr marL="2056783" indent="0">
               <a:buNone/>
               <a:defRPr sz="750"/>
             </a:lvl7pPr>
-            <a:lvl8pPr marL="2400300" indent="0">
+            <a:lvl8pPr marL="2399580" indent="0">
               <a:buNone/>
               <a:defRPr sz="750"/>
             </a:lvl8pPr>
-            <a:lvl9pPr marL="2743200" indent="0">
+            <a:lvl9pPr marL="2742377" indent="0">
               <a:buNone/>
               <a:defRPr sz="750"/>
             </a:lvl9pPr>
@@ -3544,7 +5411,7 @@
             <a:fld id="{B61BEF0D-F0BB-DE4B-95CE-6DB70DBA9567}" type="datetimeFigureOut">
               <a:rPr lang="en-US" smtClean="0"/>
               <a:pPr/>
-              <a:t>8/4/2026</a:t>
+              <a:t>8/5/2026</a:t>
             </a:fld>
             <a:endParaRPr lang="en-US" dirty="0"/>
           </a:p>
@@ -3593,54 +5460,23 @@
           </a:p>
         </p:txBody>
       </p:sp>
-      <p:cxnSp>
-        <p:nvCxnSpPr>
-          <p:cNvPr id="17" name="Straight Connector 16"/>
-          <p:cNvCxnSpPr/>
-          <p:nvPr/>
-        </p:nvCxnSpPr>
-        <p:spPr>
-          <a:xfrm>
-            <a:off x="1086210" y="2404118"/>
-            <a:ext cx="2452118" cy="0"/>
-          </a:xfrm>
-          <a:prstGeom prst="line">
-            <a:avLst/>
-          </a:prstGeom>
-          <a:ln w="31750"/>
-        </p:spPr>
-        <p:style>
-          <a:lnRef idx="3">
-            <a:schemeClr val="accent1"/>
-          </a:lnRef>
-          <a:fillRef idx="0">
-            <a:schemeClr val="accent1"/>
-          </a:fillRef>
-          <a:effectRef idx="2">
-            <a:schemeClr val="accent1"/>
-          </a:effectRef>
-          <a:fontRef idx="minor">
-            <a:schemeClr val="tx1"/>
-          </a:fontRef>
-        </p:style>
-      </p:cxnSp>
     </p:spTree>
     <p:extLst>
       <p:ext uri="{BB962C8B-B14F-4D97-AF65-F5344CB8AC3E}">
-        <p14:creationId xmlns:p14="http://schemas.microsoft.com/office/powerpoint/2010/main" val="626870401"/>
+        <p14:creationId xmlns:p14="http://schemas.microsoft.com/office/powerpoint/2010/main" val="93628856"/>
       </p:ext>
     </p:extLst>
   </p:cSld>
   <p:clrMapOvr>
     <a:masterClrMapping/>
   </p:clrMapOvr>
-  <mc:AlternateContent xmlns:mc="http://schemas.openxmlformats.org/markup-compatibility/2006">
-    <mc:Choice xmlns:p15="http://schemas.microsoft.com/office/powerpoint/2012/main" Requires="p15">
-      <p:transition xmlns:p14="http://schemas.microsoft.com/office/powerpoint/2010/main" spd="slow" p14:dur="2000" advTm="0">
+  <mc:AlternateContent xmlns:mc="http://schemas.openxmlformats.org/markup-compatibility/2006" xmlns:p15="http://schemas.microsoft.com/office/powerpoint/2012/main">
+    <mc:Choice Requires="p15">
+      <p:transition xmlns:p14="http://schemas.microsoft.com/office/powerpoint/2010/main" spd="slow" p14:dur="2000">
         <p15:prstTrans prst="drape"/>
       </p:transition>
     </mc:Choice>
-    <mc:Fallback>
+    <mc:Fallback xmlns="">
       <p:transition spd="slow" advTm="0">
         <p:fade/>
       </p:transition>
@@ -3667,62 +5503,424 @@
           <a:chExt cx="0" cy="0"/>
         </a:xfrm>
       </p:grpSpPr>
+      <p:sp>
+        <p:nvSpPr>
+          <p:cNvPr id="2" name="Title 1"/>
+          <p:cNvSpPr>
+            <a:spLocks noGrp="1"/>
+          </p:cNvSpPr>
+          <p:nvPr>
+            <p:ph type="title"/>
+          </p:nvPr>
+        </p:nvSpPr>
+        <p:spPr>
+          <a:xfrm>
+            <a:off x="508001" y="3600450"/>
+            <a:ext cx="6447500" cy="425054"/>
+          </a:xfrm>
+        </p:spPr>
+        <p:txBody>
+          <a:bodyPr anchor="b">
+            <a:normAutofit/>
+          </a:bodyPr>
+          <a:lstStyle>
+            <a:lvl1pPr algn="l">
+              <a:defRPr sz="1800" b="0"/>
+            </a:lvl1pPr>
+          </a:lstStyle>
+          <a:p>
+            <a:r>
+              <a:rPr lang="en-US"/>
+              <a:t>Click to edit Master title style</a:t>
+            </a:r>
+            <a:endParaRPr lang="en-US" dirty="0"/>
+          </a:p>
+        </p:txBody>
+      </p:sp>
+      <p:sp>
+        <p:nvSpPr>
+          <p:cNvPr id="3" name="Picture Placeholder 2"/>
+          <p:cNvSpPr>
+            <a:spLocks noGrp="1" noChangeAspect="1"/>
+          </p:cNvSpPr>
+          <p:nvPr>
+            <p:ph type="pic" idx="1"/>
+          </p:nvPr>
+        </p:nvSpPr>
+        <p:spPr>
+          <a:xfrm>
+            <a:off x="508001" y="457200"/>
+            <a:ext cx="6447501" cy="2884289"/>
+          </a:xfrm>
+        </p:spPr>
+        <p:txBody>
+          <a:bodyPr anchor="t">
+            <a:normAutofit/>
+          </a:bodyPr>
+          <a:lstStyle>
+            <a:lvl1pPr marL="0" indent="0" algn="ctr">
+              <a:buNone/>
+              <a:defRPr sz="1200"/>
+            </a:lvl1pPr>
+            <a:lvl2pPr marL="342900" indent="0">
+              <a:buNone/>
+              <a:defRPr sz="1200"/>
+            </a:lvl2pPr>
+            <a:lvl3pPr marL="685800" indent="0">
+              <a:buNone/>
+              <a:defRPr sz="1200"/>
+            </a:lvl3pPr>
+            <a:lvl4pPr marL="1028700" indent="0">
+              <a:buNone/>
+              <a:defRPr sz="1200"/>
+            </a:lvl4pPr>
+            <a:lvl5pPr marL="1371600" indent="0">
+              <a:buNone/>
+              <a:defRPr sz="1200"/>
+            </a:lvl5pPr>
+            <a:lvl6pPr marL="1714500" indent="0">
+              <a:buNone/>
+              <a:defRPr sz="1200"/>
+            </a:lvl6pPr>
+            <a:lvl7pPr marL="2057400" indent="0">
+              <a:buNone/>
+              <a:defRPr sz="1200"/>
+            </a:lvl7pPr>
+            <a:lvl8pPr marL="2400300" indent="0">
+              <a:buNone/>
+              <a:defRPr sz="1200"/>
+            </a:lvl8pPr>
+            <a:lvl9pPr marL="2743200" indent="0">
+              <a:buNone/>
+              <a:defRPr sz="1200"/>
+            </a:lvl9pPr>
+          </a:lstStyle>
+          <a:p>
+            <a:r>
+              <a:rPr lang="en-US"/>
+              <a:t>Click icon to add picture</a:t>
+            </a:r>
+            <a:endParaRPr lang="en-US" dirty="0"/>
+          </a:p>
+        </p:txBody>
+      </p:sp>
+      <p:sp>
+        <p:nvSpPr>
+          <p:cNvPr id="4" name="Text Placeholder 3"/>
+          <p:cNvSpPr>
+            <a:spLocks noGrp="1"/>
+          </p:cNvSpPr>
+          <p:nvPr>
+            <p:ph type="body" sz="half" idx="2"/>
+          </p:nvPr>
+        </p:nvSpPr>
+        <p:spPr>
+          <a:xfrm>
+            <a:off x="508001" y="4025504"/>
+            <a:ext cx="6447500" cy="505518"/>
+          </a:xfrm>
+        </p:spPr>
+        <p:txBody>
+          <a:bodyPr>
+            <a:normAutofit/>
+          </a:bodyPr>
+          <a:lstStyle>
+            <a:lvl1pPr marL="0" indent="0">
+              <a:buNone/>
+              <a:defRPr sz="900"/>
+            </a:lvl1pPr>
+            <a:lvl2pPr marL="342900" indent="0">
+              <a:buNone/>
+              <a:defRPr sz="900"/>
+            </a:lvl2pPr>
+            <a:lvl3pPr marL="685800" indent="0">
+              <a:buNone/>
+              <a:defRPr sz="750"/>
+            </a:lvl3pPr>
+            <a:lvl4pPr marL="1028700" indent="0">
+              <a:buNone/>
+              <a:defRPr sz="675"/>
+            </a:lvl4pPr>
+            <a:lvl5pPr marL="1371600" indent="0">
+              <a:buNone/>
+              <a:defRPr sz="675"/>
+            </a:lvl5pPr>
+            <a:lvl6pPr marL="1714500" indent="0">
+              <a:buNone/>
+              <a:defRPr sz="675"/>
+            </a:lvl6pPr>
+            <a:lvl7pPr marL="2057400" indent="0">
+              <a:buNone/>
+              <a:defRPr sz="675"/>
+            </a:lvl7pPr>
+            <a:lvl8pPr marL="2400300" indent="0">
+              <a:buNone/>
+              <a:defRPr sz="675"/>
+            </a:lvl8pPr>
+            <a:lvl9pPr marL="2743200" indent="0">
+              <a:buNone/>
+              <a:defRPr sz="675"/>
+            </a:lvl9pPr>
+          </a:lstStyle>
+          <a:p>
+            <a:pPr lvl="0"/>
+            <a:r>
+              <a:rPr lang="en-US"/>
+              <a:t>Click to edit Master text styles</a:t>
+            </a:r>
+          </a:p>
+        </p:txBody>
+      </p:sp>
+      <p:sp>
+        <p:nvSpPr>
+          <p:cNvPr id="5" name="Date Placeholder 4"/>
+          <p:cNvSpPr>
+            <a:spLocks noGrp="1"/>
+          </p:cNvSpPr>
+          <p:nvPr>
+            <p:ph type="dt" sz="half" idx="10"/>
+          </p:nvPr>
+        </p:nvSpPr>
+        <p:spPr/>
+        <p:txBody>
+          <a:bodyPr/>
+          <a:lstStyle/>
+          <a:p>
+            <a:fld id="{B61BEF0D-F0BB-DE4B-95CE-6DB70DBA9567}" type="datetimeFigureOut">
+              <a:rPr lang="en-US" smtClean="0"/>
+              <a:pPr/>
+              <a:t>8/5/2026</a:t>
+            </a:fld>
+            <a:endParaRPr lang="en-US" dirty="0"/>
+          </a:p>
+        </p:txBody>
+      </p:sp>
+      <p:sp>
+        <p:nvSpPr>
+          <p:cNvPr id="6" name="Footer Placeholder 5"/>
+          <p:cNvSpPr>
+            <a:spLocks noGrp="1"/>
+          </p:cNvSpPr>
+          <p:nvPr>
+            <p:ph type="ftr" sz="quarter" idx="11"/>
+          </p:nvPr>
+        </p:nvSpPr>
+        <p:spPr/>
+        <p:txBody>
+          <a:bodyPr/>
+          <a:lstStyle/>
+          <a:p>
+            <a:endParaRPr lang="en-US" dirty="0"/>
+          </a:p>
+        </p:txBody>
+      </p:sp>
+      <p:sp>
+        <p:nvSpPr>
+          <p:cNvPr id="7" name="Slide Number Placeholder 6"/>
+          <p:cNvSpPr>
+            <a:spLocks noGrp="1"/>
+          </p:cNvSpPr>
+          <p:nvPr>
+            <p:ph type="sldNum" sz="quarter" idx="12"/>
+          </p:nvPr>
+        </p:nvSpPr>
+        <p:spPr/>
+        <p:txBody>
+          <a:bodyPr/>
+          <a:lstStyle/>
+          <a:p>
+            <a:fld id="{D57F1E4F-1CFF-5643-939E-217C01CDF565}" type="slidenum">
+              <a:rPr lang="en-US" smtClean="0"/>
+              <a:pPr/>
+              <a:t>‹#›</a:t>
+            </a:fld>
+            <a:endParaRPr lang="en-US" dirty="0"/>
+          </a:p>
+        </p:txBody>
+      </p:sp>
+    </p:spTree>
+    <p:extLst>
+      <p:ext uri="{BB962C8B-B14F-4D97-AF65-F5344CB8AC3E}">
+        <p14:creationId xmlns:p14="http://schemas.microsoft.com/office/powerpoint/2010/main" val="3666373684"/>
+      </p:ext>
+    </p:extLst>
+  </p:cSld>
+  <p:clrMapOvr>
+    <a:masterClrMapping/>
+  </p:clrMapOvr>
+  <mc:AlternateContent xmlns:mc="http://schemas.openxmlformats.org/markup-compatibility/2006" xmlns:p15="http://schemas.microsoft.com/office/powerpoint/2012/main">
+    <mc:Choice Requires="p15">
+      <p:transition xmlns:p14="http://schemas.microsoft.com/office/powerpoint/2010/main" spd="slow" p14:dur="2000">
+        <p15:prstTrans prst="drape"/>
+      </p:transition>
+    </mc:Choice>
+    <mc:Fallback xmlns="">
+      <p:transition spd="slow" advTm="0">
+        <p:fade/>
+      </p:transition>
+    </mc:Fallback>
+  </mc:AlternateContent>
+  <p:hf sldNum="0" hdr="0" ftr="0" dt="0"/>
+</p:sldLayout>
+</file>
+
+<file path=ppt/slideMasters/slideMaster1.xml><?xml version="1.0" encoding="utf-8"?>
+<p:sldMaster xmlns:a="http://schemas.openxmlformats.org/drawingml/2006/main" xmlns:r="http://schemas.openxmlformats.org/officeDocument/2006/relationships" xmlns:p="http://schemas.openxmlformats.org/presentationml/2006/main">
+  <p:cSld>
+    <p:bg>
+      <p:bgRef idx="1001">
+        <a:schemeClr val="bg1"/>
+      </p:bgRef>
+    </p:bg>
+    <p:spTree>
+      <p:nvGrpSpPr>
+        <p:cNvPr id="1" name=""/>
+        <p:cNvGrpSpPr/>
+        <p:nvPr/>
+      </p:nvGrpSpPr>
+      <p:grpSpPr>
+        <a:xfrm>
+          <a:off x="0" y="0"/>
+          <a:ext cx="0" cy="0"/>
+          <a:chOff x="0" y="0"/>
+          <a:chExt cx="0" cy="0"/>
+        </a:xfrm>
+      </p:grpSpPr>
       <p:grpSp>
         <p:nvGrpSpPr>
-          <p:cNvPr id="8" name="Group 7"/>
+          <p:cNvPr id="7" name="Group 6"/>
           <p:cNvGrpSpPr/>
           <p:nvPr/>
         </p:nvGrpSpPr>
         <p:grpSpPr>
           <a:xfrm>
-            <a:off x="5608041" y="361628"/>
-            <a:ext cx="3055900" cy="3861826"/>
-            <a:chOff x="7477387" y="482170"/>
-            <a:chExt cx="4074533" cy="5149101"/>
+            <a:off x="0" y="-6350"/>
+            <a:ext cx="9144000" cy="5149850"/>
+            <a:chOff x="0" y="-8467"/>
+            <a:chExt cx="12192000" cy="6866467"/>
           </a:xfrm>
         </p:grpSpPr>
+        <p:cxnSp>
+          <p:nvCxnSpPr>
+            <p:cNvPr id="20" name="Straight Connector 19"/>
+            <p:cNvCxnSpPr/>
+            <p:nvPr/>
+          </p:nvCxnSpPr>
+          <p:spPr>
+            <a:xfrm>
+              <a:off x="9371012" y="0"/>
+              <a:ext cx="1219200" cy="6858000"/>
+            </a:xfrm>
+            <a:prstGeom prst="line">
+              <a:avLst/>
+            </a:prstGeom>
+            <a:ln w="9525">
+              <a:solidFill>
+                <a:schemeClr val="bg1">
+                  <a:lumMod val="75000"/>
+                </a:schemeClr>
+              </a:solidFill>
+            </a:ln>
+          </p:spPr>
+          <p:style>
+            <a:lnRef idx="2">
+              <a:schemeClr val="accent1"/>
+            </a:lnRef>
+            <a:fillRef idx="0">
+              <a:schemeClr val="accent1"/>
+            </a:fillRef>
+            <a:effectRef idx="1">
+              <a:schemeClr val="accent1"/>
+            </a:effectRef>
+            <a:fontRef idx="minor">
+              <a:schemeClr val="tx1"/>
+            </a:fontRef>
+          </p:style>
+        </p:cxnSp>
+        <p:cxnSp>
+          <p:nvCxnSpPr>
+            <p:cNvPr id="21" name="Straight Connector 20"/>
+            <p:cNvCxnSpPr/>
+            <p:nvPr/>
+          </p:nvCxnSpPr>
+          <p:spPr>
+            <a:xfrm flipH="1">
+              <a:off x="7425267" y="3681413"/>
+              <a:ext cx="4763558" cy="3176587"/>
+            </a:xfrm>
+            <a:prstGeom prst="line">
+              <a:avLst/>
+            </a:prstGeom>
+            <a:ln w="9525">
+              <a:solidFill>
+                <a:schemeClr val="bg1">
+                  <a:lumMod val="85000"/>
+                </a:schemeClr>
+              </a:solidFill>
+            </a:ln>
+          </p:spPr>
+          <p:style>
+            <a:lnRef idx="2">
+              <a:schemeClr val="accent1"/>
+            </a:lnRef>
+            <a:fillRef idx="0">
+              <a:schemeClr val="accent1"/>
+            </a:fillRef>
+            <a:effectRef idx="1">
+              <a:schemeClr val="accent1"/>
+            </a:effectRef>
+            <a:fontRef idx="minor">
+              <a:schemeClr val="tx1"/>
+            </a:fontRef>
+          </p:style>
+        </p:cxnSp>
         <p:sp>
           <p:nvSpPr>
-            <p:cNvPr id="18" name="Rectangle 17"/>
+            <p:cNvPr id="22" name="Rectangle 23"/>
             <p:cNvSpPr/>
             <p:nvPr/>
           </p:nvSpPr>
-          <p:spPr bwMode="black">
+          <p:spPr>
             <a:xfrm>
-              <a:off x="7477387" y="482170"/>
-              <a:ext cx="4074533" cy="5149101"/>
+              <a:off x="9181476" y="-8467"/>
+              <a:ext cx="3007349" cy="6866467"/>
             </a:xfrm>
-            <a:prstGeom prst="rect">
+            <a:custGeom>
               <a:avLst/>
-            </a:prstGeom>
-            <a:gradFill>
-              <a:gsLst>
-                <a:gs pos="0">
-                  <a:srgbClr val="000001"/>
-                </a:gs>
-                <a:gs pos="100000">
-                  <a:srgbClr val="191919"/>
-                </a:gs>
-              </a:gsLst>
-            </a:gradFill>
-            <a:ln w="76200" cmpd="sng">
+              <a:gdLst/>
+              <a:ahLst/>
+              <a:cxnLst/>
+              <a:rect l="l" t="t" r="r" b="b"/>
+              <a:pathLst>
+                <a:path w="3007349" h="6866467">
+                  <a:moveTo>
+                    <a:pt x="2045532" y="0"/>
+                  </a:moveTo>
+                  <a:lnTo>
+                    <a:pt x="3007349" y="0"/>
+                  </a:lnTo>
+                  <a:lnTo>
+                    <a:pt x="3007349" y="6866467"/>
+                  </a:lnTo>
+                  <a:lnTo>
+                    <a:pt x="0" y="6866467"/>
+                  </a:lnTo>
+                  <a:lnTo>
+                    <a:pt x="2045532" y="0"/>
+                  </a:lnTo>
+                  <a:close/>
+                </a:path>
+              </a:pathLst>
+            </a:custGeom>
+            <a:solidFill>
+              <a:schemeClr val="accent1">
+                <a:alpha val="30000"/>
+              </a:schemeClr>
+            </a:solidFill>
+            <a:ln>
               <a:noFill/>
-              <a:miter lim="800000"/>
             </a:ln>
-            <a:effectLst>
-              <a:outerShdw blurRad="127000" dist="228600" dir="4740000" sx="98000" sy="98000" algn="tl" rotWithShape="0">
-                <a:srgbClr val="000000">
-                  <a:alpha val="34000"/>
-                </a:srgbClr>
-              </a:outerShdw>
-            </a:effectLst>
-            <a:scene3d>
-              <a:camera prst="orthographicFront"/>
-              <a:lightRig rig="threePt" dir="t"/>
-            </a:scene3d>
-            <a:sp3d>
-              <a:bevelT w="152400" h="50800" prst="softRound"/>
-            </a:sp3d>
+            <a:effectLst/>
           </p:spPr>
           <p:style>
             <a:lnRef idx="1">
@@ -3741,49 +5939,366 @@
         </p:sp>
         <p:sp>
           <p:nvSpPr>
-            <p:cNvPr id="19" name="Rectangle 18"/>
+            <p:cNvPr id="23" name="Rectangle 25"/>
             <p:cNvSpPr/>
             <p:nvPr/>
           </p:nvSpPr>
-          <p:spPr bwMode="blackWhite">
+          <p:spPr>
             <a:xfrm>
-              <a:off x="7790446" y="812506"/>
-              <a:ext cx="3450289" cy="4466452"/>
+              <a:off x="9603442" y="-8467"/>
+              <a:ext cx="2588558" cy="6866467"/>
             </a:xfrm>
-            <a:prstGeom prst="rect">
+            <a:custGeom>
               <a:avLst/>
+              <a:gdLst/>
+              <a:ahLst/>
+              <a:cxnLst/>
+              <a:rect l="l" t="t" r="r" b="b"/>
+              <a:pathLst>
+                <a:path w="2573311" h="6866467">
+                  <a:moveTo>
+                    <a:pt x="0" y="0"/>
+                  </a:moveTo>
+                  <a:lnTo>
+                    <a:pt x="2573311" y="0"/>
+                  </a:lnTo>
+                  <a:lnTo>
+                    <a:pt x="2573311" y="6866467"/>
+                  </a:lnTo>
+                  <a:lnTo>
+                    <a:pt x="1202336" y="6866467"/>
+                  </a:lnTo>
+                  <a:lnTo>
+                    <a:pt x="0" y="0"/>
+                  </a:lnTo>
+                  <a:close/>
+                </a:path>
+              </a:pathLst>
+            </a:custGeom>
+            <a:solidFill>
+              <a:schemeClr val="accent1">
+                <a:alpha val="20000"/>
+              </a:schemeClr>
+            </a:solidFill>
+            <a:ln>
+              <a:noFill/>
+            </a:ln>
+            <a:effectLst/>
+          </p:spPr>
+          <p:style>
+            <a:lnRef idx="1">
+              <a:schemeClr val="accent1"/>
+            </a:lnRef>
+            <a:fillRef idx="3">
+              <a:schemeClr val="accent1"/>
+            </a:fillRef>
+            <a:effectRef idx="2">
+              <a:schemeClr val="accent1"/>
+            </a:effectRef>
+            <a:fontRef idx="minor">
+              <a:schemeClr val="lt1"/>
+            </a:fontRef>
+          </p:style>
+        </p:sp>
+        <p:sp>
+          <p:nvSpPr>
+            <p:cNvPr id="24" name="Isosceles Triangle 23"/>
+            <p:cNvSpPr/>
+            <p:nvPr/>
+          </p:nvSpPr>
+          <p:spPr>
+            <a:xfrm>
+              <a:off x="8932333" y="3048000"/>
+              <a:ext cx="3259667" cy="3810000"/>
+            </a:xfrm>
+            <a:prstGeom prst="triangle">
+              <a:avLst>
+                <a:gd name="adj" fmla="val 100000"/>
+              </a:avLst>
             </a:prstGeom>
-            <a:gradFill>
-              <a:gsLst>
-                <a:gs pos="0">
-                  <a:srgbClr val="DADADA"/>
-                </a:gs>
-                <a:gs pos="100000">
-                  <a:srgbClr val="FFFFFE"/>
-                </a:gs>
-              </a:gsLst>
-              <a:lin ang="16200000" scaled="0"/>
-            </a:gradFill>
-            <a:ln w="50800" cmpd="sng">
-              <a:solidFill>
-                <a:srgbClr val="191919"/>
-              </a:solidFill>
-              <a:miter lim="800000"/>
+            <a:solidFill>
+              <a:schemeClr val="accent2">
+                <a:alpha val="72000"/>
+              </a:schemeClr>
+            </a:solidFill>
+            <a:ln>
+              <a:noFill/>
             </a:ln>
-            <a:effectLst>
-              <a:innerShdw blurRad="63500" dist="88900" dir="14100000">
-                <a:srgbClr val="000000">
-                  <a:alpha val="30000"/>
-                </a:srgbClr>
-              </a:innerShdw>
-            </a:effectLst>
-            <a:scene3d>
-              <a:camera prst="orthographicFront"/>
-              <a:lightRig rig="threePt" dir="t"/>
-            </a:scene3d>
-            <a:sp3d>
-              <a:bevelT prst="relaxedInset"/>
-            </a:sp3d>
+            <a:effectLst/>
+          </p:spPr>
+          <p:style>
+            <a:lnRef idx="1">
+              <a:schemeClr val="accent1"/>
+            </a:lnRef>
+            <a:fillRef idx="3">
+              <a:schemeClr val="accent1"/>
+            </a:fillRef>
+            <a:effectRef idx="2">
+              <a:schemeClr val="accent1"/>
+            </a:effectRef>
+            <a:fontRef idx="minor">
+              <a:schemeClr val="lt1"/>
+            </a:fontRef>
+          </p:style>
+        </p:sp>
+        <p:sp>
+          <p:nvSpPr>
+            <p:cNvPr id="25" name="Rectangle 27"/>
+            <p:cNvSpPr/>
+            <p:nvPr/>
+          </p:nvSpPr>
+          <p:spPr>
+            <a:xfrm>
+              <a:off x="9334500" y="-8467"/>
+              <a:ext cx="2854326" cy="6866467"/>
+            </a:xfrm>
+            <a:custGeom>
+              <a:avLst/>
+              <a:gdLst/>
+              <a:ahLst/>
+              <a:cxnLst/>
+              <a:rect l="l" t="t" r="r" b="b"/>
+              <a:pathLst>
+                <a:path w="2858013" h="6866467">
+                  <a:moveTo>
+                    <a:pt x="0" y="0"/>
+                  </a:moveTo>
+                  <a:lnTo>
+                    <a:pt x="2858013" y="0"/>
+                  </a:lnTo>
+                  <a:lnTo>
+                    <a:pt x="2858013" y="6866467"/>
+                  </a:lnTo>
+                  <a:lnTo>
+                    <a:pt x="2473942" y="6866467"/>
+                  </a:lnTo>
+                  <a:lnTo>
+                    <a:pt x="0" y="0"/>
+                  </a:lnTo>
+                  <a:close/>
+                </a:path>
+              </a:pathLst>
+            </a:custGeom>
+            <a:solidFill>
+              <a:schemeClr val="accent2">
+                <a:lumMod val="75000"/>
+                <a:alpha val="70000"/>
+              </a:schemeClr>
+            </a:solidFill>
+            <a:ln>
+              <a:noFill/>
+            </a:ln>
+            <a:effectLst/>
+          </p:spPr>
+          <p:style>
+            <a:lnRef idx="1">
+              <a:schemeClr val="accent1"/>
+            </a:lnRef>
+            <a:fillRef idx="3">
+              <a:schemeClr val="accent1"/>
+            </a:fillRef>
+            <a:effectRef idx="2">
+              <a:schemeClr val="accent1"/>
+            </a:effectRef>
+            <a:fontRef idx="minor">
+              <a:schemeClr val="lt1"/>
+            </a:fontRef>
+          </p:style>
+        </p:sp>
+        <p:sp>
+          <p:nvSpPr>
+            <p:cNvPr id="26" name="Rectangle 28"/>
+            <p:cNvSpPr/>
+            <p:nvPr/>
+          </p:nvSpPr>
+          <p:spPr>
+            <a:xfrm>
+              <a:off x="10898730" y="-8467"/>
+              <a:ext cx="1290094" cy="6866467"/>
+            </a:xfrm>
+            <a:custGeom>
+              <a:avLst/>
+              <a:gdLst/>
+              <a:ahLst/>
+              <a:cxnLst/>
+              <a:rect l="l" t="t" r="r" b="b"/>
+              <a:pathLst>
+                <a:path w="1290094" h="6858000">
+                  <a:moveTo>
+                    <a:pt x="1019735" y="0"/>
+                  </a:moveTo>
+                  <a:lnTo>
+                    <a:pt x="1290094" y="0"/>
+                  </a:lnTo>
+                  <a:lnTo>
+                    <a:pt x="1290094" y="6858000"/>
+                  </a:lnTo>
+                  <a:lnTo>
+                    <a:pt x="0" y="6858000"/>
+                  </a:lnTo>
+                  <a:lnTo>
+                    <a:pt x="1019735" y="0"/>
+                  </a:lnTo>
+                  <a:close/>
+                </a:path>
+              </a:pathLst>
+            </a:custGeom>
+            <a:solidFill>
+              <a:schemeClr val="accent1">
+                <a:lumMod val="60000"/>
+                <a:lumOff val="40000"/>
+                <a:alpha val="70000"/>
+              </a:schemeClr>
+            </a:solidFill>
+            <a:ln>
+              <a:noFill/>
+            </a:ln>
+            <a:effectLst/>
+          </p:spPr>
+          <p:style>
+            <a:lnRef idx="1">
+              <a:schemeClr val="accent1"/>
+            </a:lnRef>
+            <a:fillRef idx="3">
+              <a:schemeClr val="accent1"/>
+            </a:fillRef>
+            <a:effectRef idx="2">
+              <a:schemeClr val="accent1"/>
+            </a:effectRef>
+            <a:fontRef idx="minor">
+              <a:schemeClr val="lt1"/>
+            </a:fontRef>
+          </p:style>
+        </p:sp>
+        <p:sp>
+          <p:nvSpPr>
+            <p:cNvPr id="27" name="Rectangle 29"/>
+            <p:cNvSpPr/>
+            <p:nvPr/>
+          </p:nvSpPr>
+          <p:spPr>
+            <a:xfrm>
+              <a:off x="10938999" y="-8467"/>
+              <a:ext cx="1249825" cy="6866467"/>
+            </a:xfrm>
+            <a:custGeom>
+              <a:avLst/>
+              <a:gdLst/>
+              <a:ahLst/>
+              <a:cxnLst/>
+              <a:rect l="l" t="t" r="r" b="b"/>
+              <a:pathLst>
+                <a:path w="1249825" h="6858000">
+                  <a:moveTo>
+                    <a:pt x="0" y="0"/>
+                  </a:moveTo>
+                  <a:lnTo>
+                    <a:pt x="1249825" y="0"/>
+                  </a:lnTo>
+                  <a:lnTo>
+                    <a:pt x="1249825" y="6858000"/>
+                  </a:lnTo>
+                  <a:lnTo>
+                    <a:pt x="1109382" y="6858000"/>
+                  </a:lnTo>
+                  <a:lnTo>
+                    <a:pt x="0" y="0"/>
+                  </a:lnTo>
+                  <a:close/>
+                </a:path>
+              </a:pathLst>
+            </a:custGeom>
+            <a:solidFill>
+              <a:schemeClr val="accent1">
+                <a:alpha val="65000"/>
+              </a:schemeClr>
+            </a:solidFill>
+            <a:ln>
+              <a:noFill/>
+            </a:ln>
+            <a:effectLst/>
+          </p:spPr>
+          <p:style>
+            <a:lnRef idx="1">
+              <a:schemeClr val="accent1"/>
+            </a:lnRef>
+            <a:fillRef idx="3">
+              <a:schemeClr val="accent1"/>
+            </a:fillRef>
+            <a:effectRef idx="2">
+              <a:schemeClr val="accent1"/>
+            </a:effectRef>
+            <a:fontRef idx="minor">
+              <a:schemeClr val="lt1"/>
+            </a:fontRef>
+          </p:style>
+        </p:sp>
+        <p:sp>
+          <p:nvSpPr>
+            <p:cNvPr id="28" name="Isosceles Triangle 27"/>
+            <p:cNvSpPr/>
+            <p:nvPr/>
+          </p:nvSpPr>
+          <p:spPr>
+            <a:xfrm>
+              <a:off x="10371666" y="3589867"/>
+              <a:ext cx="1817159" cy="3268133"/>
+            </a:xfrm>
+            <a:prstGeom prst="triangle">
+              <a:avLst>
+                <a:gd name="adj" fmla="val 100000"/>
+              </a:avLst>
+            </a:prstGeom>
+            <a:solidFill>
+              <a:schemeClr val="accent1">
+                <a:alpha val="80000"/>
+              </a:schemeClr>
+            </a:solidFill>
+            <a:ln>
+              <a:noFill/>
+            </a:ln>
+            <a:effectLst/>
+          </p:spPr>
+          <p:style>
+            <a:lnRef idx="1">
+              <a:schemeClr val="accent1"/>
+            </a:lnRef>
+            <a:fillRef idx="3">
+              <a:schemeClr val="accent1"/>
+            </a:fillRef>
+            <a:effectRef idx="2">
+              <a:schemeClr val="accent1"/>
+            </a:effectRef>
+            <a:fontRef idx="minor">
+              <a:schemeClr val="lt1"/>
+            </a:fontRef>
+          </p:style>
+        </p:sp>
+        <p:sp>
+          <p:nvSpPr>
+            <p:cNvPr id="29" name="Isosceles Triangle 28"/>
+            <p:cNvSpPr/>
+            <p:nvPr/>
+          </p:nvSpPr>
+          <p:spPr>
+            <a:xfrm>
+              <a:off x="0" y="4013200"/>
+              <a:ext cx="448733" cy="2844800"/>
+            </a:xfrm>
+            <a:prstGeom prst="triangle">
+              <a:avLst>
+                <a:gd name="adj" fmla="val 0"/>
+              </a:avLst>
+            </a:prstGeom>
+            <a:solidFill>
+              <a:schemeClr val="accent1">
+                <a:alpha val="85000"/>
+              </a:schemeClr>
+            </a:solidFill>
+            <a:ln>
+              <a:noFill/>
+            </a:ln>
+            <a:effectLst/>
           </p:spPr>
           <p:style>
             <a:lnRef idx="1">
@@ -3803,420 +6318,6 @@
       </p:grpSp>
       <p:sp>
         <p:nvSpPr>
-          <p:cNvPr id="2" name="Title 1"/>
-          <p:cNvSpPr>
-            <a:spLocks noGrp="1"/>
-          </p:cNvSpPr>
-          <p:nvPr>
-            <p:ph type="title"/>
-          </p:nvPr>
-        </p:nvSpPr>
-        <p:spPr>
-          <a:xfrm>
-            <a:off x="1088405" y="847135"/>
-            <a:ext cx="4149246" cy="1372938"/>
-          </a:xfrm>
-        </p:spPr>
-        <p:txBody>
-          <a:bodyPr anchor="b">
-            <a:normAutofit/>
-          </a:bodyPr>
-          <a:lstStyle>
-            <a:lvl1pPr>
-              <a:defRPr sz="2400"/>
-            </a:lvl1pPr>
-          </a:lstStyle>
-          <a:p>
-            <a:r>
-              <a:rPr lang="en-US"/>
-              <a:t>Click to edit Master title style</a:t>
-            </a:r>
-            <a:endParaRPr lang="en-US" dirty="0"/>
-          </a:p>
-        </p:txBody>
-      </p:sp>
-      <p:sp>
-        <p:nvSpPr>
-          <p:cNvPr id="3" name="Picture Placeholder 2"/>
-          <p:cNvSpPr>
-            <a:spLocks noGrp="1" noChangeAspect="1"/>
-          </p:cNvSpPr>
-          <p:nvPr>
-            <p:ph type="pic" idx="1"/>
-          </p:nvPr>
-        </p:nvSpPr>
-        <p:spPr>
-          <a:xfrm>
-            <a:off x="6093292" y="841907"/>
-            <a:ext cx="2093378" cy="2899745"/>
-          </a:xfrm>
-          <a:solidFill>
-            <a:schemeClr val="bg1">
-              <a:lumMod val="85000"/>
-            </a:schemeClr>
-          </a:solidFill>
-          <a:ln w="9525" cap="sq">
-            <a:noFill/>
-            <a:miter lim="800000"/>
-          </a:ln>
-          <a:effectLst/>
-        </p:spPr>
-        <p:txBody>
-          <a:bodyPr anchor="t"/>
-          <a:lstStyle>
-            <a:lvl1pPr marL="0" indent="0" algn="ctr">
-              <a:buNone/>
-              <a:defRPr sz="2400"/>
-            </a:lvl1pPr>
-            <a:lvl2pPr marL="342900" indent="0">
-              <a:buNone/>
-              <a:defRPr sz="2100"/>
-            </a:lvl2pPr>
-            <a:lvl3pPr marL="685800" indent="0">
-              <a:buNone/>
-              <a:defRPr sz="1800"/>
-            </a:lvl3pPr>
-            <a:lvl4pPr marL="1028700" indent="0">
-              <a:buNone/>
-              <a:defRPr sz="1500"/>
-            </a:lvl4pPr>
-            <a:lvl5pPr marL="1371600" indent="0">
-              <a:buNone/>
-              <a:defRPr sz="1500"/>
-            </a:lvl5pPr>
-            <a:lvl6pPr marL="1714500" indent="0">
-              <a:buNone/>
-              <a:defRPr sz="1500"/>
-            </a:lvl6pPr>
-            <a:lvl7pPr marL="2057400" indent="0">
-              <a:buNone/>
-              <a:defRPr sz="1500"/>
-            </a:lvl7pPr>
-            <a:lvl8pPr marL="2400300" indent="0">
-              <a:buNone/>
-              <a:defRPr sz="1500"/>
-            </a:lvl8pPr>
-            <a:lvl9pPr marL="2743200" indent="0">
-              <a:buNone/>
-              <a:defRPr sz="1500"/>
-            </a:lvl9pPr>
-          </a:lstStyle>
-          <a:p>
-            <a:r>
-              <a:rPr lang="en-US"/>
-              <a:t>Click icon to add picture</a:t>
-            </a:r>
-            <a:endParaRPr lang="en-US" dirty="0"/>
-          </a:p>
-        </p:txBody>
-      </p:sp>
-      <p:sp>
-        <p:nvSpPr>
-          <p:cNvPr id="4" name="Text Placeholder 3"/>
-          <p:cNvSpPr>
-            <a:spLocks noGrp="1"/>
-          </p:cNvSpPr>
-          <p:nvPr>
-            <p:ph type="body" sz="half" idx="2"/>
-          </p:nvPr>
-        </p:nvSpPr>
-        <p:spPr>
-          <a:xfrm>
-            <a:off x="1087747" y="2359494"/>
-            <a:ext cx="4143303" cy="1502807"/>
-          </a:xfrm>
-        </p:spPr>
-        <p:txBody>
-          <a:bodyPr>
-            <a:normAutofit/>
-          </a:bodyPr>
-          <a:lstStyle>
-            <a:lvl1pPr marL="0" indent="0" algn="l">
-              <a:buNone/>
-              <a:defRPr sz="1350"/>
-            </a:lvl1pPr>
-            <a:lvl2pPr marL="342900" indent="0">
-              <a:buNone/>
-              <a:defRPr sz="1050"/>
-            </a:lvl2pPr>
-            <a:lvl3pPr marL="685800" indent="0">
-              <a:buNone/>
-              <a:defRPr sz="900"/>
-            </a:lvl3pPr>
-            <a:lvl4pPr marL="1028700" indent="0">
-              <a:buNone/>
-              <a:defRPr sz="750"/>
-            </a:lvl4pPr>
-            <a:lvl5pPr marL="1371600" indent="0">
-              <a:buNone/>
-              <a:defRPr sz="750"/>
-            </a:lvl5pPr>
-            <a:lvl6pPr marL="1714500" indent="0">
-              <a:buNone/>
-              <a:defRPr sz="750"/>
-            </a:lvl6pPr>
-            <a:lvl7pPr marL="2057400" indent="0">
-              <a:buNone/>
-              <a:defRPr sz="750"/>
-            </a:lvl7pPr>
-            <a:lvl8pPr marL="2400300" indent="0">
-              <a:buNone/>
-              <a:defRPr sz="750"/>
-            </a:lvl8pPr>
-            <a:lvl9pPr marL="2743200" indent="0">
-              <a:buNone/>
-              <a:defRPr sz="750"/>
-            </a:lvl9pPr>
-          </a:lstStyle>
-          <a:p>
-            <a:pPr lvl="0"/>
-            <a:r>
-              <a:rPr lang="en-US"/>
-              <a:t>Click to edit Master text styles</a:t>
-            </a:r>
-          </a:p>
-        </p:txBody>
-      </p:sp>
-      <p:sp>
-        <p:nvSpPr>
-          <p:cNvPr id="5" name="Date Placeholder 4"/>
-          <p:cNvSpPr>
-            <a:spLocks noGrp="1"/>
-          </p:cNvSpPr>
-          <p:nvPr>
-            <p:ph type="dt" sz="half" idx="10"/>
-          </p:nvPr>
-        </p:nvSpPr>
-        <p:spPr>
-          <a:xfrm>
-            <a:off x="1085537" y="4102393"/>
-            <a:ext cx="4145513" cy="240092"/>
-          </a:xfrm>
-        </p:spPr>
-        <p:txBody>
-          <a:bodyPr/>
-          <a:lstStyle>
-            <a:lvl1pPr algn="l">
-              <a:defRPr/>
-            </a:lvl1pPr>
-          </a:lstStyle>
-          <a:p>
-            <a:fld id="{B61BEF0D-F0BB-DE4B-95CE-6DB70DBA9567}" type="datetimeFigureOut">
-              <a:rPr lang="en-US" smtClean="0"/>
-              <a:pPr/>
-              <a:t>8/4/2026</a:t>
-            </a:fld>
-            <a:endParaRPr lang="en-US" dirty="0"/>
-          </a:p>
-        </p:txBody>
-      </p:sp>
-      <p:sp>
-        <p:nvSpPr>
-          <p:cNvPr id="6" name="Footer Placeholder 5"/>
-          <p:cNvSpPr>
-            <a:spLocks noGrp="1"/>
-          </p:cNvSpPr>
-          <p:nvPr>
-            <p:ph type="ftr" sz="quarter" idx="11"/>
-          </p:nvPr>
-        </p:nvSpPr>
-        <p:spPr>
-          <a:xfrm>
-            <a:off x="1085537" y="238981"/>
-            <a:ext cx="4155753" cy="240698"/>
-          </a:xfrm>
-        </p:spPr>
-        <p:txBody>
-          <a:bodyPr/>
-          <a:lstStyle/>
-          <a:p>
-            <a:endParaRPr lang="en-US" dirty="0"/>
-          </a:p>
-        </p:txBody>
-      </p:sp>
-      <p:sp>
-        <p:nvSpPr>
-          <p:cNvPr id="7" name="Slide Number Placeholder 6"/>
-          <p:cNvSpPr>
-            <a:spLocks noGrp="1"/>
-          </p:cNvSpPr>
-          <p:nvPr>
-            <p:ph type="sldNum" sz="quarter" idx="12"/>
-          </p:nvPr>
-        </p:nvSpPr>
-        <p:spPr/>
-        <p:txBody>
-          <a:bodyPr/>
-          <a:lstStyle/>
-          <a:p>
-            <a:fld id="{D57F1E4F-1CFF-5643-939E-217C01CDF565}" type="slidenum">
-              <a:rPr lang="en-US" smtClean="0"/>
-              <a:pPr/>
-              <a:t>‹#›</a:t>
-            </a:fld>
-            <a:endParaRPr lang="en-US" dirty="0"/>
-          </a:p>
-        </p:txBody>
-      </p:sp>
-      <p:cxnSp>
-        <p:nvCxnSpPr>
-          <p:cNvPr id="31" name="Straight Connector 30"/>
-          <p:cNvCxnSpPr/>
-          <p:nvPr/>
-        </p:nvCxnSpPr>
-        <p:spPr>
-          <a:xfrm>
-            <a:off x="1085537" y="2357704"/>
-            <a:ext cx="4145513" cy="0"/>
-          </a:xfrm>
-          <a:prstGeom prst="line">
-            <a:avLst/>
-          </a:prstGeom>
-          <a:ln w="31750"/>
-        </p:spPr>
-        <p:style>
-          <a:lnRef idx="3">
-            <a:schemeClr val="accent1"/>
-          </a:lnRef>
-          <a:fillRef idx="0">
-            <a:schemeClr val="accent1"/>
-          </a:fillRef>
-          <a:effectRef idx="2">
-            <a:schemeClr val="accent1"/>
-          </a:effectRef>
-          <a:fontRef idx="minor">
-            <a:schemeClr val="tx1"/>
-          </a:fontRef>
-        </p:style>
-      </p:cxnSp>
-    </p:spTree>
-    <p:extLst>
-      <p:ext uri="{BB962C8B-B14F-4D97-AF65-F5344CB8AC3E}">
-        <p14:creationId xmlns:p14="http://schemas.microsoft.com/office/powerpoint/2010/main" val="3756766784"/>
-      </p:ext>
-    </p:extLst>
-  </p:cSld>
-  <p:clrMapOvr>
-    <a:masterClrMapping/>
-  </p:clrMapOvr>
-  <mc:AlternateContent xmlns:mc="http://schemas.openxmlformats.org/markup-compatibility/2006">
-    <mc:Choice xmlns:p15="http://schemas.microsoft.com/office/powerpoint/2012/main" Requires="p15">
-      <p:transition xmlns:p14="http://schemas.microsoft.com/office/powerpoint/2010/main" spd="slow" p14:dur="2000" advTm="0">
-        <p15:prstTrans prst="drape"/>
-      </p:transition>
-    </mc:Choice>
-    <mc:Fallback>
-      <p:transition spd="slow" advTm="0">
-        <p:fade/>
-      </p:transition>
-    </mc:Fallback>
-  </mc:AlternateContent>
-  <p:hf sldNum="0" hdr="0" ftr="0" dt="0"/>
-</p:sldLayout>
-</file>
-
-<file path=ppt/slideMasters/slideMaster1.xml><?xml version="1.0" encoding="utf-8"?>
-<p:sldMaster xmlns:a="http://schemas.openxmlformats.org/drawingml/2006/main" xmlns:r="http://schemas.openxmlformats.org/officeDocument/2006/relationships" xmlns:p="http://schemas.openxmlformats.org/presentationml/2006/main">
-  <p:cSld>
-    <p:bg>
-      <p:bgRef idx="1003">
-        <a:schemeClr val="bg2"/>
-      </p:bgRef>
-    </p:bg>
-    <p:spTree>
-      <p:nvGrpSpPr>
-        <p:cNvPr id="1" name=""/>
-        <p:cNvGrpSpPr/>
-        <p:nvPr/>
-      </p:nvGrpSpPr>
-      <p:grpSpPr>
-        <a:xfrm>
-          <a:off x="0" y="0"/>
-          <a:ext cx="0" cy="0"/>
-          <a:chOff x="0" y="0"/>
-          <a:chExt cx="0" cy="0"/>
-        </a:xfrm>
-      </p:grpSpPr>
-      <p:sp>
-        <p:nvSpPr>
-          <p:cNvPr id="8" name="Rectangle 7"/>
-          <p:cNvSpPr/>
-          <p:nvPr/>
-        </p:nvSpPr>
-        <p:spPr>
-          <a:xfrm>
-            <a:off x="0" y="1514607"/>
-            <a:ext cx="9144000" cy="3079456"/>
-          </a:xfrm>
-          <a:prstGeom prst="rect">
-            <a:avLst/>
-          </a:prstGeom>
-          <a:gradFill flip="none" rotWithShape="1">
-            <a:gsLst>
-              <a:gs pos="0">
-                <a:schemeClr val="bg2">
-                  <a:alpha val="0"/>
-                </a:schemeClr>
-              </a:gs>
-              <a:gs pos="100000">
-                <a:schemeClr val="bg2"/>
-              </a:gs>
-            </a:gsLst>
-            <a:lin ang="5400000" scaled="0"/>
-            <a:tileRect/>
-          </a:gradFill>
-          <a:ln>
-            <a:noFill/>
-          </a:ln>
-        </p:spPr>
-        <p:style>
-          <a:lnRef idx="2">
-            <a:schemeClr val="accent1">
-              <a:shade val="50000"/>
-            </a:schemeClr>
-          </a:lnRef>
-          <a:fillRef idx="1">
-            <a:schemeClr val="accent1"/>
-          </a:fillRef>
-          <a:effectRef idx="0">
-            <a:schemeClr val="accent1"/>
-          </a:effectRef>
-          <a:fontRef idx="minor">
-            <a:schemeClr val="lt1"/>
-          </a:fontRef>
-        </p:style>
-      </p:sp>
-      <p:pic>
-        <p:nvPicPr>
-          <p:cNvPr id="7" name="Picture 6"/>
-          <p:cNvPicPr>
-            <a:picLocks noChangeAspect="1"/>
-          </p:cNvPicPr>
-          <p:nvPr/>
-        </p:nvPicPr>
-        <p:blipFill rotWithShape="1">
-          <a:blip r:embed="rId14">
-            <a:extLst>
-              <a:ext uri="{28A0092B-C50C-407E-A947-70E740481C1C}">
-                <a14:useLocalDpi xmlns:a14="http://schemas.microsoft.com/office/drawing/2010/main" val="0"/>
-              </a:ext>
-            </a:extLst>
-          </a:blip>
-          <a:srcRect t="1538" b="-1538"/>
-          <a:stretch/>
-        </p:blipFill>
-        <p:spPr bwMode="black">
-          <a:xfrm>
-            <a:off x="0" y="4594860"/>
-            <a:ext cx="9144000" cy="557213"/>
-          </a:xfrm>
-          <a:prstGeom prst="rect">
-            <a:avLst/>
-          </a:prstGeom>
-        </p:spPr>
-      </p:pic>
-      <p:sp>
-        <p:nvSpPr>
           <p:cNvPr id="2" name="Title Placeholder 1"/>
           <p:cNvSpPr>
             <a:spLocks noGrp="1"/>
@@ -4227,8 +6328,8 @@
         </p:nvSpPr>
         <p:spPr>
           <a:xfrm>
-            <a:off x="1088685" y="603390"/>
-            <a:ext cx="7202456" cy="786926"/>
+            <a:off x="508001" y="457200"/>
+            <a:ext cx="6447501" cy="990600"/>
           </a:xfrm>
           <a:prstGeom prst="rect">
             <a:avLst/>
@@ -4260,8 +6361,8 @@
         </p:nvSpPr>
         <p:spPr>
           <a:xfrm>
-            <a:off x="1088685" y="1511799"/>
-            <a:ext cx="7202456" cy="2587960"/>
+            <a:off x="508001" y="1620442"/>
+            <a:ext cx="6447501" cy="2910580"/>
           </a:xfrm>
           <a:prstGeom prst="rect">
             <a:avLst/>
@@ -4322,8 +6423,8 @@
         </p:nvSpPr>
         <p:spPr>
           <a:xfrm>
-            <a:off x="5665604" y="247778"/>
-            <a:ext cx="2625536" cy="231901"/>
+            <a:off x="5403850" y="4531022"/>
+            <a:ext cx="683954" cy="273844"/>
           </a:xfrm>
           <a:prstGeom prst="rect">
             <a:avLst/>
@@ -4333,7 +6434,7 @@
           <a:bodyPr vert="horz" lIns="91440" tIns="45720" rIns="91440" bIns="45720" rtlCol="0" anchor="ctr"/>
           <a:lstStyle>
             <a:lvl1pPr algn="r">
-              <a:defRPr sz="750">
+              <a:defRPr sz="675">
                 <a:solidFill>
                   <a:schemeClr val="tx1">
                     <a:tint val="75000"/>
@@ -4346,7 +6447,7 @@
             <a:fld id="{B61BEF0D-F0BB-DE4B-95CE-6DB70DBA9567}" type="datetimeFigureOut">
               <a:rPr lang="en-US" smtClean="0"/>
               <a:pPr/>
-              <a:t>8/4/2026</a:t>
+              <a:t>8/5/2026</a:t>
             </a:fld>
             <a:endParaRPr lang="en-US" dirty="0"/>
           </a:p>
@@ -4364,8 +6465,8 @@
         </p:nvSpPr>
         <p:spPr>
           <a:xfrm>
-            <a:off x="1088684" y="246981"/>
-            <a:ext cx="4454127" cy="231901"/>
+            <a:off x="508001" y="4531022"/>
+            <a:ext cx="4723209" cy="273844"/>
           </a:xfrm>
           <a:prstGeom prst="rect">
             <a:avLst/>
@@ -4375,7 +6476,7 @@
           <a:bodyPr vert="horz" lIns="91440" tIns="45720" rIns="91440" bIns="45720" rtlCol="0" anchor="ctr"/>
           <a:lstStyle>
             <a:lvl1pPr algn="l">
-              <a:defRPr sz="750">
+              <a:defRPr sz="675">
                 <a:solidFill>
                   <a:schemeClr val="tx1">
                     <a:tint val="75000"/>
@@ -4401,18 +6502,18 @@
         </p:nvSpPr>
         <p:spPr>
           <a:xfrm>
-            <a:off x="360046" y="599230"/>
-            <a:ext cx="608264" cy="377684"/>
+            <a:off x="6442998" y="4531022"/>
+            <a:ext cx="512504" cy="273844"/>
           </a:xfrm>
           <a:prstGeom prst="rect">
             <a:avLst/>
           </a:prstGeom>
         </p:spPr>
         <p:txBody>
-          <a:bodyPr vert="horz" lIns="91440" tIns="45720" rIns="91440" bIns="45720" rtlCol="0" anchor="t"/>
+          <a:bodyPr vert="horz" lIns="91440" tIns="45720" rIns="91440" bIns="45720" rtlCol="0" anchor="ctr"/>
           <a:lstStyle>
             <a:lvl1pPr algn="r">
-              <a:defRPr sz="2100">
+              <a:defRPr sz="675">
                 <a:solidFill>
                   <a:schemeClr val="accent1"/>
                 </a:solidFill>
@@ -4429,72 +6530,40 @@
           </a:p>
         </p:txBody>
       </p:sp>
-      <p:cxnSp>
-        <p:nvCxnSpPr>
-          <p:cNvPr id="10" name="Straight Connector 9"/>
-          <p:cNvCxnSpPr/>
-          <p:nvPr/>
-        </p:nvCxnSpPr>
-        <p:spPr>
-          <a:xfrm>
-            <a:off x="0" y="4596310"/>
-            <a:ext cx="9144000" cy="0"/>
-          </a:xfrm>
-          <a:prstGeom prst="line">
-            <a:avLst/>
-          </a:prstGeom>
-          <a:ln w="12700">
-            <a:solidFill>
-              <a:srgbClr val="000001">
-                <a:alpha val="20000"/>
-              </a:srgbClr>
-            </a:solidFill>
-          </a:ln>
-        </p:spPr>
-        <p:style>
-          <a:lnRef idx="1">
-            <a:schemeClr val="accent1"/>
-          </a:lnRef>
-          <a:fillRef idx="0">
-            <a:schemeClr val="accent1"/>
-          </a:fillRef>
-          <a:effectRef idx="0">
-            <a:schemeClr val="accent1"/>
-          </a:effectRef>
-          <a:fontRef idx="minor">
-            <a:schemeClr val="tx1"/>
-          </a:fontRef>
-        </p:style>
-      </p:cxnSp>
     </p:spTree>
     <p:extLst>
       <p:ext uri="{BB962C8B-B14F-4D97-AF65-F5344CB8AC3E}">
-        <p14:creationId xmlns:p14="http://schemas.microsoft.com/office/powerpoint/2010/main" val="3094939849"/>
+        <p14:creationId xmlns:p14="http://schemas.microsoft.com/office/powerpoint/2010/main" val="392776689"/>
       </p:ext>
     </p:extLst>
   </p:cSld>
   <p:clrMap bg1="lt1" tx1="dk1" bg2="lt2" tx2="dk2" accent1="accent1" accent2="accent2" accent3="accent3" accent4="accent4" accent5="accent5" accent6="accent6" hlink="hlink" folHlink="folHlink"/>
   <p:sldLayoutIdLst>
-    <p:sldLayoutId id="2147483727" r:id="rId1"/>
-    <p:sldLayoutId id="2147483728" r:id="rId2"/>
-    <p:sldLayoutId id="2147483729" r:id="rId3"/>
-    <p:sldLayoutId id="2147483730" r:id="rId4"/>
-    <p:sldLayoutId id="2147483731" r:id="rId5"/>
-    <p:sldLayoutId id="2147483732" r:id="rId6"/>
-    <p:sldLayoutId id="2147483733" r:id="rId7"/>
-    <p:sldLayoutId id="2147483734" r:id="rId8"/>
-    <p:sldLayoutId id="2147483735" r:id="rId9"/>
-    <p:sldLayoutId id="2147483736" r:id="rId10"/>
-    <p:sldLayoutId id="2147483737" r:id="rId11"/>
-    <p:sldLayoutId id="2147483738" r:id="rId12"/>
+    <p:sldLayoutId id="2147483805" r:id="rId1"/>
+    <p:sldLayoutId id="2147483806" r:id="rId2"/>
+    <p:sldLayoutId id="2147483807" r:id="rId3"/>
+    <p:sldLayoutId id="2147483808" r:id="rId4"/>
+    <p:sldLayoutId id="2147483809" r:id="rId5"/>
+    <p:sldLayoutId id="2147483810" r:id="rId6"/>
+    <p:sldLayoutId id="2147483811" r:id="rId7"/>
+    <p:sldLayoutId id="2147483812" r:id="rId8"/>
+    <p:sldLayoutId id="2147483813" r:id="rId9"/>
+    <p:sldLayoutId id="2147483814" r:id="rId10"/>
+    <p:sldLayoutId id="2147483815" r:id="rId11"/>
+    <p:sldLayoutId id="2147483816" r:id="rId12"/>
+    <p:sldLayoutId id="2147483817" r:id="rId13"/>
+    <p:sldLayoutId id="2147483818" r:id="rId14"/>
+    <p:sldLayoutId id="2147483819" r:id="rId15"/>
+    <p:sldLayoutId id="2147483820" r:id="rId16"/>
+    <p:sldLayoutId id="2147483821" r:id="rId17"/>
   </p:sldLayoutIdLst>
-  <mc:AlternateContent xmlns:mc="http://schemas.openxmlformats.org/markup-compatibility/2006">
-    <mc:Choice xmlns:p15="http://schemas.microsoft.com/office/powerpoint/2012/main" Requires="p15">
-      <p:transition xmlns:p14="http://schemas.microsoft.com/office/powerpoint/2010/main" spd="slow" p14:dur="2000" advTm="0">
+  <mc:AlternateContent xmlns:mc="http://schemas.openxmlformats.org/markup-compatibility/2006" xmlns:p15="http://schemas.microsoft.com/office/powerpoint/2012/main">
+    <mc:Choice Requires="p15">
+      <p:transition xmlns:p14="http://schemas.microsoft.com/office/powerpoint/2010/main" spd="slow" p14:dur="2000">
         <p15:prstTrans prst="drape"/>
       </p:transition>
     </mc:Choice>
-    <mc:Fallback>
+    <mc:Fallback xmlns="">
       <p:transition spd="slow" advTm="0">
         <p:fade/>
       </p:transition>
@@ -4503,228 +6572,298 @@
   <p:hf sldNum="0" hdr="0" ftr="0" dt="0"/>
   <p:txStyles>
     <p:titleStyle>
-      <a:lvl1pPr algn="l" defTabSz="685800" rtl="0" eaLnBrk="1" latinLnBrk="0" hangingPunct="1">
-        <a:lnSpc>
-          <a:spcPct val="90000"/>
-        </a:lnSpc>
+      <a:lvl1pPr algn="l" defTabSz="342900" rtl="0" eaLnBrk="1" latinLnBrk="0" hangingPunct="1">
         <a:spcBef>
           <a:spcPct val="0"/>
         </a:spcBef>
         <a:buNone/>
-        <a:defRPr sz="2400" b="0" i="0" kern="1200" cap="all">
+        <a:defRPr sz="2700" kern="1200">
           <a:solidFill>
-            <a:schemeClr val="tx1"/>
+            <a:schemeClr val="accent1"/>
           </a:solidFill>
-          <a:effectLst/>
           <a:latin typeface="+mj-lt"/>
           <a:ea typeface="+mj-ea"/>
           <a:cs typeface="+mj-cs"/>
         </a:defRPr>
       </a:lvl1pPr>
+      <a:lvl2pPr eaLnBrk="1" hangingPunct="1">
+        <a:defRPr>
+          <a:solidFill>
+            <a:schemeClr val="tx2"/>
+          </a:solidFill>
+        </a:defRPr>
+      </a:lvl2pPr>
+      <a:lvl3pPr eaLnBrk="1" hangingPunct="1">
+        <a:defRPr>
+          <a:solidFill>
+            <a:schemeClr val="tx2"/>
+          </a:solidFill>
+        </a:defRPr>
+      </a:lvl3pPr>
+      <a:lvl4pPr eaLnBrk="1" hangingPunct="1">
+        <a:defRPr>
+          <a:solidFill>
+            <a:schemeClr val="tx2"/>
+          </a:solidFill>
+        </a:defRPr>
+      </a:lvl4pPr>
+      <a:lvl5pPr eaLnBrk="1" hangingPunct="1">
+        <a:defRPr>
+          <a:solidFill>
+            <a:schemeClr val="tx2"/>
+          </a:solidFill>
+        </a:defRPr>
+      </a:lvl5pPr>
+      <a:lvl6pPr eaLnBrk="1" hangingPunct="1">
+        <a:defRPr>
+          <a:solidFill>
+            <a:schemeClr val="tx2"/>
+          </a:solidFill>
+        </a:defRPr>
+      </a:lvl6pPr>
+      <a:lvl7pPr eaLnBrk="1" hangingPunct="1">
+        <a:defRPr>
+          <a:solidFill>
+            <a:schemeClr val="tx2"/>
+          </a:solidFill>
+        </a:defRPr>
+      </a:lvl7pPr>
+      <a:lvl8pPr eaLnBrk="1" hangingPunct="1">
+        <a:defRPr>
+          <a:solidFill>
+            <a:schemeClr val="tx2"/>
+          </a:solidFill>
+        </a:defRPr>
+      </a:lvl8pPr>
+      <a:lvl9pPr eaLnBrk="1" hangingPunct="1">
+        <a:defRPr>
+          <a:solidFill>
+            <a:schemeClr val="tx2"/>
+          </a:solidFill>
+        </a:defRPr>
+      </a:lvl9pPr>
     </p:titleStyle>
     <p:bodyStyle>
-      <a:lvl1pPr marL="171450" indent="-171450" algn="l" defTabSz="685800" rtl="0" eaLnBrk="1" latinLnBrk="0" hangingPunct="1">
-        <a:lnSpc>
-          <a:spcPct val="120000"/>
-        </a:lnSpc>
+      <a:lvl1pPr marL="257175" indent="-257175" algn="l" defTabSz="342900" rtl="0" eaLnBrk="1" latinLnBrk="0" hangingPunct="1">
         <a:spcBef>
           <a:spcPts val="750"/>
         </a:spcBef>
+        <a:spcAft>
+          <a:spcPts val="0"/>
+        </a:spcAft>
         <a:buClr>
           <a:schemeClr val="accent1"/>
         </a:buClr>
-        <a:buSzPct val="100000"/>
-        <a:buFont typeface="Arial" panose="020B0604020202020204" pitchFamily="34" charset="0"/>
-        <a:buChar char="•"/>
-        <a:defRPr sz="1500" kern="1200">
+        <a:buSzPct val="80000"/>
+        <a:buFont typeface="Wingdings 3" charset="2"/>
+        <a:buChar char=""/>
+        <a:defRPr sz="1350" kern="1200">
           <a:solidFill>
-            <a:schemeClr val="tx1"/>
+            <a:schemeClr val="tx1">
+              <a:lumMod val="75000"/>
+              <a:lumOff val="25000"/>
+            </a:schemeClr>
           </a:solidFill>
-          <a:effectLst/>
           <a:latin typeface="+mn-lt"/>
           <a:ea typeface="+mn-ea"/>
           <a:cs typeface="+mn-cs"/>
         </a:defRPr>
       </a:lvl1pPr>
-      <a:lvl2pPr marL="514350" indent="-171450" algn="l" defTabSz="685800" rtl="0" eaLnBrk="1" latinLnBrk="0" hangingPunct="1">
-        <a:lnSpc>
-          <a:spcPct val="120000"/>
-        </a:lnSpc>
+      <a:lvl2pPr marL="557213" indent="-214313" algn="l" defTabSz="342900" rtl="0" eaLnBrk="1" latinLnBrk="0" hangingPunct="1">
         <a:spcBef>
-          <a:spcPts val="375"/>
+          <a:spcPts val="750"/>
         </a:spcBef>
+        <a:spcAft>
+          <a:spcPts val="0"/>
+        </a:spcAft>
         <a:buClr>
           <a:schemeClr val="accent1"/>
         </a:buClr>
-        <a:buSzPct val="100000"/>
-        <a:buFont typeface="Arial" panose="020B0604020202020204" pitchFamily="34" charset="0"/>
-        <a:buChar char="•"/>
-        <a:defRPr sz="1350" kern="1200" cap="none" baseline="0">
+        <a:buSzPct val="80000"/>
+        <a:buFont typeface="Wingdings 3" charset="2"/>
+        <a:buChar char=""/>
+        <a:defRPr sz="1200" kern="1200">
           <a:solidFill>
-            <a:schemeClr val="tx1"/>
+            <a:schemeClr val="tx1">
+              <a:lumMod val="75000"/>
+              <a:lumOff val="25000"/>
+            </a:schemeClr>
           </a:solidFill>
-          <a:effectLst/>
           <a:latin typeface="+mn-lt"/>
           <a:ea typeface="+mn-ea"/>
           <a:cs typeface="+mn-cs"/>
         </a:defRPr>
       </a:lvl2pPr>
-      <a:lvl3pPr marL="857250" indent="-171450" algn="l" defTabSz="685800" rtl="0" eaLnBrk="1" latinLnBrk="0" hangingPunct="1">
-        <a:lnSpc>
-          <a:spcPct val="120000"/>
-        </a:lnSpc>
+      <a:lvl3pPr marL="857250" indent="-171450" algn="l" defTabSz="342900" rtl="0" eaLnBrk="1" latinLnBrk="0" hangingPunct="1">
         <a:spcBef>
-          <a:spcPts val="375"/>
+          <a:spcPts val="750"/>
         </a:spcBef>
+        <a:spcAft>
+          <a:spcPts val="0"/>
+        </a:spcAft>
         <a:buClr>
           <a:schemeClr val="accent1"/>
         </a:buClr>
-        <a:buSzPct val="100000"/>
-        <a:buFont typeface="Arial" panose="020B0604020202020204" pitchFamily="34" charset="0"/>
-        <a:buChar char="•"/>
-        <a:defRPr sz="1200" kern="1200">
+        <a:buSzPct val="80000"/>
+        <a:buFont typeface="Wingdings 3" charset="2"/>
+        <a:buChar char=""/>
+        <a:defRPr sz="1050" kern="1200">
           <a:solidFill>
-            <a:schemeClr val="tx1"/>
+            <a:schemeClr val="tx1">
+              <a:lumMod val="75000"/>
+              <a:lumOff val="25000"/>
+            </a:schemeClr>
           </a:solidFill>
-          <a:effectLst/>
           <a:latin typeface="+mn-lt"/>
           <a:ea typeface="+mn-ea"/>
           <a:cs typeface="+mn-cs"/>
         </a:defRPr>
       </a:lvl3pPr>
-      <a:lvl4pPr marL="1200150" indent="-171450" algn="l" defTabSz="685800" rtl="0" eaLnBrk="1" latinLnBrk="0" hangingPunct="1">
-        <a:lnSpc>
-          <a:spcPct val="120000"/>
-        </a:lnSpc>
+      <a:lvl4pPr marL="1200150" indent="-171450" algn="l" defTabSz="342900" rtl="0" eaLnBrk="1" latinLnBrk="0" hangingPunct="1">
         <a:spcBef>
-          <a:spcPts val="375"/>
+          <a:spcPts val="750"/>
         </a:spcBef>
+        <a:spcAft>
+          <a:spcPts val="0"/>
+        </a:spcAft>
         <a:buClr>
           <a:schemeClr val="accent1"/>
         </a:buClr>
-        <a:buSzPct val="100000"/>
-        <a:buFont typeface="Arial" panose="020B0604020202020204" pitchFamily="34" charset="0"/>
-        <a:buChar char="•"/>
-        <a:defRPr sz="1050" kern="1200" cap="none" baseline="0">
+        <a:buSzPct val="80000"/>
+        <a:buFont typeface="Wingdings 3" charset="2"/>
+        <a:buChar char=""/>
+        <a:defRPr sz="900" kern="1200">
           <a:solidFill>
-            <a:schemeClr val="tx1"/>
+            <a:schemeClr val="tx1">
+              <a:lumMod val="75000"/>
+              <a:lumOff val="25000"/>
+            </a:schemeClr>
           </a:solidFill>
-          <a:effectLst/>
           <a:latin typeface="+mn-lt"/>
           <a:ea typeface="+mn-ea"/>
           <a:cs typeface="+mn-cs"/>
         </a:defRPr>
       </a:lvl4pPr>
-      <a:lvl5pPr marL="1543050" indent="-171450" algn="l" defTabSz="685800" rtl="0" eaLnBrk="1" latinLnBrk="0" hangingPunct="1">
-        <a:lnSpc>
-          <a:spcPct val="120000"/>
-        </a:lnSpc>
+      <a:lvl5pPr marL="1543050" indent="-171450" algn="l" defTabSz="342900" rtl="0" eaLnBrk="1" latinLnBrk="0" hangingPunct="1">
         <a:spcBef>
-          <a:spcPts val="375"/>
+          <a:spcPts val="750"/>
         </a:spcBef>
+        <a:spcAft>
+          <a:spcPts val="0"/>
+        </a:spcAft>
         <a:buClr>
           <a:schemeClr val="accent1"/>
         </a:buClr>
-        <a:buSzPct val="100000"/>
-        <a:buFont typeface="Arial" panose="020B0604020202020204" pitchFamily="34" charset="0"/>
-        <a:buChar char="•"/>
+        <a:buSzPct val="80000"/>
+        <a:buFont typeface="Wingdings 3" charset="2"/>
+        <a:buChar char=""/>
         <a:defRPr sz="900" kern="1200">
           <a:solidFill>
-            <a:schemeClr val="tx1"/>
+            <a:schemeClr val="tx1">
+              <a:lumMod val="75000"/>
+              <a:lumOff val="25000"/>
+            </a:schemeClr>
           </a:solidFill>
-          <a:effectLst/>
           <a:latin typeface="+mn-lt"/>
           <a:ea typeface="+mn-ea"/>
           <a:cs typeface="+mn-cs"/>
         </a:defRPr>
       </a:lvl5pPr>
-      <a:lvl6pPr marL="1885950" indent="-171450" algn="l" defTabSz="685800" rtl="0" eaLnBrk="1" latinLnBrk="0" hangingPunct="1">
-        <a:lnSpc>
-          <a:spcPct val="120000"/>
-        </a:lnSpc>
+      <a:lvl6pPr marL="1885950" indent="-171450" algn="l" defTabSz="342900" rtl="0" eaLnBrk="1" latinLnBrk="0" hangingPunct="1">
         <a:spcBef>
-          <a:spcPts val="375"/>
+          <a:spcPts val="750"/>
         </a:spcBef>
+        <a:spcAft>
+          <a:spcPts val="0"/>
+        </a:spcAft>
         <a:buClr>
           <a:schemeClr val="accent1"/>
         </a:buClr>
-        <a:buSzPct val="100000"/>
-        <a:buFont typeface="Arial" panose="020B0604020202020204" pitchFamily="34" charset="0"/>
-        <a:buChar char="•"/>
+        <a:buSzPct val="80000"/>
+        <a:buFont typeface="Wingdings 3" charset="2"/>
+        <a:buChar char=""/>
         <a:defRPr sz="900" kern="1200">
           <a:solidFill>
-            <a:schemeClr val="tx1"/>
+            <a:schemeClr val="tx1">
+              <a:lumMod val="75000"/>
+              <a:lumOff val="25000"/>
+            </a:schemeClr>
           </a:solidFill>
-          <a:effectLst/>
           <a:latin typeface="+mn-lt"/>
           <a:ea typeface="+mn-ea"/>
           <a:cs typeface="+mn-cs"/>
         </a:defRPr>
       </a:lvl6pPr>
-      <a:lvl7pPr marL="2228850" indent="-171450" algn="l" defTabSz="685800" rtl="0" eaLnBrk="1" latinLnBrk="0" hangingPunct="1">
-        <a:lnSpc>
-          <a:spcPct val="120000"/>
-        </a:lnSpc>
+      <a:lvl7pPr marL="2228850" indent="-171450" algn="l" defTabSz="342900" rtl="0" eaLnBrk="1" latinLnBrk="0" hangingPunct="1">
         <a:spcBef>
-          <a:spcPts val="375"/>
+          <a:spcPts val="750"/>
         </a:spcBef>
+        <a:spcAft>
+          <a:spcPts val="0"/>
+        </a:spcAft>
         <a:buClr>
           <a:schemeClr val="accent1"/>
         </a:buClr>
-        <a:buSzPct val="100000"/>
-        <a:buFont typeface="Arial" panose="020B0604020202020204" pitchFamily="34" charset="0"/>
-        <a:buChar char="•"/>
+        <a:buSzPct val="80000"/>
+        <a:buFont typeface="Wingdings 3" charset="2"/>
+        <a:buChar char=""/>
         <a:defRPr sz="900" kern="1200">
           <a:solidFill>
-            <a:schemeClr val="tx1"/>
+            <a:schemeClr val="tx1">
+              <a:lumMod val="75000"/>
+              <a:lumOff val="25000"/>
+            </a:schemeClr>
           </a:solidFill>
-          <a:effectLst/>
           <a:latin typeface="+mn-lt"/>
           <a:ea typeface="+mn-ea"/>
           <a:cs typeface="+mn-cs"/>
         </a:defRPr>
       </a:lvl7pPr>
-      <a:lvl8pPr marL="2571750" indent="-171450" algn="l" defTabSz="685800" rtl="0" eaLnBrk="1" latinLnBrk="0" hangingPunct="1">
-        <a:lnSpc>
-          <a:spcPct val="120000"/>
-        </a:lnSpc>
+      <a:lvl8pPr marL="2571750" indent="-171450" algn="l" defTabSz="342900" rtl="0" eaLnBrk="1" latinLnBrk="0" hangingPunct="1">
         <a:spcBef>
-          <a:spcPts val="375"/>
+          <a:spcPts val="750"/>
         </a:spcBef>
+        <a:spcAft>
+          <a:spcPts val="0"/>
+        </a:spcAft>
         <a:buClr>
           <a:schemeClr val="accent1"/>
         </a:buClr>
-        <a:buSzPct val="100000"/>
-        <a:buFont typeface="Arial" panose="020B0604020202020204" pitchFamily="34" charset="0"/>
-        <a:buChar char="•"/>
-        <a:defRPr sz="900" kern="1200" baseline="0">
+        <a:buSzPct val="80000"/>
+        <a:buFont typeface="Wingdings 3" charset="2"/>
+        <a:buChar char=""/>
+        <a:defRPr sz="900" kern="1200">
           <a:solidFill>
-            <a:schemeClr val="tx1"/>
+            <a:schemeClr val="tx1">
+              <a:lumMod val="75000"/>
+              <a:lumOff val="25000"/>
+            </a:schemeClr>
           </a:solidFill>
-          <a:effectLst/>
           <a:latin typeface="+mn-lt"/>
           <a:ea typeface="+mn-ea"/>
           <a:cs typeface="+mn-cs"/>
         </a:defRPr>
       </a:lvl8pPr>
-      <a:lvl9pPr marL="2914650" indent="-171450" algn="l" defTabSz="685800" rtl="0" eaLnBrk="1" latinLnBrk="0" hangingPunct="1">
-        <a:lnSpc>
-          <a:spcPct val="120000"/>
-        </a:lnSpc>
+      <a:lvl9pPr marL="2914650" indent="-171450" algn="l" defTabSz="342900" rtl="0" eaLnBrk="1" latinLnBrk="0" hangingPunct="1">
         <a:spcBef>
-          <a:spcPts val="375"/>
+          <a:spcPts val="750"/>
         </a:spcBef>
+        <a:spcAft>
+          <a:spcPts val="0"/>
+        </a:spcAft>
         <a:buClr>
           <a:schemeClr val="accent1"/>
         </a:buClr>
-        <a:buSzPct val="100000"/>
-        <a:buFont typeface="Arial" panose="020B0604020202020204" pitchFamily="34" charset="0"/>
-        <a:buChar char="•"/>
-        <a:defRPr sz="900" kern="1200" baseline="0">
+        <a:buSzPct val="80000"/>
+        <a:buFont typeface="Wingdings 3" charset="2"/>
+        <a:buChar char=""/>
+        <a:defRPr sz="900" kern="1200">
           <a:solidFill>
-            <a:schemeClr val="tx1"/>
+            <a:schemeClr val="tx1">
+              <a:lumMod val="75000"/>
+              <a:lumOff val="25000"/>
+            </a:schemeClr>
           </a:solidFill>
-          <a:effectLst/>
           <a:latin typeface="+mn-lt"/>
           <a:ea typeface="+mn-ea"/>
           <a:cs typeface="+mn-cs"/>
@@ -4735,7 +6874,7 @@
       <a:defPPr>
         <a:defRPr lang="en-US"/>
       </a:defPPr>
-      <a:lvl1pPr marL="0" algn="l" defTabSz="685800" rtl="0" eaLnBrk="1" latinLnBrk="0" hangingPunct="1">
+      <a:lvl1pPr marL="0" algn="l" defTabSz="342900" rtl="0" eaLnBrk="1" latinLnBrk="0" hangingPunct="1">
         <a:defRPr sz="1350" kern="1200">
           <a:solidFill>
             <a:schemeClr val="tx1"/>
@@ -4745,7 +6884,7 @@
           <a:cs typeface="+mn-cs"/>
         </a:defRPr>
       </a:lvl1pPr>
-      <a:lvl2pPr marL="342900" algn="l" defTabSz="685800" rtl="0" eaLnBrk="1" latinLnBrk="0" hangingPunct="1">
+      <a:lvl2pPr marL="342900" algn="l" defTabSz="342900" rtl="0" eaLnBrk="1" latinLnBrk="0" hangingPunct="1">
         <a:defRPr sz="1350" kern="1200">
           <a:solidFill>
             <a:schemeClr val="tx1"/>
@@ -4755,7 +6894,7 @@
           <a:cs typeface="+mn-cs"/>
         </a:defRPr>
       </a:lvl2pPr>
-      <a:lvl3pPr marL="685800" algn="l" defTabSz="685800" rtl="0" eaLnBrk="1" latinLnBrk="0" hangingPunct="1">
+      <a:lvl3pPr marL="685800" algn="l" defTabSz="342900" rtl="0" eaLnBrk="1" latinLnBrk="0" hangingPunct="1">
         <a:defRPr sz="1350" kern="1200">
           <a:solidFill>
             <a:schemeClr val="tx1"/>
@@ -4765,7 +6904,7 @@
           <a:cs typeface="+mn-cs"/>
         </a:defRPr>
       </a:lvl3pPr>
-      <a:lvl4pPr marL="1028700" algn="l" defTabSz="685800" rtl="0" eaLnBrk="1" latinLnBrk="0" hangingPunct="1">
+      <a:lvl4pPr marL="1028700" algn="l" defTabSz="342900" rtl="0" eaLnBrk="1" latinLnBrk="0" hangingPunct="1">
         <a:defRPr sz="1350" kern="1200">
           <a:solidFill>
             <a:schemeClr val="tx1"/>
@@ -4775,7 +6914,7 @@
           <a:cs typeface="+mn-cs"/>
         </a:defRPr>
       </a:lvl4pPr>
-      <a:lvl5pPr marL="1371600" algn="l" defTabSz="685800" rtl="0" eaLnBrk="1" latinLnBrk="0" hangingPunct="1">
+      <a:lvl5pPr marL="1371600" algn="l" defTabSz="342900" rtl="0" eaLnBrk="1" latinLnBrk="0" hangingPunct="1">
         <a:defRPr sz="1350" kern="1200">
           <a:solidFill>
             <a:schemeClr val="tx1"/>
@@ -4785,7 +6924,7 @@
           <a:cs typeface="+mn-cs"/>
         </a:defRPr>
       </a:lvl5pPr>
-      <a:lvl6pPr marL="1714500" algn="l" defTabSz="685800" rtl="0" eaLnBrk="1" latinLnBrk="0" hangingPunct="1">
+      <a:lvl6pPr marL="1714500" algn="l" defTabSz="342900" rtl="0" eaLnBrk="1" latinLnBrk="0" hangingPunct="1">
         <a:defRPr sz="1350" kern="1200">
           <a:solidFill>
             <a:schemeClr val="tx1"/>
@@ -4795,7 +6934,7 @@
           <a:cs typeface="+mn-cs"/>
         </a:defRPr>
       </a:lvl6pPr>
-      <a:lvl7pPr marL="2057400" algn="l" defTabSz="685800" rtl="0" eaLnBrk="1" latinLnBrk="0" hangingPunct="1">
+      <a:lvl7pPr marL="2057400" algn="l" defTabSz="342900" rtl="0" eaLnBrk="1" latinLnBrk="0" hangingPunct="1">
         <a:defRPr sz="1350" kern="1200">
           <a:solidFill>
             <a:schemeClr val="tx1"/>
@@ -4805,7 +6944,7 @@
           <a:cs typeface="+mn-cs"/>
         </a:defRPr>
       </a:lvl7pPr>
-      <a:lvl8pPr marL="2400300" algn="l" defTabSz="685800" rtl="0" eaLnBrk="1" latinLnBrk="0" hangingPunct="1">
+      <a:lvl8pPr marL="2400300" algn="l" defTabSz="342900" rtl="0" eaLnBrk="1" latinLnBrk="0" hangingPunct="1">
         <a:defRPr sz="1350" kern="1200">
           <a:solidFill>
             <a:schemeClr val="tx1"/>
@@ -4815,7 +6954,7 @@
           <a:cs typeface="+mn-cs"/>
         </a:defRPr>
       </a:lvl8pPr>
-      <a:lvl9pPr marL="2743200" algn="l" defTabSz="685800" rtl="0" eaLnBrk="1" latinLnBrk="0" hangingPunct="1">
+      <a:lvl9pPr marL="2743200" algn="l" defTabSz="342900" rtl="0" eaLnBrk="1" latinLnBrk="0" hangingPunct="1">
         <a:defRPr sz="1350" kern="1200">
           <a:solidFill>
             <a:schemeClr val="tx1"/>
@@ -4827,6 +6966,11 @@
       </a:lvl9pPr>
     </p:otherStyle>
   </p:txStyles>
+  <p:extLst>
+    <p:ext uri="{27BBF7A9-308A-43DC-89C8-2F10F3537804}">
+      <p15:sldGuideLst xmlns:p15="http://schemas.microsoft.com/office/powerpoint/2012/main"/>
+    </p:ext>
+  </p:extLst>
 </p:sldMaster>
 </file>
 
@@ -5151,13 +7295,13 @@
   <p:clrMapOvr>
     <a:masterClrMapping/>
   </p:clrMapOvr>
-  <mc:AlternateContent xmlns:mc="http://schemas.openxmlformats.org/markup-compatibility/2006">
-    <mc:Choice xmlns:p15="http://schemas.microsoft.com/office/powerpoint/2012/main" Requires="p15">
+  <mc:AlternateContent xmlns:mc="http://schemas.openxmlformats.org/markup-compatibility/2006" xmlns:p15="http://schemas.microsoft.com/office/powerpoint/2012/main">
+    <mc:Choice Requires="p15">
       <p:transition xmlns:p14="http://schemas.microsoft.com/office/powerpoint/2010/main" spd="slow" p14:dur="2000" advTm="0">
         <p15:prstTrans prst="drape"/>
       </p:transition>
     </mc:Choice>
-    <mc:Fallback>
+    <mc:Fallback xmlns="">
       <p:transition spd="slow" advTm="0">
         <p:fade/>
       </p:transition>
@@ -5917,13 +8061,13 @@
   <p:clrMapOvr>
     <a:masterClrMapping/>
   </p:clrMapOvr>
-  <mc:AlternateContent xmlns:mc="http://schemas.openxmlformats.org/markup-compatibility/2006">
-    <mc:Choice xmlns:p15="http://schemas.microsoft.com/office/powerpoint/2012/main" Requires="p15">
+  <mc:AlternateContent xmlns:mc="http://schemas.openxmlformats.org/markup-compatibility/2006" xmlns:p15="http://schemas.microsoft.com/office/powerpoint/2012/main">
+    <mc:Choice Requires="p15">
       <p:transition xmlns:p14="http://schemas.microsoft.com/office/powerpoint/2010/main" spd="slow" p14:dur="2000" advTm="0">
         <p15:prstTrans prst="drape"/>
       </p:transition>
     </mc:Choice>
-    <mc:Fallback>
+    <mc:Fallback xmlns="">
       <p:transition spd="slow" advTm="0">
         <p:fade/>
       </p:transition>
@@ -6156,13 +8300,13 @@
   <p:clrMapOvr>
     <a:masterClrMapping/>
   </p:clrMapOvr>
-  <mc:AlternateContent xmlns:mc="http://schemas.openxmlformats.org/markup-compatibility/2006">
-    <mc:Choice xmlns:p15="http://schemas.microsoft.com/office/powerpoint/2012/main" Requires="p15">
-      <p:transition xmlns:p14="http://schemas.microsoft.com/office/powerpoint/2010/main" spd="slow" p14:dur="2000" advTm="0">
+  <mc:AlternateContent xmlns:mc="http://schemas.openxmlformats.org/markup-compatibility/2006" xmlns:p15="http://schemas.microsoft.com/office/powerpoint/2012/main">
+    <mc:Choice Requires="p15">
+      <p:transition xmlns:p14="http://schemas.microsoft.com/office/powerpoint/2010/main" spd="slow" p14:dur="2000">
         <p15:prstTrans prst="drape"/>
       </p:transition>
     </mc:Choice>
-    <mc:Fallback>
+    <mc:Fallback xmlns="">
       <p:transition spd="slow" advTm="0">
         <p:fade/>
       </p:transition>
@@ -6949,13 +9093,13 @@
   <p:clrMapOvr>
     <a:masterClrMapping/>
   </p:clrMapOvr>
-  <mc:AlternateContent xmlns:mc="http://schemas.openxmlformats.org/markup-compatibility/2006">
-    <mc:Choice xmlns:p15="http://schemas.microsoft.com/office/powerpoint/2012/main" Requires="p15">
+  <mc:AlternateContent xmlns:mc="http://schemas.openxmlformats.org/markup-compatibility/2006" xmlns:p15="http://schemas.microsoft.com/office/powerpoint/2012/main">
+    <mc:Choice Requires="p15">
       <p:transition xmlns:p14="http://schemas.microsoft.com/office/powerpoint/2010/main" spd="slow" p14:dur="2000" advTm="0">
         <p15:prstTrans prst="drape"/>
       </p:transition>
     </mc:Choice>
-    <mc:Fallback>
+    <mc:Fallback xmlns="">
       <p:transition spd="slow" advTm="0">
         <p:fade/>
       </p:transition>
@@ -8052,13 +10196,13 @@
   <p:clrMapOvr>
     <a:masterClrMapping/>
   </p:clrMapOvr>
-  <mc:AlternateContent xmlns:mc="http://schemas.openxmlformats.org/markup-compatibility/2006">
-    <mc:Choice xmlns:p15="http://schemas.microsoft.com/office/powerpoint/2012/main" Requires="p15">
+  <mc:AlternateContent xmlns:mc="http://schemas.openxmlformats.org/markup-compatibility/2006" xmlns:p15="http://schemas.microsoft.com/office/powerpoint/2012/main">
+    <mc:Choice Requires="p15">
       <p:transition xmlns:p14="http://schemas.microsoft.com/office/powerpoint/2010/main" spd="slow" p14:dur="2000" advTm="0">
         <p15:prstTrans prst="drape"/>
       </p:transition>
     </mc:Choice>
-    <mc:Fallback>
+    <mc:Fallback xmlns="">
       <p:transition spd="slow" advTm="0">
         <p:fade/>
       </p:transition>
@@ -8392,13 +10536,13 @@
   <p:clrMapOvr>
     <a:masterClrMapping/>
   </p:clrMapOvr>
-  <mc:AlternateContent xmlns:mc="http://schemas.openxmlformats.org/markup-compatibility/2006">
-    <mc:Choice xmlns:p15="http://schemas.microsoft.com/office/powerpoint/2012/main" Requires="p15">
+  <mc:AlternateContent xmlns:mc="http://schemas.openxmlformats.org/markup-compatibility/2006" xmlns:p15="http://schemas.microsoft.com/office/powerpoint/2012/main">
+    <mc:Choice Requires="p15">
       <p:transition xmlns:p14="http://schemas.microsoft.com/office/powerpoint/2010/main" spd="slow" p14:dur="2000" advTm="0">
         <p15:prstTrans prst="drape"/>
       </p:transition>
     </mc:Choice>
-    <mc:Fallback>
+    <mc:Fallback xmlns="">
       <p:transition spd="slow" advTm="0">
         <p:fade/>
       </p:transition>
@@ -9157,13 +11301,13 @@
   <p:clrMapOvr>
     <a:masterClrMapping/>
   </p:clrMapOvr>
-  <mc:AlternateContent xmlns:mc="http://schemas.openxmlformats.org/markup-compatibility/2006">
-    <mc:Choice xmlns:p15="http://schemas.microsoft.com/office/powerpoint/2012/main" Requires="p15">
+  <mc:AlternateContent xmlns:mc="http://schemas.openxmlformats.org/markup-compatibility/2006" xmlns:p15="http://schemas.microsoft.com/office/powerpoint/2012/main">
+    <mc:Choice Requires="p15">
       <p:transition xmlns:p14="http://schemas.microsoft.com/office/powerpoint/2010/main" spd="slow" p14:dur="2000" advTm="0">
         <p15:prstTrans prst="drape"/>
       </p:transition>
     </mc:Choice>
-    <mc:Fallback>
+    <mc:Fallback xmlns="">
       <p:transition spd="slow" advTm="0">
         <p:fade/>
       </p:transition>
@@ -9225,7 +11369,7 @@
         </p:nvSpPr>
         <p:spPr>
           <a:xfrm>
-            <a:off x="496120" y="963662"/>
+            <a:off x="406822" y="435749"/>
             <a:ext cx="8151763" cy="387548"/>
           </a:xfrm>
           <a:prstGeom prst="rect">
@@ -9266,7 +11410,7 @@
         </p:nvSpPr>
         <p:spPr>
           <a:xfrm>
-            <a:off x="496120" y="1537248"/>
+            <a:off x="496120" y="1051571"/>
             <a:ext cx="8151763" cy="396925"/>
           </a:xfrm>
           <a:prstGeom prst="rect">
@@ -9774,13 +11918,13 @@
   <p:clrMapOvr>
     <a:masterClrMapping/>
   </p:clrMapOvr>
-  <mc:AlternateContent xmlns:mc="http://schemas.openxmlformats.org/markup-compatibility/2006">
-    <mc:Choice xmlns:p15="http://schemas.microsoft.com/office/powerpoint/2012/main" Requires="p15">
+  <mc:AlternateContent xmlns:mc="http://schemas.openxmlformats.org/markup-compatibility/2006" xmlns:p15="http://schemas.microsoft.com/office/powerpoint/2012/main">
+    <mc:Choice Requires="p15">
       <p:transition xmlns:p14="http://schemas.microsoft.com/office/powerpoint/2010/main" spd="slow" p14:dur="2000" advTm="0">
         <p15:prstTrans prst="drape"/>
       </p:transition>
     </mc:Choice>
-    <mc:Fallback>
+    <mc:Fallback xmlns="">
       <p:transition spd="slow" advTm="0">
         <p:fade/>
       </p:transition>
@@ -10252,13 +12396,13 @@
   <p:clrMapOvr>
     <a:masterClrMapping/>
   </p:clrMapOvr>
-  <mc:AlternateContent xmlns:mc="http://schemas.openxmlformats.org/markup-compatibility/2006">
-    <mc:Choice xmlns:p15="http://schemas.microsoft.com/office/powerpoint/2012/main" Requires="p15">
+  <mc:AlternateContent xmlns:mc="http://schemas.openxmlformats.org/markup-compatibility/2006" xmlns:p15="http://schemas.microsoft.com/office/powerpoint/2012/main">
+    <mc:Choice Requires="p15">
       <p:transition xmlns:p14="http://schemas.microsoft.com/office/powerpoint/2010/main" spd="slow" p14:dur="2000" advTm="0">
         <p15:prstTrans prst="drape"/>
       </p:transition>
     </mc:Choice>
-    <mc:Fallback>
+    <mc:Fallback xmlns="">
       <p:transition spd="slow" advTm="0">
         <p:fade/>
       </p:transition>
@@ -10895,13 +13039,13 @@
   <p:clrMapOvr>
     <a:masterClrMapping/>
   </p:clrMapOvr>
-  <mc:AlternateContent xmlns:mc="http://schemas.openxmlformats.org/markup-compatibility/2006">
-    <mc:Choice xmlns:p15="http://schemas.microsoft.com/office/powerpoint/2012/main" Requires="p15">
+  <mc:AlternateContent xmlns:mc="http://schemas.openxmlformats.org/markup-compatibility/2006" xmlns:p15="http://schemas.microsoft.com/office/powerpoint/2012/main">
+    <mc:Choice Requires="p15">
       <p:transition xmlns:p14="http://schemas.microsoft.com/office/powerpoint/2010/main" spd="slow" p14:dur="2000" advTm="0">
         <p15:prstTrans prst="drape"/>
       </p:transition>
     </mc:Choice>
-    <mc:Fallback>
+    <mc:Fallback xmlns="">
       <p:transition spd="slow" advTm="0">
         <p:fade/>
       </p:transition>
@@ -11726,13 +13870,13 @@
   <p:clrMapOvr>
     <a:masterClrMapping/>
   </p:clrMapOvr>
-  <mc:AlternateContent xmlns:mc="http://schemas.openxmlformats.org/markup-compatibility/2006">
-    <mc:Choice xmlns:p15="http://schemas.microsoft.com/office/powerpoint/2012/main" Requires="p15">
+  <mc:AlternateContent xmlns:mc="http://schemas.openxmlformats.org/markup-compatibility/2006" xmlns:p15="http://schemas.microsoft.com/office/powerpoint/2012/main">
+    <mc:Choice Requires="p15">
       <p:transition xmlns:p14="http://schemas.microsoft.com/office/powerpoint/2010/main" spd="slow" p14:dur="2000" advTm="0">
         <p15:prstTrans prst="drape"/>
       </p:transition>
     </mc:Choice>
-    <mc:Fallback>
+    <mc:Fallback xmlns="">
       <p:transition spd="slow" advTm="0">
         <p:fade/>
       </p:transition>
@@ -11742,9 +13886,9 @@
 </file>
 
 <file path=ppt/theme/theme1.xml><?xml version="1.0" encoding="utf-8"?>
-<a:theme xmlns:a="http://schemas.openxmlformats.org/drawingml/2006/main" name="Gallery">
+<a:theme xmlns:a="http://schemas.openxmlformats.org/drawingml/2006/main" name="Facet">
   <a:themeElements>
-    <a:clrScheme name="Gallery">
+    <a:clrScheme name="Facet">
       <a:dk1>
         <a:sysClr val="windowText" lastClr="000000"/>
       </a:dk1>
@@ -11752,52 +13896,52 @@
         <a:sysClr val="window" lastClr="FFFFFF"/>
       </a:lt1>
       <a:dk2>
-        <a:srgbClr val="454545"/>
+        <a:srgbClr val="2C3C43"/>
       </a:dk2>
       <a:lt2>
-        <a:srgbClr val="DFDBD5"/>
+        <a:srgbClr val="EBEBEB"/>
       </a:lt2>
       <a:accent1>
-        <a:srgbClr val="B71E42"/>
+        <a:srgbClr val="90C226"/>
       </a:accent1>
       <a:accent2>
-        <a:srgbClr val="DE478E"/>
+        <a:srgbClr val="54A021"/>
       </a:accent2>
       <a:accent3>
-        <a:srgbClr val="BC72F0"/>
+        <a:srgbClr val="E6B91E"/>
       </a:accent3>
       <a:accent4>
-        <a:srgbClr val="795FAF"/>
+        <a:srgbClr val="E76618"/>
       </a:accent4>
       <a:accent5>
-        <a:srgbClr val="586EA6"/>
+        <a:srgbClr val="C42F1A"/>
       </a:accent5>
       <a:accent6>
-        <a:srgbClr val="6892A0"/>
+        <a:srgbClr val="918655"/>
       </a:accent6>
       <a:hlink>
-        <a:srgbClr val="FA2B5C"/>
+        <a:srgbClr val="99CA3C"/>
       </a:hlink>
       <a:folHlink>
-        <a:srgbClr val="BC658E"/>
+        <a:srgbClr val="B9D181"/>
       </a:folHlink>
     </a:clrScheme>
-    <a:fontScheme name="Gallery">
+    <a:fontScheme name="Facet">
       <a:majorFont>
-        <a:latin typeface="Gill Sans MT" panose="020B0502020104020203"/>
+        <a:latin typeface="Trebuchet MS" panose="020B0603020202020204"/>
         <a:ea typeface=""/>
         <a:cs typeface=""/>
-        <a:font script="Jpan" typeface="游ゴシック Light"/>
+        <a:font script="Jpan" typeface="メイリオ"/>
         <a:font script="Hang" typeface="맑은 고딕"/>
-        <a:font script="Hans" typeface="等线 Light"/>
-        <a:font script="Hant" typeface="新細明體"/>
-        <a:font script="Arab" typeface="Times New Roman"/>
-        <a:font script="Hebr" typeface="Times New Roman"/>
-        <a:font script="Thai" typeface="Angsana New"/>
+        <a:font script="Hans" typeface="方正姚体"/>
+        <a:font script="Hant" typeface="微軟正黑體"/>
+        <a:font script="Arab" typeface="Tahoma"/>
+        <a:font script="Hebr" typeface="Arial"/>
+        <a:font script="Thai" typeface="Cordia New"/>
         <a:font script="Ethi" typeface="Nyala"/>
         <a:font script="Beng" typeface="Vrinda"/>
         <a:font script="Gujr" typeface="Shruti"/>
-        <a:font script="Khmr" typeface="MoolBoran"/>
+        <a:font script="Khmr" typeface="DaunPenh"/>
         <a:font script="Knda" typeface="Tunga"/>
         <a:font script="Guru" typeface="Raavi"/>
         <a:font script="Cans" typeface="Euphemia"/>
@@ -11814,21 +13958,21 @@
         <a:font script="Laoo" typeface="DokChampa"/>
         <a:font script="Sinh" typeface="Iskoola Pota"/>
         <a:font script="Mong" typeface="Mongolian Baiti"/>
-        <a:font script="Viet" typeface="Times New Roman"/>
+        <a:font script="Viet" typeface="Tahoma"/>
         <a:font script="Uigh" typeface="Microsoft Uighur"/>
         <a:font script="Geor" typeface="Sylfaen"/>
       </a:majorFont>
       <a:minorFont>
-        <a:latin typeface="Gill Sans MT" panose="020B0502020104020203"/>
+        <a:latin typeface="Trebuchet MS" panose="020B0603020202020204"/>
         <a:ea typeface=""/>
         <a:cs typeface=""/>
-        <a:font script="Jpan" typeface="游ゴシック"/>
-        <a:font script="Hang" typeface="맑은 고딕"/>
-        <a:font script="Hans" typeface="等线"/>
-        <a:font script="Hant" typeface="新細明體"/>
-        <a:font script="Arab" typeface="Arial"/>
-        <a:font script="Hebr" typeface="Arial"/>
-        <a:font script="Thai" typeface="Cordia New"/>
+        <a:font script="Jpan" typeface="メイリオ"/>
+        <a:font script="Hang" typeface="HY그래픽M"/>
+        <a:font script="Hans" typeface="华文新魏"/>
+        <a:font script="Hant" typeface="微軟正黑體"/>
+        <a:font script="Arab" typeface="Tahoma"/>
+        <a:font script="Hebr" typeface="Gisha"/>
+        <a:font script="Thai" typeface="IrisUPC"/>
         <a:font script="Ethi" typeface="Nyala"/>
         <a:font script="Beng" typeface="Vrinda"/>
         <a:font script="Gujr" typeface="Shruti"/>
@@ -11854,7 +13998,7 @@
         <a:font script="Geor" typeface="Sylfaen"/>
       </a:minorFont>
     </a:fontScheme>
-    <a:fmtScheme name="Gallery">
+    <a:fmtScheme name="Facet">
       <a:fillStyleLst>
         <a:solidFill>
           <a:schemeClr val="phClr"/>
@@ -11863,18 +14007,13 @@
           <a:gsLst>
             <a:gs pos="0">
               <a:schemeClr val="phClr">
-                <a:tint val="54000"/>
-                <a:alpha val="100000"/>
-                <a:satMod val="105000"/>
+                <a:tint val="65000"/>
                 <a:lumMod val="110000"/>
               </a:schemeClr>
             </a:gs>
-            <a:gs pos="100000">
+            <a:gs pos="88000">
               <a:schemeClr val="phClr">
-                <a:tint val="78000"/>
-                <a:alpha val="92000"/>
-                <a:satMod val="109000"/>
-                <a:lumMod val="100000"/>
+                <a:tint val="90000"/>
               </a:schemeClr>
             </a:gs>
           </a:gsLst>
@@ -11884,23 +14023,14 @@
           <a:gsLst>
             <a:gs pos="0">
               <a:schemeClr val="phClr">
-                <a:tint val="98000"/>
-                <a:satMod val="110000"/>
-                <a:lumMod val="104000"/>
+                <a:tint val="96000"/>
+                <a:lumMod val="100000"/>
               </a:schemeClr>
             </a:gs>
-            <a:gs pos="69000">
+            <a:gs pos="78000">
               <a:schemeClr val="phClr">
-                <a:shade val="88000"/>
-                <a:satMod val="130000"/>
-                <a:lumMod val="92000"/>
-              </a:schemeClr>
-            </a:gs>
-            <a:gs pos="100000">
-              <a:schemeClr val="phClr">
-                <a:shade val="78000"/>
-                <a:satMod val="130000"/>
-                <a:lumMod val="92000"/>
+                <a:shade val="94000"/>
+                <a:lumMod val="94000"/>
               </a:schemeClr>
             </a:gs>
           </a:gsLst>
@@ -11908,19 +14038,19 @@
         </a:gradFill>
       </a:fillStyleLst>
       <a:lnStyleLst>
-        <a:ln w="9525" cap="flat" cmpd="sng" algn="ctr">
+        <a:ln w="12700" cap="rnd" cmpd="sng" algn="ctr">
           <a:solidFill>
             <a:schemeClr val="phClr"/>
           </a:solidFill>
           <a:prstDash val="solid"/>
         </a:ln>
-        <a:ln w="15875" cap="flat" cmpd="sng" algn="ctr">
+        <a:ln w="19050" cap="rnd" cmpd="sng" algn="ctr">
           <a:solidFill>
             <a:schemeClr val="phClr"/>
           </a:solidFill>
           <a:prstDash val="solid"/>
         </a:ln>
-        <a:ln w="22225" cap="flat" cmpd="sng" algn="ctr">
+        <a:ln w="25400" cap="rnd" cmpd="sng" algn="ctr">
           <a:solidFill>
             <a:schemeClr val="phClr"/>
           </a:solidFill>
@@ -11932,13 +14062,19 @@
           <a:effectLst/>
         </a:effectStyle>
         <a:effectStyle>
-          <a:effectLst/>
+          <a:effectLst>
+            <a:outerShdw blurRad="38100" dist="25400" dir="5400000" rotWithShape="0">
+              <a:srgbClr val="000000">
+                <a:alpha val="35000"/>
+              </a:srgbClr>
+            </a:outerShdw>
+          </a:effectLst>
         </a:effectStyle>
         <a:effectStyle>
           <a:effectLst>
-            <a:outerShdw blurRad="50800" dist="50800" dir="5400000" sx="96000" sy="96000" rotWithShape="0">
+            <a:outerShdw blurRad="50800" dist="38100" dir="5400000" rotWithShape="0">
               <a:srgbClr val="000000">
-                <a:alpha val="48000"/>
+                <a:alpha val="35000"/>
               </a:srgbClr>
             </a:outerShdw>
           </a:effectLst>
@@ -11946,12 +14082,10 @@
             <a:camera prst="orthographicFront">
               <a:rot lat="0" lon="0" rev="0"/>
             </a:camera>
-            <a:lightRig rig="balanced" dir="t">
-              <a:rot lat="0" lon="0" rev="1080000"/>
-            </a:lightRig>
+            <a:lightRig rig="threePt" dir="tl"/>
           </a:scene3d>
-          <a:sp3d>
-            <a:bevelT w="38100" h="12700" prst="softRound"/>
+          <a:sp3d prstMaterial="plastic">
+            <a:bevelT w="0" h="0"/>
           </a:sp3d>
         </a:effectStyle>
       </a:effectStyleLst>
@@ -11959,26 +14093,40 @@
         <a:solidFill>
           <a:schemeClr val="phClr"/>
         </a:solidFill>
-        <a:solidFill>
-          <a:schemeClr val="phClr"/>
-        </a:solidFill>
         <a:gradFill rotWithShape="1">
           <a:gsLst>
             <a:gs pos="0">
               <a:schemeClr val="phClr">
-                <a:tint val="94000"/>
-                <a:satMod val="80000"/>
-                <a:lumMod val="106000"/>
+                <a:tint val="90000"/>
+                <a:lumMod val="104000"/>
+              </a:schemeClr>
+            </a:gs>
+            <a:gs pos="94000">
+              <a:schemeClr val="phClr">
+                <a:shade val="96000"/>
+                <a:lumMod val="82000"/>
+              </a:schemeClr>
+            </a:gs>
+          </a:gsLst>
+          <a:lin ang="5400000" scaled="0"/>
+        </a:gradFill>
+        <a:gradFill rotWithShape="1">
+          <a:gsLst>
+            <a:gs pos="0">
+              <a:schemeClr val="phClr">
+                <a:tint val="90000"/>
+                <a:lumMod val="110000"/>
               </a:schemeClr>
             </a:gs>
             <a:gs pos="100000">
               <a:schemeClr val="phClr">
-                <a:shade val="80000"/>
+                <a:shade val="94000"/>
+                <a:lumMod val="96000"/>
               </a:schemeClr>
             </a:gs>
           </a:gsLst>
           <a:path path="circle">
-            <a:fillToRect l="43000" r="43000" b="100000"/>
+            <a:fillToRect l="50000" t="50000" r="100000" b="100000"/>
           </a:path>
         </a:gradFill>
       </a:bgFillStyleLst>
@@ -11988,7 +14136,7 @@
   <a:extraClrSchemeLst/>
   <a:extLst>
     <a:ext uri="{05A4C25C-085E-4340-85A3-A5531E510DB2}">
-      <thm15:themeFamily xmlns:thm15="http://schemas.microsoft.com/office/thememl/2012/main" name="Gallery" id="{BBFCD31E-59A1-489D-B089-A3EAD7CAE12E}" vid="{F5E91637-A7B6-4E27-B710-77DA7014EE1E}"/>
+      <thm15:themeFamily xmlns:thm15="http://schemas.microsoft.com/office/thememl/2012/main" name="Facet" id="{C0C680CD-088A-49FC-A102-D699147F32B2}" vid="{CFBC31BA-B70F-4F30-BCAA-4F3011E16C4D}"/>
     </a:ext>
   </a:extLst>
 </a:theme>
